--- a/reports/2026-07-11/full-portfolio-scan_2026-07-11.pptx
+++ b/reports/2026-07-11/full-portfolio-scan_2026-07-11.pptx
@@ -1567,7 +1567,7 @@
                   <a:srgbClr val="4DA6FF"/>
                 </a:solidFill>
               </a:rPr>
-              <a:t>V4.0投研体系·27只标的</a:t>
+              <a:t>V4.0投研体系·19只标的</a:t>
             </a:r>
             <a:endParaRPr lang="en-US" sz="2200" dirty="0"/>
           </a:p>
@@ -1598,14 +1598,14 @@
               <a:buNone/>
             </a:pPr>
             <a:r>
-              <a:rPr lang="en-US" sz="1500" dirty="0">
+              <a:rPr lang="en-US" sz="1600" dirty="0">
                 <a:solidFill>
                   <a:srgbClr val="F0A040"/>
                 </a:solidFill>
               </a:rPr>
-              <a:t>五阶段定位+六大卡点+驱动力判断+仓位建议</a:t>
-            </a:r>
-            <a:endParaRPr lang="en-US" sz="1500" dirty="0"/>
+              <a:t>持仓12只 + 观察跟踪7只</a:t>
+            </a:r>
+            <a:endParaRPr lang="en-US" sz="1600" dirty="0"/>
           </a:p>
         </p:txBody>
       </p:sp>
@@ -1617,7 +1617,7 @@
         </p:nvSpPr>
         <p:spPr>
           <a:xfrm>
-            <a:off x="457200" y="3200400"/>
+            <a:off x="457200" y="3108960"/>
             <a:ext cx="8229600" cy="365760"/>
           </a:xfrm>
           <a:prstGeom prst="rect">
@@ -1639,7 +1639,7 @@
                   <a:srgbClr val="8E8EA0"/>
                 </a:solidFill>
               </a:rPr>
-              <a:t>2026年7月11日 · Wind数据</a:t>
+              <a:t>五阶段定位+六大卡点+驱动力+仓位建议 | 2026-07-11 · Wind数据</a:t>
             </a:r>
             <a:endParaRPr lang="en-US" sz="1300" dirty="0"/>
           </a:p>
@@ -1710,7 +1710,7 @@
                 <a:ea typeface="Arial Black" pitchFamily="34" charset="-122"/>
                 <a:cs typeface="Arial Black" pitchFamily="34" charset="-120"/>
               </a:rPr>
-              <a:t>全景概览</a:t>
+              <a:t>持仓·S级核心（4只）</a:t>
             </a:r>
             <a:endParaRPr lang="en-US" sz="2600" dirty="0"/>
           </a:p>
@@ -1744,12 +1744,12 @@
         </p:nvSpPr>
         <p:spPr>
           <a:xfrm>
-            <a:off x="274320" y="1280160"/>
-            <a:ext cx="2011680" cy="1463040"/>
+            <a:off x="274320" y="1188720"/>
+            <a:ext cx="8595360" cy="822960"/>
           </a:xfrm>
           <a:prstGeom prst="roundRect">
             <a:avLst>
-              <a:gd name="adj" fmla="val 6250"/>
+              <a:gd name="adj" fmla="val 8889"/>
             </a:avLst>
           </a:prstGeom>
           <a:solidFill>
@@ -1757,7 +1757,7 @@
           </a:solidFill>
           <a:ln w="12700">
             <a:solidFill>
-              <a:srgbClr val="3DD68C"/>
+              <a:srgbClr val="F0A040"/>
             </a:solidFill>
             <a:prstDash val="solid"/>
           </a:ln>
@@ -1771,51 +1771,123 @@
         </p:nvSpPr>
         <p:spPr>
           <a:xfrm>
-            <a:off x="274320" y="1554480"/>
-            <a:ext cx="2011680" cy="1005840"/>
-          </a:xfrm>
-          <a:prstGeom prst="rect">
-            <a:avLst/>
-          </a:prstGeom>
-          <a:noFill/>
-          <a:ln/>
-        </p:spPr>
-        <p:txBody>
-          <a:bodyPr wrap="square" lIns="0" tIns="0" rIns="0" bIns="0" rtlCol="0" anchor="ctr"/>
-          <a:lstStyle/>
-          <a:p>
-            <a:pPr algn="ctr" indent="0" marL="0">
-              <a:buNone/>
-            </a:pPr>
-            <a:r>
-              <a:rPr lang="en-US" sz="3200" dirty="0">
-                <a:solidFill>
-                  <a:srgbClr val="4DA6FF"/>
+            <a:off x="457200" y="1280160"/>
+            <a:ext cx="1645920" cy="320040"/>
+          </a:xfrm>
+          <a:prstGeom prst="rect">
+            <a:avLst/>
+          </a:prstGeom>
+          <a:noFill/>
+          <a:ln/>
+        </p:spPr>
+        <p:txBody>
+          <a:bodyPr wrap="square" lIns="0" tIns="0" rIns="0" bIns="0" rtlCol="0" anchor="ctr"/>
+          <a:lstStyle/>
+          <a:p>
+            <a:pPr indent="0" marL="0">
+              <a:buNone/>
+            </a:pPr>
+            <a:r>
+              <a:rPr lang="en-US" sz="1400" b="1" dirty="0">
+                <a:solidFill>
+                  <a:srgbClr val="F0A040"/>
                 </a:solidFill>
                 <a:latin typeface="Arial Black" pitchFamily="34" charset="0"/>
                 <a:ea typeface="Arial Black" pitchFamily="34" charset="-122"/>
                 <a:cs typeface="Arial Black" pitchFamily="34" charset="-120"/>
               </a:rPr>
-              <a:t>12</a:t>
-            </a:r>
-            <a:endParaRPr lang="en-US" sz="3200" dirty="0"/>
-          </a:p>
-        </p:txBody>
-      </p:sp>
-      <p:sp>
-        <p:nvSpPr>
-          <p:cNvPr id="6" name="Shape 4"/>
-          <p:cNvSpPr/>
-          <p:nvPr/>
-        </p:nvSpPr>
-        <p:spPr>
-          <a:xfrm>
-            <a:off x="2468880" y="1280160"/>
-            <a:ext cx="2011680" cy="1463040"/>
+              <a:t>澜起科技</a:t>
+            </a:r>
+            <a:endParaRPr lang="en-US" sz="1400" dirty="0"/>
+          </a:p>
+        </p:txBody>
+      </p:sp>
+      <p:sp>
+        <p:nvSpPr>
+          <p:cNvPr id="6" name="Text 4"/>
+          <p:cNvSpPr/>
+          <p:nvPr/>
+        </p:nvSpPr>
+        <p:spPr>
+          <a:xfrm>
+            <a:off x="457200" y="1600200"/>
+            <a:ext cx="4572000" cy="320040"/>
+          </a:xfrm>
+          <a:prstGeom prst="rect">
+            <a:avLst/>
+          </a:prstGeom>
+          <a:noFill/>
+          <a:ln/>
+        </p:spPr>
+        <p:txBody>
+          <a:bodyPr wrap="square" lIns="0" tIns="0" rIns="0" bIns="0" rtlCol="0" anchor="ctr"/>
+          <a:lstStyle/>
+          <a:p>
+            <a:pPr indent="0" marL="0">
+              <a:buNone/>
+            </a:pPr>
+            <a:r>
+              <a:rPr lang="en-US" sz="1200" dirty="0">
+                <a:solidFill>
+                  <a:srgbClr val="E4E4E8"/>
+                </a:solidFill>
+              </a:rPr>
+              <a:t>3299亿·127.9x · ②③双卡</a:t>
+            </a:r>
+            <a:endParaRPr lang="en-US" sz="1200" dirty="0"/>
+          </a:p>
+        </p:txBody>
+      </p:sp>
+      <p:sp>
+        <p:nvSpPr>
+          <p:cNvPr id="7" name="Text 5"/>
+          <p:cNvSpPr/>
+          <p:nvPr/>
+        </p:nvSpPr>
+        <p:spPr>
+          <a:xfrm>
+            <a:off x="5029200" y="1371600"/>
+            <a:ext cx="3840480" cy="457200"/>
+          </a:xfrm>
+          <a:prstGeom prst="rect">
+            <a:avLst/>
+          </a:prstGeom>
+          <a:noFill/>
+          <a:ln/>
+        </p:spPr>
+        <p:txBody>
+          <a:bodyPr wrap="square" lIns="0" tIns="0" rIns="0" bIns="0" rtlCol="0" anchor="ctr"/>
+          <a:lstStyle/>
+          <a:p>
+            <a:pPr indent="0" marL="0">
+              <a:buNone/>
+            </a:pPr>
+            <a:r>
+              <a:rPr lang="en-US" sz="1100" dirty="0">
+                <a:solidFill>
+                  <a:srgbClr val="8E8EA0"/>
+                </a:solidFill>
+              </a:rPr>
+              <a:t>底仓不动·内存接口断层第一 · 3→4</a:t>
+            </a:r>
+            <a:endParaRPr lang="en-US" sz="1100" dirty="0"/>
+          </a:p>
+        </p:txBody>
+      </p:sp>
+      <p:sp>
+        <p:nvSpPr>
+          <p:cNvPr id="8" name="Shape 6"/>
+          <p:cNvSpPr/>
+          <p:nvPr/>
+        </p:nvSpPr>
+        <p:spPr>
+          <a:xfrm>
+            <a:off x="274320" y="2148840"/>
+            <a:ext cx="8595360" cy="822960"/>
           </a:xfrm>
           <a:prstGeom prst="roundRect">
             <a:avLst>
-              <a:gd name="adj" fmla="val 6250"/>
+              <a:gd name="adj" fmla="val 8889"/>
             </a:avLst>
           </a:prstGeom>
           <a:solidFill>
@@ -1823,7 +1895,7 @@
           </a:solidFill>
           <a:ln w="12700">
             <a:solidFill>
-              <a:srgbClr val="3DD68C"/>
+              <a:srgbClr val="F0A040"/>
             </a:solidFill>
             <a:prstDash val="solid"/>
           </a:ln>
@@ -1831,54 +1903,129 @@
       </p:sp>
       <p:sp>
         <p:nvSpPr>
-          <p:cNvPr id="7" name="Text 5"/>
-          <p:cNvSpPr/>
-          <p:nvPr/>
-        </p:nvSpPr>
-        <p:spPr>
-          <a:xfrm>
-            <a:off x="2468880" y="1554480"/>
-            <a:ext cx="2011680" cy="1005840"/>
-          </a:xfrm>
-          <a:prstGeom prst="rect">
-            <a:avLst/>
-          </a:prstGeom>
-          <a:noFill/>
-          <a:ln/>
-        </p:spPr>
-        <p:txBody>
-          <a:bodyPr wrap="square" lIns="0" tIns="0" rIns="0" bIns="0" rtlCol="0" anchor="ctr"/>
-          <a:lstStyle/>
-          <a:p>
-            <a:pPr algn="ctr" indent="0" marL="0">
-              <a:buNone/>
-            </a:pPr>
-            <a:r>
-              <a:rPr lang="en-US" sz="1400" dirty="0">
+          <p:cNvPr id="9" name="Text 7"/>
+          <p:cNvSpPr/>
+          <p:nvPr/>
+        </p:nvSpPr>
+        <p:spPr>
+          <a:xfrm>
+            <a:off x="457200" y="2240280"/>
+            <a:ext cx="1645920" cy="320040"/>
+          </a:xfrm>
+          <a:prstGeom prst="rect">
+            <a:avLst/>
+          </a:prstGeom>
+          <a:noFill/>
+          <a:ln/>
+        </p:spPr>
+        <p:txBody>
+          <a:bodyPr wrap="square" lIns="0" tIns="0" rIns="0" bIns="0" rtlCol="0" anchor="ctr"/>
+          <a:lstStyle/>
+          <a:p>
+            <a:pPr indent="0" marL="0">
+              <a:buNone/>
+            </a:pPr>
+            <a:r>
+              <a:rPr lang="en-US" sz="1400" b="1" dirty="0">
+                <a:solidFill>
+                  <a:srgbClr val="F0A040"/>
+                </a:solidFill>
+                <a:latin typeface="Arial Black" pitchFamily="34" charset="0"/>
+                <a:ea typeface="Arial Black" pitchFamily="34" charset="-122"/>
+                <a:cs typeface="Arial Black" pitchFamily="34" charset="-120"/>
+              </a:rPr>
+              <a:t>汇绿生态</a:t>
+            </a:r>
+            <a:endParaRPr lang="en-US" sz="1400" dirty="0"/>
+          </a:p>
+        </p:txBody>
+      </p:sp>
+      <p:sp>
+        <p:nvSpPr>
+          <p:cNvPr id="10" name="Text 8"/>
+          <p:cNvSpPr/>
+          <p:nvPr/>
+        </p:nvSpPr>
+        <p:spPr>
+          <a:xfrm>
+            <a:off x="457200" y="2560320"/>
+            <a:ext cx="4572000" cy="320040"/>
+          </a:xfrm>
+          <a:prstGeom prst="rect">
+            <a:avLst/>
+          </a:prstGeom>
+          <a:noFill/>
+          <a:ln/>
+        </p:spPr>
+        <p:txBody>
+          <a:bodyPr wrap="square" lIns="0" tIns="0" rIns="0" bIns="0" rtlCol="0" anchor="ctr"/>
+          <a:lstStyle/>
+          <a:p>
+            <a:pPr indent="0" marL="0">
+              <a:buNone/>
+            </a:pPr>
+            <a:r>
+              <a:rPr lang="en-US" sz="1200" dirty="0">
                 <a:solidFill>
                   <a:srgbClr val="E4E4E8"/>
                 </a:solidFill>
               </a:rPr>
-              <a:t>核心持仓</a:t>
-            </a:r>
-            <a:endParaRPr lang="en-US" sz="1400" dirty="0"/>
-          </a:p>
-        </p:txBody>
-      </p:sp>
-      <p:sp>
-        <p:nvSpPr>
-          <p:cNvPr id="8" name="Shape 6"/>
-          <p:cNvSpPr/>
-          <p:nvPr/>
-        </p:nvSpPr>
-        <p:spPr>
-          <a:xfrm>
-            <a:off x="4663440" y="1280160"/>
-            <a:ext cx="2011680" cy="1463040"/>
+              <a:t>341亿·409.8x · ⑤CPO</a:t>
+            </a:r>
+            <a:endParaRPr lang="en-US" sz="1200" dirty="0"/>
+          </a:p>
+        </p:txBody>
+      </p:sp>
+      <p:sp>
+        <p:nvSpPr>
+          <p:cNvPr id="11" name="Text 9"/>
+          <p:cNvSpPr/>
+          <p:nvPr/>
+        </p:nvSpPr>
+        <p:spPr>
+          <a:xfrm>
+            <a:off x="5029200" y="2331720"/>
+            <a:ext cx="3840480" cy="457200"/>
+          </a:xfrm>
+          <a:prstGeom prst="rect">
+            <a:avLst/>
+          </a:prstGeom>
+          <a:noFill/>
+          <a:ln/>
+        </p:spPr>
+        <p:txBody>
+          <a:bodyPr wrap="square" lIns="0" tIns="0" rIns="0" bIns="0" rtlCol="0" anchor="ctr"/>
+          <a:lstStyle/>
+          <a:p>
+            <a:pPr indent="0" marL="0">
+              <a:buNone/>
+            </a:pPr>
+            <a:r>
+              <a:rPr lang="en-US" sz="1100" dirty="0">
+                <a:solidFill>
+                  <a:srgbClr val="8E8EA0"/>
+                </a:solidFill>
+              </a:rPr>
+              <a:t>持有·EML紧缺到2028 · 3→4</a:t>
+            </a:r>
+            <a:endParaRPr lang="en-US" sz="1100" dirty="0"/>
+          </a:p>
+        </p:txBody>
+      </p:sp>
+      <p:sp>
+        <p:nvSpPr>
+          <p:cNvPr id="12" name="Shape 10"/>
+          <p:cNvSpPr/>
+          <p:nvPr/>
+        </p:nvSpPr>
+        <p:spPr>
+          <a:xfrm>
+            <a:off x="274320" y="3108960"/>
+            <a:ext cx="8595360" cy="822960"/>
           </a:xfrm>
           <a:prstGeom prst="roundRect">
             <a:avLst>
-              <a:gd name="adj" fmla="val 6250"/>
+              <a:gd name="adj" fmla="val 8889"/>
             </a:avLst>
           </a:prstGeom>
           <a:solidFill>
@@ -1886,7 +2033,7 @@
           </a:solidFill>
           <a:ln w="12700">
             <a:solidFill>
-              <a:srgbClr val="3DD68C"/>
+              <a:srgbClr val="F0A040"/>
             </a:solidFill>
             <a:prstDash val="solid"/>
           </a:ln>
@@ -1894,54 +2041,129 @@
       </p:sp>
       <p:sp>
         <p:nvSpPr>
-          <p:cNvPr id="9" name="Text 7"/>
-          <p:cNvSpPr/>
-          <p:nvPr/>
-        </p:nvSpPr>
-        <p:spPr>
-          <a:xfrm>
-            <a:off x="4663440" y="1554480"/>
-            <a:ext cx="2011680" cy="1005840"/>
-          </a:xfrm>
-          <a:prstGeom prst="rect">
-            <a:avLst/>
-          </a:prstGeom>
-          <a:noFill/>
-          <a:ln/>
-        </p:spPr>
-        <p:txBody>
-          <a:bodyPr wrap="square" lIns="0" tIns="0" rIns="0" bIns="0" rtlCol="0" anchor="ctr"/>
-          <a:lstStyle/>
-          <a:p>
-            <a:pPr algn="ctr" indent="0" marL="0">
-              <a:buNone/>
-            </a:pPr>
-            <a:r>
-              <a:rPr lang="en-US" sz="1400" dirty="0">
+          <p:cNvPr id="13" name="Text 11"/>
+          <p:cNvSpPr/>
+          <p:nvPr/>
+        </p:nvSpPr>
+        <p:spPr>
+          <a:xfrm>
+            <a:off x="457200" y="3200400"/>
+            <a:ext cx="1645920" cy="320040"/>
+          </a:xfrm>
+          <a:prstGeom prst="rect">
+            <a:avLst/>
+          </a:prstGeom>
+          <a:noFill/>
+          <a:ln/>
+        </p:spPr>
+        <p:txBody>
+          <a:bodyPr wrap="square" lIns="0" tIns="0" rIns="0" bIns="0" rtlCol="0" anchor="ctr"/>
+          <a:lstStyle/>
+          <a:p>
+            <a:pPr indent="0" marL="0">
+              <a:buNone/>
+            </a:pPr>
+            <a:r>
+              <a:rPr lang="en-US" sz="1400" b="1" dirty="0">
+                <a:solidFill>
+                  <a:srgbClr val="F0A040"/>
+                </a:solidFill>
+                <a:latin typeface="Arial Black" pitchFamily="34" charset="0"/>
+                <a:ea typeface="Arial Black" pitchFamily="34" charset="-122"/>
+                <a:cs typeface="Arial Black" pitchFamily="34" charset="-120"/>
+              </a:rPr>
+              <a:t>罗博特科</a:t>
+            </a:r>
+            <a:endParaRPr lang="en-US" sz="1400" dirty="0"/>
+          </a:p>
+        </p:txBody>
+      </p:sp>
+      <p:sp>
+        <p:nvSpPr>
+          <p:cNvPr id="14" name="Text 12"/>
+          <p:cNvSpPr/>
+          <p:nvPr/>
+        </p:nvSpPr>
+        <p:spPr>
+          <a:xfrm>
+            <a:off x="457200" y="3520440"/>
+            <a:ext cx="4572000" cy="320040"/>
+          </a:xfrm>
+          <a:prstGeom prst="rect">
+            <a:avLst/>
+          </a:prstGeom>
+          <a:noFill/>
+          <a:ln/>
+        </p:spPr>
+        <p:txBody>
+          <a:bodyPr wrap="square" lIns="0" tIns="0" rIns="0" bIns="0" rtlCol="0" anchor="ctr"/>
+          <a:lstStyle/>
+          <a:p>
+            <a:pPr indent="0" marL="0">
+              <a:buNone/>
+            </a:pPr>
+            <a:r>
+              <a:rPr lang="en-US" sz="1200" dirty="0">
                 <a:solidFill>
                   <a:srgbClr val="E4E4E8"/>
                 </a:solidFill>
               </a:rPr>
-              <a:t>6/6</a:t>
-            </a:r>
-            <a:endParaRPr lang="en-US" sz="1400" dirty="0"/>
-          </a:p>
-        </p:txBody>
-      </p:sp>
-      <p:sp>
-        <p:nvSpPr>
-          <p:cNvPr id="10" name="Shape 8"/>
-          <p:cNvSpPr/>
-          <p:nvPr/>
-        </p:nvSpPr>
-        <p:spPr>
-          <a:xfrm>
-            <a:off x="6858000" y="1280160"/>
-            <a:ext cx="2011680" cy="1463040"/>
+              <a:t>820亿·亏损 · ①⑤双卡</a:t>
+            </a:r>
+            <a:endParaRPr lang="en-US" sz="1200" dirty="0"/>
+          </a:p>
+        </p:txBody>
+      </p:sp>
+      <p:sp>
+        <p:nvSpPr>
+          <p:cNvPr id="15" name="Text 13"/>
+          <p:cNvSpPr/>
+          <p:nvPr/>
+        </p:nvSpPr>
+        <p:spPr>
+          <a:xfrm>
+            <a:off x="5029200" y="3291840"/>
+            <a:ext cx="3840480" cy="457200"/>
+          </a:xfrm>
+          <a:prstGeom prst="rect">
+            <a:avLst/>
+          </a:prstGeom>
+          <a:noFill/>
+          <a:ln/>
+        </p:spPr>
+        <p:txBody>
+          <a:bodyPr wrap="square" lIns="0" tIns="0" rIns="0" bIns="0" rtlCol="0" anchor="ctr"/>
+          <a:lstStyle/>
+          <a:p>
+            <a:pPr indent="0" marL="0">
+              <a:buNone/>
+            </a:pPr>
+            <a:r>
+              <a:rPr lang="en-US" sz="1100" dirty="0">
+                <a:solidFill>
+                  <a:srgbClr val="8E8EA0"/>
+                </a:solidFill>
+              </a:rPr>
+              <a:t>持有·ficonTEC+台积电CoWoS · 3</a:t>
+            </a:r>
+            <a:endParaRPr lang="en-US" sz="1100" dirty="0"/>
+          </a:p>
+        </p:txBody>
+      </p:sp>
+      <p:sp>
+        <p:nvSpPr>
+          <p:cNvPr id="16" name="Shape 14"/>
+          <p:cNvSpPr/>
+          <p:nvPr/>
+        </p:nvSpPr>
+        <p:spPr>
+          <a:xfrm>
+            <a:off x="274320" y="4069080"/>
+            <a:ext cx="8595360" cy="822960"/>
           </a:xfrm>
           <a:prstGeom prst="roundRect">
             <a:avLst>
-              <a:gd name="adj" fmla="val 6250"/>
+              <a:gd name="adj" fmla="val 8889"/>
             </a:avLst>
           </a:prstGeom>
           <a:solidFill>
@@ -1949,7 +2171,7 @@
           </a:solidFill>
           <a:ln w="12700">
             <a:solidFill>
-              <a:srgbClr val="3DD68C"/>
+              <a:srgbClr val="F0A040"/>
             </a:solidFill>
             <a:prstDash val="solid"/>
           </a:ln>
@@ -1957,258 +2179,78 @@
       </p:sp>
       <p:sp>
         <p:nvSpPr>
-          <p:cNvPr id="11" name="Text 9"/>
-          <p:cNvSpPr/>
-          <p:nvPr/>
-        </p:nvSpPr>
-        <p:spPr>
-          <a:xfrm>
-            <a:off x="6858000" y="1554480"/>
-            <a:ext cx="2011680" cy="1005840"/>
-          </a:xfrm>
-          <a:prstGeom prst="rect">
-            <a:avLst/>
-          </a:prstGeom>
-          <a:noFill/>
-          <a:ln/>
-        </p:spPr>
-        <p:txBody>
-          <a:bodyPr wrap="square" lIns="0" tIns="0" rIns="0" bIns="0" rtlCol="0" anchor="ctr"/>
-          <a:lstStyle/>
-          <a:p>
-            <a:pPr algn="ctr" indent="0" marL="0">
-              <a:buNone/>
-            </a:pPr>
-            <a:r>
-              <a:rPr lang="en-US" sz="1400" dirty="0">
-                <a:solidFill>
-                  <a:srgbClr val="E4E4E8"/>
-                </a:solidFill>
-              </a:rPr>
-              <a:t>卡点覆盖</a:t>
-            </a:r>
-            <a:endParaRPr lang="en-US" sz="1400" dirty="0"/>
-          </a:p>
-        </p:txBody>
-      </p:sp>
-      <p:sp>
-        <p:nvSpPr>
-          <p:cNvPr id="12" name="Shape 10"/>
-          <p:cNvSpPr/>
-          <p:nvPr/>
-        </p:nvSpPr>
-        <p:spPr>
-          <a:xfrm>
-            <a:off x="274320" y="3108960"/>
-            <a:ext cx="2011680" cy="1463040"/>
-          </a:xfrm>
-          <a:prstGeom prst="roundRect">
-            <a:avLst>
-              <a:gd name="adj" fmla="val 6250"/>
-            </a:avLst>
-          </a:prstGeom>
-          <a:solidFill>
-            <a:srgbClr val="16213E"/>
-          </a:solidFill>
-          <a:ln w="12700">
-            <a:solidFill>
-              <a:srgbClr val="4DA6FF"/>
-            </a:solidFill>
-            <a:prstDash val="solid"/>
-          </a:ln>
-        </p:spPr>
-      </p:sp>
-      <p:sp>
-        <p:nvSpPr>
-          <p:cNvPr id="13" name="Text 11"/>
-          <p:cNvSpPr/>
-          <p:nvPr/>
-        </p:nvSpPr>
-        <p:spPr>
-          <a:xfrm>
-            <a:off x="274320" y="3383280"/>
-            <a:ext cx="2011680" cy="1005840"/>
-          </a:xfrm>
-          <a:prstGeom prst="rect">
-            <a:avLst/>
-          </a:prstGeom>
-          <a:noFill/>
-          <a:ln/>
-        </p:spPr>
-        <p:txBody>
-          <a:bodyPr wrap="square" lIns="0" tIns="0" rIns="0" bIns="0" rtlCol="0" anchor="ctr"/>
-          <a:lstStyle/>
-          <a:p>
-            <a:pPr algn="ctr" indent="0" marL="0">
-              <a:buNone/>
-            </a:pPr>
-            <a:r>
-              <a:rPr lang="en-US" sz="3200" dirty="0">
-                <a:solidFill>
-                  <a:srgbClr val="4DA6FF"/>
+          <p:cNvPr id="17" name="Text 15"/>
+          <p:cNvSpPr/>
+          <p:nvPr/>
+        </p:nvSpPr>
+        <p:spPr>
+          <a:xfrm>
+            <a:off x="457200" y="4160520"/>
+            <a:ext cx="1645920" cy="320040"/>
+          </a:xfrm>
+          <a:prstGeom prst="rect">
+            <a:avLst/>
+          </a:prstGeom>
+          <a:noFill/>
+          <a:ln/>
+        </p:spPr>
+        <p:txBody>
+          <a:bodyPr wrap="square" lIns="0" tIns="0" rIns="0" bIns="0" rtlCol="0" anchor="ctr"/>
+          <a:lstStyle/>
+          <a:p>
+            <a:pPr indent="0" marL="0">
+              <a:buNone/>
+            </a:pPr>
+            <a:r>
+              <a:rPr lang="en-US" sz="1400" b="1" dirty="0">
+                <a:solidFill>
+                  <a:srgbClr val="F0A040"/>
                 </a:solidFill>
                 <a:latin typeface="Arial Black" pitchFamily="34" charset="0"/>
                 <a:ea typeface="Arial Black" pitchFamily="34" charset="-122"/>
                 <a:cs typeface="Arial Black" pitchFamily="34" charset="-120"/>
               </a:rPr>
-              <a:t>15</a:t>
-            </a:r>
-            <a:endParaRPr lang="en-US" sz="3200" dirty="0"/>
-          </a:p>
-        </p:txBody>
-      </p:sp>
-      <p:sp>
-        <p:nvSpPr>
-          <p:cNvPr id="14" name="Shape 12"/>
-          <p:cNvSpPr/>
-          <p:nvPr/>
-        </p:nvSpPr>
-        <p:spPr>
-          <a:xfrm>
-            <a:off x="2468880" y="3108960"/>
-            <a:ext cx="2011680" cy="1463040"/>
-          </a:xfrm>
-          <a:prstGeom prst="roundRect">
-            <a:avLst>
-              <a:gd name="adj" fmla="val 6250"/>
-            </a:avLst>
-          </a:prstGeom>
-          <a:solidFill>
-            <a:srgbClr val="16213E"/>
-          </a:solidFill>
-          <a:ln w="12700">
-            <a:solidFill>
-              <a:srgbClr val="4DA6FF"/>
-            </a:solidFill>
-            <a:prstDash val="solid"/>
-          </a:ln>
-        </p:spPr>
-      </p:sp>
-      <p:sp>
-        <p:nvSpPr>
-          <p:cNvPr id="15" name="Text 13"/>
-          <p:cNvSpPr/>
-          <p:nvPr/>
-        </p:nvSpPr>
-        <p:spPr>
-          <a:xfrm>
-            <a:off x="2468880" y="3383280"/>
-            <a:ext cx="2011680" cy="1005840"/>
-          </a:xfrm>
-          <a:prstGeom prst="rect">
-            <a:avLst/>
-          </a:prstGeom>
-          <a:noFill/>
-          <a:ln/>
-        </p:spPr>
-        <p:txBody>
-          <a:bodyPr wrap="square" lIns="0" tIns="0" rIns="0" bIns="0" rtlCol="0" anchor="ctr"/>
-          <a:lstStyle/>
-          <a:p>
-            <a:pPr algn="ctr" indent="0" marL="0">
-              <a:buNone/>
-            </a:pPr>
-            <a:r>
-              <a:rPr lang="en-US" sz="1400" dirty="0">
+              <a:t>三祥新材</a:t>
+            </a:r>
+            <a:endParaRPr lang="en-US" sz="1400" dirty="0"/>
+          </a:p>
+        </p:txBody>
+      </p:sp>
+      <p:sp>
+        <p:nvSpPr>
+          <p:cNvPr id="18" name="Text 16"/>
+          <p:cNvSpPr/>
+          <p:nvPr/>
+        </p:nvSpPr>
+        <p:spPr>
+          <a:xfrm>
+            <a:off x="457200" y="4480560"/>
+            <a:ext cx="4572000" cy="320040"/>
+          </a:xfrm>
+          <a:prstGeom prst="rect">
+            <a:avLst/>
+          </a:prstGeom>
+          <a:noFill/>
+          <a:ln/>
+        </p:spPr>
+        <p:txBody>
+          <a:bodyPr wrap="square" lIns="0" tIns="0" rIns="0" bIns="0" rtlCol="0" anchor="ctr"/>
+          <a:lstStyle/>
+          <a:p>
+            <a:pPr indent="0" marL="0">
+              <a:buNone/>
+            </a:pPr>
+            <a:r>
+              <a:rPr lang="en-US" sz="1200" dirty="0">
                 <a:solidFill>
                   <a:srgbClr val="E4E4E8"/>
                 </a:solidFill>
               </a:rPr>
-              <a:t>跟踪池候选</a:t>
-            </a:r>
-            <a:endParaRPr lang="en-US" sz="1400" dirty="0"/>
-          </a:p>
-        </p:txBody>
-      </p:sp>
-      <p:sp>
-        <p:nvSpPr>
-          <p:cNvPr id="16" name="Shape 14"/>
-          <p:cNvSpPr/>
-          <p:nvPr/>
-        </p:nvSpPr>
-        <p:spPr>
-          <a:xfrm>
-            <a:off x="4663440" y="3108960"/>
-            <a:ext cx="2011680" cy="1463040"/>
-          </a:xfrm>
-          <a:prstGeom prst="roundRect">
-            <a:avLst>
-              <a:gd name="adj" fmla="val 6250"/>
-            </a:avLst>
-          </a:prstGeom>
-          <a:solidFill>
-            <a:srgbClr val="16213E"/>
-          </a:solidFill>
-          <a:ln w="12700">
-            <a:solidFill>
-              <a:srgbClr val="4DA6FF"/>
-            </a:solidFill>
-            <a:prstDash val="solid"/>
-          </a:ln>
-        </p:spPr>
-      </p:sp>
-      <p:sp>
-        <p:nvSpPr>
-          <p:cNvPr id="17" name="Text 15"/>
-          <p:cNvSpPr/>
-          <p:nvPr/>
-        </p:nvSpPr>
-        <p:spPr>
-          <a:xfrm>
-            <a:off x="4663440" y="3383280"/>
-            <a:ext cx="2011680" cy="1005840"/>
-          </a:xfrm>
-          <a:prstGeom prst="rect">
-            <a:avLst/>
-          </a:prstGeom>
-          <a:noFill/>
-          <a:ln/>
-        </p:spPr>
-        <p:txBody>
-          <a:bodyPr wrap="square" lIns="0" tIns="0" rIns="0" bIns="0" rtlCol="0" anchor="ctr"/>
-          <a:lstStyle/>
-          <a:p>
-            <a:pPr algn="ctr" indent="0" marL="0">
-              <a:buNone/>
-            </a:pPr>
-            <a:r>
-              <a:rPr lang="en-US" sz="1400" dirty="0">
-                <a:solidFill>
-                  <a:srgbClr val="E4E4E8"/>
-                </a:solidFill>
-              </a:rPr>
-              <a:t>3→4</a:t>
-            </a:r>
-            <a:endParaRPr lang="en-US" sz="1400" dirty="0"/>
-          </a:p>
-        </p:txBody>
-      </p:sp>
-      <p:sp>
-        <p:nvSpPr>
-          <p:cNvPr id="18" name="Shape 16"/>
-          <p:cNvSpPr/>
-          <p:nvPr/>
-        </p:nvSpPr>
-        <p:spPr>
-          <a:xfrm>
-            <a:off x="6858000" y="3108960"/>
-            <a:ext cx="2011680" cy="1463040"/>
-          </a:xfrm>
-          <a:prstGeom prst="roundRect">
-            <a:avLst>
-              <a:gd name="adj" fmla="val 6250"/>
-            </a:avLst>
-          </a:prstGeom>
-          <a:solidFill>
-            <a:srgbClr val="16213E"/>
-          </a:solidFill>
-          <a:ln w="12700">
-            <a:solidFill>
-              <a:srgbClr val="4DA6FF"/>
-            </a:solidFill>
-            <a:prstDash val="solid"/>
-          </a:ln>
-        </p:spPr>
+              <a:t>314亿·222.6x · ①间接</a:t>
+            </a:r>
+            <a:endParaRPr lang="en-US" sz="1200" dirty="0"/>
+          </a:p>
+        </p:txBody>
       </p:sp>
       <p:sp>
         <p:nvSpPr>
@@ -2218,31 +2260,31 @@
         </p:nvSpPr>
         <p:spPr>
           <a:xfrm>
-            <a:off x="6858000" y="3383280"/>
-            <a:ext cx="2011680" cy="1005840"/>
-          </a:xfrm>
-          <a:prstGeom prst="rect">
-            <a:avLst/>
-          </a:prstGeom>
-          <a:noFill/>
-          <a:ln/>
-        </p:spPr>
-        <p:txBody>
-          <a:bodyPr wrap="square" lIns="0" tIns="0" rIns="0" bIns="0" rtlCol="0" anchor="ctr"/>
-          <a:lstStyle/>
-          <a:p>
-            <a:pPr algn="ctr" indent="0" marL="0">
-              <a:buNone/>
-            </a:pPr>
-            <a:r>
-              <a:rPr lang="en-US" sz="1400" dirty="0">
-                <a:solidFill>
-                  <a:srgbClr val="E4E4E8"/>
-                </a:solidFill>
-              </a:rPr>
-              <a:t>核心阶段</a:t>
-            </a:r>
-            <a:endParaRPr lang="en-US" sz="1400" dirty="0"/>
+            <a:off x="5029200" y="4251960"/>
+            <a:ext cx="3840480" cy="457200"/>
+          </a:xfrm>
+          <a:prstGeom prst="rect">
+            <a:avLst/>
+          </a:prstGeom>
+          <a:noFill/>
+          <a:ln/>
+        </p:spPr>
+        <p:txBody>
+          <a:bodyPr wrap="square" lIns="0" tIns="0" rIns="0" bIns="0" rtlCol="0" anchor="ctr"/>
+          <a:lstStyle/>
+          <a:p>
+            <a:pPr indent="0" marL="0">
+              <a:buNone/>
+            </a:pPr>
+            <a:r>
+              <a:rPr lang="en-US" sz="1100" dirty="0">
+                <a:solidFill>
+                  <a:srgbClr val="8E8EA0"/>
+                </a:solidFill>
+              </a:rPr>
+              <a:t>S级500亿前不减·固态电池 · 2→3</a:t>
+            </a:r>
+            <a:endParaRPr lang="en-US" sz="1100" dirty="0"/>
           </a:p>
         </p:txBody>
       </p:sp>
@@ -2311,7 +2353,7 @@
                 <a:ea typeface="Arial Black" pitchFamily="34" charset="-122"/>
                 <a:cs typeface="Arial Black" pitchFamily="34" charset="-120"/>
               </a:rPr>
-              <a:t>S级核心（4只）</a:t>
+              <a:t>持仓·利润仓+防御（8只）</a:t>
             </a:r>
             <a:endParaRPr lang="en-US" sz="2600" dirty="0"/>
           </a:p>
@@ -2345,23 +2387,18 @@
         </p:nvSpPr>
         <p:spPr>
           <a:xfrm>
-            <a:off x="274320" y="1188720"/>
-            <a:ext cx="8595360" cy="822960"/>
+            <a:off x="182880" y="1188720"/>
+            <a:ext cx="8778240" cy="420624"/>
           </a:xfrm>
           <a:prstGeom prst="roundRect">
             <a:avLst>
-              <a:gd name="adj" fmla="val 8889"/>
+              <a:gd name="adj" fmla="val 13043"/>
             </a:avLst>
           </a:prstGeom>
           <a:solidFill>
             <a:srgbClr val="16213E"/>
           </a:solidFill>
-          <a:ln w="12700">
-            <a:solidFill>
-              <a:srgbClr val="F0A040"/>
-            </a:solidFill>
-            <a:prstDash val="solid"/>
-          </a:ln>
+          <a:ln/>
         </p:spPr>
       </p:sp>
       <p:sp>
@@ -2372,34 +2409,34 @@
         </p:nvSpPr>
         <p:spPr>
           <a:xfrm>
-            <a:off x="457200" y="1280160"/>
-            <a:ext cx="1645920" cy="320040"/>
-          </a:xfrm>
-          <a:prstGeom prst="rect">
-            <a:avLst/>
-          </a:prstGeom>
-          <a:noFill/>
-          <a:ln/>
-        </p:spPr>
-        <p:txBody>
-          <a:bodyPr wrap="square" lIns="0" tIns="0" rIns="0" bIns="0" rtlCol="0" anchor="ctr"/>
-          <a:lstStyle/>
-          <a:p>
-            <a:pPr indent="0" marL="0">
-              <a:buNone/>
-            </a:pPr>
-            <a:r>
-              <a:rPr lang="en-US" sz="1400" b="1" dirty="0">
-                <a:solidFill>
-                  <a:srgbClr val="F0A040"/>
+            <a:off x="365760" y="1261872"/>
+            <a:ext cx="1371600" cy="274320"/>
+          </a:xfrm>
+          <a:prstGeom prst="rect">
+            <a:avLst/>
+          </a:prstGeom>
+          <a:noFill/>
+          <a:ln/>
+        </p:spPr>
+        <p:txBody>
+          <a:bodyPr wrap="square" lIns="0" tIns="0" rIns="0" bIns="0" rtlCol="0" anchor="ctr"/>
+          <a:lstStyle/>
+          <a:p>
+            <a:pPr indent="0" marL="0">
+              <a:buNone/>
+            </a:pPr>
+            <a:r>
+              <a:rPr lang="en-US" sz="1200" b="1" dirty="0">
+                <a:solidFill>
+                  <a:srgbClr val="3DD68C"/>
                 </a:solidFill>
                 <a:latin typeface="Arial Black" pitchFamily="34" charset="0"/>
                 <a:ea typeface="Arial Black" pitchFamily="34" charset="-122"/>
                 <a:cs typeface="Arial Black" pitchFamily="34" charset="-120"/>
               </a:rPr>
-              <a:t>汇绿生态</a:t>
-            </a:r>
-            <a:endParaRPr lang="en-US" sz="1400" dirty="0"/>
+              <a:t>兴森科技</a:t>
+            </a:r>
+            <a:endParaRPr lang="en-US" sz="1200" dirty="0"/>
           </a:p>
         </p:txBody>
       </p:sp>
@@ -2411,44 +2448,8 @@
         </p:nvSpPr>
         <p:spPr>
           <a:xfrm>
-            <a:off x="457200" y="1600200"/>
-            <a:ext cx="3657600" cy="320040"/>
-          </a:xfrm>
-          <a:prstGeom prst="rect">
-            <a:avLst/>
-          </a:prstGeom>
-          <a:noFill/>
-          <a:ln/>
-        </p:spPr>
-        <p:txBody>
-          <a:bodyPr wrap="square" lIns="0" tIns="0" rIns="0" bIns="0" rtlCol="0" anchor="ctr"/>
-          <a:lstStyle/>
-          <a:p>
-            <a:pPr indent="0" marL="0">
-              <a:buNone/>
-            </a:pPr>
-            <a:r>
-              <a:rPr lang="en-US" sz="1200" dirty="0">
-                <a:solidFill>
-                  <a:srgbClr val="E4E4E8"/>
-                </a:solidFill>
-              </a:rPr>
-              <a:t>CPO代工 · 光通信黑马</a:t>
-            </a:r>
-            <a:endParaRPr lang="en-US" sz="1200" dirty="0"/>
-          </a:p>
-        </p:txBody>
-      </p:sp>
-      <p:sp>
-        <p:nvSpPr>
-          <p:cNvPr id="7" name="Text 5"/>
-          <p:cNvSpPr/>
-          <p:nvPr/>
-        </p:nvSpPr>
-        <p:spPr>
-          <a:xfrm>
-            <a:off x="4572000" y="1371600"/>
-            <a:ext cx="4114800" cy="457200"/>
+            <a:off x="1828800" y="1261872"/>
+            <a:ext cx="6949440" cy="274320"/>
           </a:xfrm>
           <a:prstGeom prst="rect">
             <a:avLst/>
@@ -2469,7 +2470,7 @@
                   <a:srgbClr val="8E8EA0"/>
                 </a:solidFill>
               </a:rPr>
-              <a:t>EML紧缺到2028 · 3→4</a:t>
+              <a:t>699亿 · ④载板 · 利润仓·ABF国产替代/负成本 · 3</a:t>
             </a:r>
             <a:endParaRPr lang="en-US" sz="1100" dirty="0"/>
           </a:p>
@@ -2477,101 +2478,60 @@
       </p:sp>
       <p:sp>
         <p:nvSpPr>
-          <p:cNvPr id="8" name="Shape 6"/>
-          <p:cNvSpPr/>
-          <p:nvPr/>
-        </p:nvSpPr>
-        <p:spPr>
-          <a:xfrm>
-            <a:off x="274320" y="2148840"/>
-            <a:ext cx="8595360" cy="822960"/>
+          <p:cNvPr id="7" name="Shape 5"/>
+          <p:cNvSpPr/>
+          <p:nvPr/>
+        </p:nvSpPr>
+        <p:spPr>
+          <a:xfrm>
+            <a:off x="182880" y="1664208"/>
+            <a:ext cx="8778240" cy="420624"/>
           </a:xfrm>
           <a:prstGeom prst="roundRect">
             <a:avLst>
-              <a:gd name="adj" fmla="val 8889"/>
+              <a:gd name="adj" fmla="val 13043"/>
             </a:avLst>
           </a:prstGeom>
           <a:solidFill>
             <a:srgbClr val="16213E"/>
           </a:solidFill>
-          <a:ln w="12700">
-            <a:solidFill>
-              <a:srgbClr val="F0A040"/>
-            </a:solidFill>
-            <a:prstDash val="solid"/>
-          </a:ln>
-        </p:spPr>
-      </p:sp>
-      <p:sp>
-        <p:nvSpPr>
-          <p:cNvPr id="9" name="Text 7"/>
-          <p:cNvSpPr/>
-          <p:nvPr/>
-        </p:nvSpPr>
-        <p:spPr>
-          <a:xfrm>
-            <a:off x="457200" y="2240280"/>
-            <a:ext cx="1645920" cy="320040"/>
-          </a:xfrm>
-          <a:prstGeom prst="rect">
-            <a:avLst/>
-          </a:prstGeom>
-          <a:noFill/>
-          <a:ln/>
-        </p:spPr>
-        <p:txBody>
-          <a:bodyPr wrap="square" lIns="0" tIns="0" rIns="0" bIns="0" rtlCol="0" anchor="ctr"/>
-          <a:lstStyle/>
-          <a:p>
-            <a:pPr indent="0" marL="0">
-              <a:buNone/>
-            </a:pPr>
-            <a:r>
-              <a:rPr lang="en-US" sz="1400" b="1" dirty="0">
-                <a:solidFill>
-                  <a:srgbClr val="F0A040"/>
+          <a:ln/>
+        </p:spPr>
+      </p:sp>
+      <p:sp>
+        <p:nvSpPr>
+          <p:cNvPr id="8" name="Text 6"/>
+          <p:cNvSpPr/>
+          <p:nvPr/>
+        </p:nvSpPr>
+        <p:spPr>
+          <a:xfrm>
+            <a:off x="365760" y="1737360"/>
+            <a:ext cx="1371600" cy="274320"/>
+          </a:xfrm>
+          <a:prstGeom prst="rect">
+            <a:avLst/>
+          </a:prstGeom>
+          <a:noFill/>
+          <a:ln/>
+        </p:spPr>
+        <p:txBody>
+          <a:bodyPr wrap="square" lIns="0" tIns="0" rIns="0" bIns="0" rtlCol="0" anchor="ctr"/>
+          <a:lstStyle/>
+          <a:p>
+            <a:pPr indent="0" marL="0">
+              <a:buNone/>
+            </a:pPr>
+            <a:r>
+              <a:rPr lang="en-US" sz="1200" b="1" dirty="0">
+                <a:solidFill>
+                  <a:srgbClr val="3DD68C"/>
                 </a:solidFill>
                 <a:latin typeface="Arial Black" pitchFamily="34" charset="0"/>
                 <a:ea typeface="Arial Black" pitchFamily="34" charset="-122"/>
                 <a:cs typeface="Arial Black" pitchFamily="34" charset="-120"/>
               </a:rPr>
-              <a:t>澜起科技</a:t>
-            </a:r>
-            <a:endParaRPr lang="en-US" sz="1400" dirty="0"/>
-          </a:p>
-        </p:txBody>
-      </p:sp>
-      <p:sp>
-        <p:nvSpPr>
-          <p:cNvPr id="10" name="Text 8"/>
-          <p:cNvSpPr/>
-          <p:nvPr/>
-        </p:nvSpPr>
-        <p:spPr>
-          <a:xfrm>
-            <a:off x="457200" y="2560320"/>
-            <a:ext cx="3657600" cy="320040"/>
-          </a:xfrm>
-          <a:prstGeom prst="rect">
-            <a:avLst/>
-          </a:prstGeom>
-          <a:noFill/>
-          <a:ln/>
-        </p:spPr>
-        <p:txBody>
-          <a:bodyPr wrap="square" lIns="0" tIns="0" rIns="0" bIns="0" rtlCol="0" anchor="ctr"/>
-          <a:lstStyle/>
-          <a:p>
-            <a:pPr indent="0" marL="0">
-              <a:buNone/>
-            </a:pPr>
-            <a:r>
-              <a:rPr lang="en-US" sz="1200" dirty="0">
-                <a:solidFill>
-                  <a:srgbClr val="E4E4E8"/>
-                </a:solidFill>
-              </a:rPr>
-              <a:t>接口芯片 · 内存接口断层第一</a:t>
+              <a:t>星环科技-U</a:t>
             </a:r>
             <a:endParaRPr lang="en-US" sz="1200" dirty="0"/>
           </a:p>
@@ -2579,14 +2539,14 @@
       </p:sp>
       <p:sp>
         <p:nvSpPr>
-          <p:cNvPr id="11" name="Text 9"/>
-          <p:cNvSpPr/>
-          <p:nvPr/>
-        </p:nvSpPr>
-        <p:spPr>
-          <a:xfrm>
-            <a:off x="4572000" y="2331720"/>
-            <a:ext cx="4114800" cy="457200"/>
+          <p:cNvPr id="9" name="Text 7"/>
+          <p:cNvSpPr/>
+          <p:nvPr/>
+        </p:nvSpPr>
+        <p:spPr>
+          <a:xfrm>
+            <a:off x="1828800" y="1737360"/>
+            <a:ext cx="6949440" cy="274320"/>
           </a:xfrm>
           <a:prstGeom prst="rect">
             <a:avLst/>
@@ -2607,7 +2567,7 @@
                   <a:srgbClr val="8E8EA0"/>
                 </a:solidFill>
               </a:rPr>
-              <a:t>62%毛利断层 · 3→4</a:t>
+              <a:t>131亿 · 无直接 · 利润仓·英伟达ISV+中信ArgoDB · 2→3</a:t>
             </a:r>
             <a:endParaRPr lang="en-US" sz="1100" dirty="0"/>
           </a:p>
@@ -2615,101 +2575,60 @@
       </p:sp>
       <p:sp>
         <p:nvSpPr>
-          <p:cNvPr id="12" name="Shape 10"/>
-          <p:cNvSpPr/>
-          <p:nvPr/>
-        </p:nvSpPr>
-        <p:spPr>
-          <a:xfrm>
-            <a:off x="274320" y="3108960"/>
-            <a:ext cx="8595360" cy="822960"/>
+          <p:cNvPr id="10" name="Shape 8"/>
+          <p:cNvSpPr/>
+          <p:nvPr/>
+        </p:nvSpPr>
+        <p:spPr>
+          <a:xfrm>
+            <a:off x="182880" y="2139696"/>
+            <a:ext cx="8778240" cy="420624"/>
           </a:xfrm>
           <a:prstGeom prst="roundRect">
             <a:avLst>
-              <a:gd name="adj" fmla="val 8889"/>
+              <a:gd name="adj" fmla="val 13043"/>
             </a:avLst>
           </a:prstGeom>
           <a:solidFill>
             <a:srgbClr val="16213E"/>
           </a:solidFill>
-          <a:ln w="12700">
-            <a:solidFill>
-              <a:srgbClr val="F0A040"/>
-            </a:solidFill>
-            <a:prstDash val="solid"/>
-          </a:ln>
-        </p:spPr>
-      </p:sp>
-      <p:sp>
-        <p:nvSpPr>
-          <p:cNvPr id="13" name="Text 11"/>
-          <p:cNvSpPr/>
-          <p:nvPr/>
-        </p:nvSpPr>
-        <p:spPr>
-          <a:xfrm>
-            <a:off x="457200" y="3200400"/>
-            <a:ext cx="1645920" cy="320040"/>
-          </a:xfrm>
-          <a:prstGeom prst="rect">
-            <a:avLst/>
-          </a:prstGeom>
-          <a:noFill/>
-          <a:ln/>
-        </p:spPr>
-        <p:txBody>
-          <a:bodyPr wrap="square" lIns="0" tIns="0" rIns="0" bIns="0" rtlCol="0" anchor="ctr"/>
-          <a:lstStyle/>
-          <a:p>
-            <a:pPr indent="0" marL="0">
-              <a:buNone/>
-            </a:pPr>
-            <a:r>
-              <a:rPr lang="en-US" sz="1400" b="1" dirty="0">
-                <a:solidFill>
-                  <a:srgbClr val="F0A040"/>
+          <a:ln/>
+        </p:spPr>
+      </p:sp>
+      <p:sp>
+        <p:nvSpPr>
+          <p:cNvPr id="11" name="Text 9"/>
+          <p:cNvSpPr/>
+          <p:nvPr/>
+        </p:nvSpPr>
+        <p:spPr>
+          <a:xfrm>
+            <a:off x="365760" y="2212848"/>
+            <a:ext cx="1371600" cy="274320"/>
+          </a:xfrm>
+          <a:prstGeom prst="rect">
+            <a:avLst/>
+          </a:prstGeom>
+          <a:noFill/>
+          <a:ln/>
+        </p:spPr>
+        <p:txBody>
+          <a:bodyPr wrap="square" lIns="0" tIns="0" rIns="0" bIns="0" rtlCol="0" anchor="ctr"/>
+          <a:lstStyle/>
+          <a:p>
+            <a:pPr indent="0" marL="0">
+              <a:buNone/>
+            </a:pPr>
+            <a:r>
+              <a:rPr lang="en-US" sz="1200" b="1" dirty="0">
+                <a:solidFill>
+                  <a:srgbClr val="3DD68C"/>
                 </a:solidFill>
                 <a:latin typeface="Arial Black" pitchFamily="34" charset="0"/>
                 <a:ea typeface="Arial Black" pitchFamily="34" charset="-122"/>
                 <a:cs typeface="Arial Black" pitchFamily="34" charset="-120"/>
               </a:rPr>
-              <a:t>罗博特科</a:t>
-            </a:r>
-            <a:endParaRPr lang="en-US" sz="1400" dirty="0"/>
-          </a:p>
-        </p:txBody>
-      </p:sp>
-      <p:sp>
-        <p:nvSpPr>
-          <p:cNvPr id="14" name="Text 12"/>
-          <p:cNvSpPr/>
-          <p:nvPr/>
-        </p:nvSpPr>
-        <p:spPr>
-          <a:xfrm>
-            <a:off x="457200" y="3520440"/>
-            <a:ext cx="3657600" cy="320040"/>
-          </a:xfrm>
-          <a:prstGeom prst="rect">
-            <a:avLst/>
-          </a:prstGeom>
-          <a:noFill/>
-          <a:ln/>
-        </p:spPr>
-        <p:txBody>
-          <a:bodyPr wrap="square" lIns="0" tIns="0" rIns="0" bIns="0" rtlCol="0" anchor="ctr"/>
-          <a:lstStyle/>
-          <a:p>
-            <a:pPr indent="0" marL="0">
-              <a:buNone/>
-            </a:pPr>
-            <a:r>
-              <a:rPr lang="en-US" sz="1200" dirty="0">
-                <a:solidFill>
-                  <a:srgbClr val="E4E4E8"/>
-                </a:solidFill>
-              </a:rPr>
-              <a:t>光通信设备 · ficonTEC双卡点</a:t>
+              <a:t>软通动力</a:t>
             </a:r>
             <a:endParaRPr lang="en-US" sz="1200" dirty="0"/>
           </a:p>
@@ -2717,14 +2636,14 @@
       </p:sp>
       <p:sp>
         <p:nvSpPr>
-          <p:cNvPr id="15" name="Text 13"/>
-          <p:cNvSpPr/>
-          <p:nvPr/>
-        </p:nvSpPr>
-        <p:spPr>
-          <a:xfrm>
-            <a:off x="4572000" y="3291840"/>
-            <a:ext cx="4114800" cy="457200"/>
+          <p:cNvPr id="12" name="Text 10"/>
+          <p:cNvSpPr/>
+          <p:nvPr/>
+        </p:nvSpPr>
+        <p:spPr>
+          <a:xfrm>
+            <a:off x="1828800" y="2212848"/>
+            <a:ext cx="6949440" cy="274320"/>
           </a:xfrm>
           <a:prstGeom prst="rect">
             <a:avLst/>
@@ -2745,7 +2664,7 @@
                   <a:srgbClr val="8E8EA0"/>
                 </a:solidFill>
               </a:rPr>
-              <a:t>台积电CoWoS唯一 · 3</a:t>
+              <a:t>433亿 · 无直接 · A级·浮盈+418%标杆/AI应用 · 4</a:t>
             </a:r>
             <a:endParaRPr lang="en-US" sz="1100" dirty="0"/>
           </a:p>
@@ -2753,67 +2672,159 @@
       </p:sp>
       <p:sp>
         <p:nvSpPr>
-          <p:cNvPr id="16" name="Shape 14"/>
-          <p:cNvSpPr/>
-          <p:nvPr/>
-        </p:nvSpPr>
-        <p:spPr>
-          <a:xfrm>
-            <a:off x="274320" y="4069080"/>
-            <a:ext cx="8595360" cy="822960"/>
+          <p:cNvPr id="13" name="Shape 11"/>
+          <p:cNvSpPr/>
+          <p:nvPr/>
+        </p:nvSpPr>
+        <p:spPr>
+          <a:xfrm>
+            <a:off x="182880" y="2615184"/>
+            <a:ext cx="8778240" cy="420624"/>
           </a:xfrm>
           <a:prstGeom prst="roundRect">
             <a:avLst>
-              <a:gd name="adj" fmla="val 8889"/>
+              <a:gd name="adj" fmla="val 13043"/>
             </a:avLst>
           </a:prstGeom>
           <a:solidFill>
             <a:srgbClr val="16213E"/>
           </a:solidFill>
-          <a:ln w="12700">
-            <a:solidFill>
-              <a:srgbClr val="F0A040"/>
-            </a:solidFill>
-            <a:prstDash val="solid"/>
-          </a:ln>
-        </p:spPr>
-      </p:sp>
-      <p:sp>
-        <p:nvSpPr>
-          <p:cNvPr id="17" name="Text 15"/>
-          <p:cNvSpPr/>
-          <p:nvPr/>
-        </p:nvSpPr>
-        <p:spPr>
-          <a:xfrm>
-            <a:off x="457200" y="4160520"/>
-            <a:ext cx="1645920" cy="320040"/>
-          </a:xfrm>
-          <a:prstGeom prst="rect">
-            <a:avLst/>
-          </a:prstGeom>
-          <a:noFill/>
-          <a:ln/>
-        </p:spPr>
-        <p:txBody>
-          <a:bodyPr wrap="square" lIns="0" tIns="0" rIns="0" bIns="0" rtlCol="0" anchor="ctr"/>
-          <a:lstStyle/>
-          <a:p>
-            <a:pPr indent="0" marL="0">
-              <a:buNone/>
-            </a:pPr>
-            <a:r>
-              <a:rPr lang="en-US" sz="1400" b="1" dirty="0">
-                <a:solidFill>
-                  <a:srgbClr val="F0A040"/>
+          <a:ln/>
+        </p:spPr>
+      </p:sp>
+      <p:sp>
+        <p:nvSpPr>
+          <p:cNvPr id="14" name="Text 12"/>
+          <p:cNvSpPr/>
+          <p:nvPr/>
+        </p:nvSpPr>
+        <p:spPr>
+          <a:xfrm>
+            <a:off x="365760" y="2688336"/>
+            <a:ext cx="1371600" cy="274320"/>
+          </a:xfrm>
+          <a:prstGeom prst="rect">
+            <a:avLst/>
+          </a:prstGeom>
+          <a:noFill/>
+          <a:ln/>
+        </p:spPr>
+        <p:txBody>
+          <a:bodyPr wrap="square" lIns="0" tIns="0" rIns="0" bIns="0" rtlCol="0" anchor="ctr"/>
+          <a:lstStyle/>
+          <a:p>
+            <a:pPr indent="0" marL="0">
+              <a:buNone/>
+            </a:pPr>
+            <a:r>
+              <a:rPr lang="en-US" sz="1200" b="1" dirty="0">
+                <a:solidFill>
+                  <a:srgbClr val="4DA6FF"/>
                 </a:solidFill>
                 <a:latin typeface="Arial Black" pitchFamily="34" charset="0"/>
                 <a:ea typeface="Arial Black" pitchFamily="34" charset="-122"/>
                 <a:cs typeface="Arial Black" pitchFamily="34" charset="-120"/>
               </a:rPr>
-              <a:t>三祥新材</a:t>
-            </a:r>
-            <a:endParaRPr lang="en-US" sz="1400" dirty="0"/>
+              <a:t>华峰化学</a:t>
+            </a:r>
+            <a:endParaRPr lang="en-US" sz="1200" dirty="0"/>
+          </a:p>
+        </p:txBody>
+      </p:sp>
+      <p:sp>
+        <p:nvSpPr>
+          <p:cNvPr id="15" name="Text 13"/>
+          <p:cNvSpPr/>
+          <p:nvPr/>
+        </p:nvSpPr>
+        <p:spPr>
+          <a:xfrm>
+            <a:off x="1828800" y="2688336"/>
+            <a:ext cx="6949440" cy="274320"/>
+          </a:xfrm>
+          <a:prstGeom prst="rect">
+            <a:avLst/>
+          </a:prstGeom>
+          <a:noFill/>
+          <a:ln/>
+        </p:spPr>
+        <p:txBody>
+          <a:bodyPr wrap="square" lIns="0" tIns="0" rIns="0" bIns="0" rtlCol="0" anchor="ctr"/>
+          <a:lstStyle/>
+          <a:p>
+            <a:pPr indent="0" marL="0">
+              <a:buNone/>
+            </a:pPr>
+            <a:r>
+              <a:rPr lang="en-US" sz="1100" dirty="0">
+                <a:solidFill>
+                  <a:srgbClr val="8E8EA0"/>
+                </a:solidFill>
+              </a:rPr>
+              <a:t>502亿 · 无直接 · 防御·化工周期对冲 · 5</a:t>
+            </a:r>
+            <a:endParaRPr lang="en-US" sz="1100" dirty="0"/>
+          </a:p>
+        </p:txBody>
+      </p:sp>
+      <p:sp>
+        <p:nvSpPr>
+          <p:cNvPr id="16" name="Shape 14"/>
+          <p:cNvSpPr/>
+          <p:nvPr/>
+        </p:nvSpPr>
+        <p:spPr>
+          <a:xfrm>
+            <a:off x="182880" y="3090672"/>
+            <a:ext cx="8778240" cy="420624"/>
+          </a:xfrm>
+          <a:prstGeom prst="roundRect">
+            <a:avLst>
+              <a:gd name="adj" fmla="val 13043"/>
+            </a:avLst>
+          </a:prstGeom>
+          <a:solidFill>
+            <a:srgbClr val="16213E"/>
+          </a:solidFill>
+          <a:ln/>
+        </p:spPr>
+      </p:sp>
+      <p:sp>
+        <p:nvSpPr>
+          <p:cNvPr id="17" name="Text 15"/>
+          <p:cNvSpPr/>
+          <p:nvPr/>
+        </p:nvSpPr>
+        <p:spPr>
+          <a:xfrm>
+            <a:off x="365760" y="3163824"/>
+            <a:ext cx="1371600" cy="274320"/>
+          </a:xfrm>
+          <a:prstGeom prst="rect">
+            <a:avLst/>
+          </a:prstGeom>
+          <a:noFill/>
+          <a:ln/>
+        </p:spPr>
+        <p:txBody>
+          <a:bodyPr wrap="square" lIns="0" tIns="0" rIns="0" bIns="0" rtlCol="0" anchor="ctr"/>
+          <a:lstStyle/>
+          <a:p>
+            <a:pPr indent="0" marL="0">
+              <a:buNone/>
+            </a:pPr>
+            <a:r>
+              <a:rPr lang="en-US" sz="1200" b="1" dirty="0">
+                <a:solidFill>
+                  <a:srgbClr val="4DA6FF"/>
+                </a:solidFill>
+                <a:latin typeface="Arial Black" pitchFamily="34" charset="0"/>
+                <a:ea typeface="Arial Black" pitchFamily="34" charset="-122"/>
+                <a:cs typeface="Arial Black" pitchFamily="34" charset="-120"/>
+              </a:rPr>
+              <a:t>太钢不锈</a:t>
+            </a:r>
+            <a:endParaRPr lang="en-US" sz="1200" dirty="0"/>
           </a:p>
         </p:txBody>
       </p:sp>
@@ -2825,29 +2836,90 @@
         </p:nvSpPr>
         <p:spPr>
           <a:xfrm>
-            <a:off x="457200" y="4480560"/>
-            <a:ext cx="3657600" cy="320040"/>
-          </a:xfrm>
-          <a:prstGeom prst="rect">
-            <a:avLst/>
-          </a:prstGeom>
-          <a:noFill/>
-          <a:ln/>
-        </p:spPr>
-        <p:txBody>
-          <a:bodyPr wrap="square" lIns="0" tIns="0" rIns="0" bIns="0" rtlCol="0" anchor="ctr"/>
-          <a:lstStyle/>
-          <a:p>
-            <a:pPr indent="0" marL="0">
-              <a:buNone/>
-            </a:pPr>
-            <a:r>
-              <a:rPr lang="en-US" sz="1200" dirty="0">
-                <a:solidFill>
-                  <a:srgbClr val="E4E4E8"/>
-                </a:solidFill>
-              </a:rPr>
-              <a:t>锆铪材料 · 固态电池+封装</a:t>
+            <a:off x="1828800" y="3163824"/>
+            <a:ext cx="6949440" cy="274320"/>
+          </a:xfrm>
+          <a:prstGeom prst="rect">
+            <a:avLst/>
+          </a:prstGeom>
+          <a:noFill/>
+          <a:ln/>
+        </p:spPr>
+        <p:txBody>
+          <a:bodyPr wrap="square" lIns="0" tIns="0" rIns="0" bIns="0" rtlCol="0" anchor="ctr"/>
+          <a:lstStyle/>
+          <a:p>
+            <a:pPr indent="0" marL="0">
+              <a:buNone/>
+            </a:pPr>
+            <a:r>
+              <a:rPr lang="en-US" sz="1100" dirty="0">
+                <a:solidFill>
+                  <a:srgbClr val="8E8EA0"/>
+                </a:solidFill>
+              </a:rPr>
+              <a:t>194亿 · 无直接 · 防御·钢铁周期/组合减震 · 5</a:t>
+            </a:r>
+            <a:endParaRPr lang="en-US" sz="1100" dirty="0"/>
+          </a:p>
+        </p:txBody>
+      </p:sp>
+      <p:sp>
+        <p:nvSpPr>
+          <p:cNvPr id="19" name="Shape 17"/>
+          <p:cNvSpPr/>
+          <p:nvPr/>
+        </p:nvSpPr>
+        <p:spPr>
+          <a:xfrm>
+            <a:off x="182880" y="3566160"/>
+            <a:ext cx="8778240" cy="420624"/>
+          </a:xfrm>
+          <a:prstGeom prst="roundRect">
+            <a:avLst>
+              <a:gd name="adj" fmla="val 13043"/>
+            </a:avLst>
+          </a:prstGeom>
+          <a:solidFill>
+            <a:srgbClr val="16213E"/>
+          </a:solidFill>
+          <a:ln/>
+        </p:spPr>
+      </p:sp>
+      <p:sp>
+        <p:nvSpPr>
+          <p:cNvPr id="20" name="Text 18"/>
+          <p:cNvSpPr/>
+          <p:nvPr/>
+        </p:nvSpPr>
+        <p:spPr>
+          <a:xfrm>
+            <a:off x="365760" y="3639312"/>
+            <a:ext cx="1371600" cy="274320"/>
+          </a:xfrm>
+          <a:prstGeom prst="rect">
+            <a:avLst/>
+          </a:prstGeom>
+          <a:noFill/>
+          <a:ln/>
+        </p:spPr>
+        <p:txBody>
+          <a:bodyPr wrap="square" lIns="0" tIns="0" rIns="0" bIns="0" rtlCol="0" anchor="ctr"/>
+          <a:lstStyle/>
+          <a:p>
+            <a:pPr indent="0" marL="0">
+              <a:buNone/>
+            </a:pPr>
+            <a:r>
+              <a:rPr lang="en-US" sz="1200" b="1" dirty="0">
+                <a:solidFill>
+                  <a:srgbClr val="4DA6FF"/>
+                </a:solidFill>
+                <a:latin typeface="Arial Black" pitchFamily="34" charset="0"/>
+                <a:ea typeface="Arial Black" pitchFamily="34" charset="-122"/>
+                <a:cs typeface="Arial Black" pitchFamily="34" charset="-120"/>
+              </a:rPr>
+              <a:t>德展健康</a:t>
             </a:r>
             <a:endParaRPr lang="en-US" sz="1200" dirty="0"/>
           </a:p>
@@ -2855,14 +2927,14 @@
       </p:sp>
       <p:sp>
         <p:nvSpPr>
-          <p:cNvPr id="19" name="Text 17"/>
-          <p:cNvSpPr/>
-          <p:nvPr/>
-        </p:nvSpPr>
-        <p:spPr>
-          <a:xfrm>
-            <a:off x="4572000" y="4251960"/>
-            <a:ext cx="4114800" cy="457200"/>
+          <p:cNvPr id="21" name="Text 19"/>
+          <p:cNvSpPr/>
+          <p:nvPr/>
+        </p:nvSpPr>
+        <p:spPr>
+          <a:xfrm>
+            <a:off x="1828800" y="3639312"/>
+            <a:ext cx="6949440" cy="274320"/>
           </a:xfrm>
           <a:prstGeom prst="rect">
             <a:avLst/>
@@ -2883,7 +2955,201 @@
                   <a:srgbClr val="8E8EA0"/>
                 </a:solidFill>
               </a:rPr>
-              <a:t>500亿前不减仓 · 2→3</a:t>
+              <a:t>68亿 · 无直接 · 防御·医药防御 · 5</a:t>
+            </a:r>
+            <a:endParaRPr lang="en-US" sz="1100" dirty="0"/>
+          </a:p>
+        </p:txBody>
+      </p:sp>
+      <p:sp>
+        <p:nvSpPr>
+          <p:cNvPr id="22" name="Shape 20"/>
+          <p:cNvSpPr/>
+          <p:nvPr/>
+        </p:nvSpPr>
+        <p:spPr>
+          <a:xfrm>
+            <a:off x="182880" y="4041648"/>
+            <a:ext cx="8778240" cy="420624"/>
+          </a:xfrm>
+          <a:prstGeom prst="roundRect">
+            <a:avLst>
+              <a:gd name="adj" fmla="val 13043"/>
+            </a:avLst>
+          </a:prstGeom>
+          <a:solidFill>
+            <a:srgbClr val="16213E"/>
+          </a:solidFill>
+          <a:ln/>
+        </p:spPr>
+      </p:sp>
+      <p:sp>
+        <p:nvSpPr>
+          <p:cNvPr id="23" name="Text 21"/>
+          <p:cNvSpPr/>
+          <p:nvPr/>
+        </p:nvSpPr>
+        <p:spPr>
+          <a:xfrm>
+            <a:off x="365760" y="4114800"/>
+            <a:ext cx="1371600" cy="274320"/>
+          </a:xfrm>
+          <a:prstGeom prst="rect">
+            <a:avLst/>
+          </a:prstGeom>
+          <a:noFill/>
+          <a:ln/>
+        </p:spPr>
+        <p:txBody>
+          <a:bodyPr wrap="square" lIns="0" tIns="0" rIns="0" bIns="0" rtlCol="0" anchor="ctr"/>
+          <a:lstStyle/>
+          <a:p>
+            <a:pPr indent="0" marL="0">
+              <a:buNone/>
+            </a:pPr>
+            <a:r>
+              <a:rPr lang="en-US" sz="1200" b="1" dirty="0">
+                <a:solidFill>
+                  <a:srgbClr val="4DA6FF"/>
+                </a:solidFill>
+                <a:latin typeface="Arial Black" pitchFamily="34" charset="0"/>
+                <a:ea typeface="Arial Black" pitchFamily="34" charset="-122"/>
+                <a:cs typeface="Arial Black" pitchFamily="34" charset="-120"/>
+              </a:rPr>
+              <a:t>泰和新材</a:t>
+            </a:r>
+            <a:endParaRPr lang="en-US" sz="1200" dirty="0"/>
+          </a:p>
+        </p:txBody>
+      </p:sp>
+      <p:sp>
+        <p:nvSpPr>
+          <p:cNvPr id="24" name="Text 22"/>
+          <p:cNvSpPr/>
+          <p:nvPr/>
+        </p:nvSpPr>
+        <p:spPr>
+          <a:xfrm>
+            <a:off x="1828800" y="4114800"/>
+            <a:ext cx="6949440" cy="274320"/>
+          </a:xfrm>
+          <a:prstGeom prst="rect">
+            <a:avLst/>
+          </a:prstGeom>
+          <a:noFill/>
+          <a:ln/>
+        </p:spPr>
+        <p:txBody>
+          <a:bodyPr wrap="square" lIns="0" tIns="0" rIns="0" bIns="0" rtlCol="0" anchor="ctr"/>
+          <a:lstStyle/>
+          <a:p>
+            <a:pPr indent="0" marL="0">
+              <a:buNone/>
+            </a:pPr>
+            <a:r>
+              <a:rPr lang="en-US" sz="1100" dirty="0">
+                <a:solidFill>
+                  <a:srgbClr val="8E8EA0"/>
+                </a:solidFill>
+              </a:rPr>
+              <a:t>122亿 · ⑥间接 · 防御·极度超卖等信号 · 5</a:t>
+            </a:r>
+            <a:endParaRPr lang="en-US" sz="1100" dirty="0"/>
+          </a:p>
+        </p:txBody>
+      </p:sp>
+      <p:sp>
+        <p:nvSpPr>
+          <p:cNvPr id="25" name="Shape 23"/>
+          <p:cNvSpPr/>
+          <p:nvPr/>
+        </p:nvSpPr>
+        <p:spPr>
+          <a:xfrm>
+            <a:off x="182880" y="4517136"/>
+            <a:ext cx="8778240" cy="420624"/>
+          </a:xfrm>
+          <a:prstGeom prst="roundRect">
+            <a:avLst>
+              <a:gd name="adj" fmla="val 13043"/>
+            </a:avLst>
+          </a:prstGeom>
+          <a:solidFill>
+            <a:srgbClr val="16213E"/>
+          </a:solidFill>
+          <a:ln/>
+        </p:spPr>
+      </p:sp>
+      <p:sp>
+        <p:nvSpPr>
+          <p:cNvPr id="26" name="Text 24"/>
+          <p:cNvSpPr/>
+          <p:nvPr/>
+        </p:nvSpPr>
+        <p:spPr>
+          <a:xfrm>
+            <a:off x="365760" y="4590288"/>
+            <a:ext cx="1371600" cy="274320"/>
+          </a:xfrm>
+          <a:prstGeom prst="rect">
+            <a:avLst/>
+          </a:prstGeom>
+          <a:noFill/>
+          <a:ln/>
+        </p:spPr>
+        <p:txBody>
+          <a:bodyPr wrap="square" lIns="0" tIns="0" rIns="0" bIns="0" rtlCol="0" anchor="ctr"/>
+          <a:lstStyle/>
+          <a:p>
+            <a:pPr indent="0" marL="0">
+              <a:buNone/>
+            </a:pPr>
+            <a:r>
+              <a:rPr lang="en-US" sz="1200" b="1" dirty="0">
+                <a:solidFill>
+                  <a:srgbClr val="3DD68C"/>
+                </a:solidFill>
+                <a:latin typeface="Arial Black" pitchFamily="34" charset="0"/>
+                <a:ea typeface="Arial Black" pitchFamily="34" charset="-122"/>
+                <a:cs typeface="Arial Black" pitchFamily="34" charset="-120"/>
+              </a:rPr>
+              <a:t>欧林生物</a:t>
+            </a:r>
+            <a:endParaRPr lang="en-US" sz="1200" dirty="0"/>
+          </a:p>
+        </p:txBody>
+      </p:sp>
+      <p:sp>
+        <p:nvSpPr>
+          <p:cNvPr id="27" name="Text 25"/>
+          <p:cNvSpPr/>
+          <p:nvPr/>
+        </p:nvSpPr>
+        <p:spPr>
+          <a:xfrm>
+            <a:off x="1828800" y="4590288"/>
+            <a:ext cx="6949440" cy="274320"/>
+          </a:xfrm>
+          <a:prstGeom prst="rect">
+            <a:avLst/>
+          </a:prstGeom>
+          <a:noFill/>
+          <a:ln/>
+        </p:spPr>
+        <p:txBody>
+          <a:bodyPr wrap="square" lIns="0" tIns="0" rIns="0" bIns="0" rtlCol="0" anchor="ctr"/>
+          <a:lstStyle/>
+          <a:p>
+            <a:pPr indent="0" marL="0">
+              <a:buNone/>
+            </a:pPr>
+            <a:r>
+              <a:rPr lang="en-US" sz="1100" dirty="0">
+                <a:solidFill>
+                  <a:srgbClr val="8E8EA0"/>
+                </a:solidFill>
+              </a:rPr>
+              <a:t>180亿 · 无直接 · 迷你仓·金葡菌疫苗揭盲 · 1→2</a:t>
             </a:r>
             <a:endParaRPr lang="en-US" sz="1100" dirty="0"/>
           </a:p>
@@ -2954,7 +3220,7 @@
                 <a:ea typeface="Arial Black" pitchFamily="34" charset="-122"/>
                 <a:cs typeface="Arial Black" pitchFamily="34" charset="-120"/>
               </a:rPr>
-              <a:t>A级+利润仓+防御（8只）</a:t>
+              <a:t>观察跟踪·前三只（重点）</a:t>
             </a:r>
             <a:endParaRPr lang="en-US" sz="2600" dirty="0"/>
           </a:p>
@@ -2988,18 +3254,23 @@
         </p:nvSpPr>
         <p:spPr>
           <a:xfrm>
-            <a:off x="182880" y="1188720"/>
-            <a:ext cx="8778240" cy="438912"/>
+            <a:off x="274320" y="1188720"/>
+            <a:ext cx="8595360" cy="1051560"/>
           </a:xfrm>
           <a:prstGeom prst="roundRect">
             <a:avLst>
-              <a:gd name="adj" fmla="val 12500"/>
+              <a:gd name="adj" fmla="val 8696"/>
             </a:avLst>
           </a:prstGeom>
           <a:solidFill>
             <a:srgbClr val="16213E"/>
           </a:solidFill>
-          <a:ln/>
+          <a:ln w="12700">
+            <a:solidFill>
+              <a:srgbClr val="4DA6FF"/>
+            </a:solidFill>
+            <a:prstDash val="solid"/>
+          </a:ln>
         </p:spPr>
       </p:sp>
       <p:sp>
@@ -3010,32 +3281,104 @@
         </p:nvSpPr>
         <p:spPr>
           <a:xfrm>
-            <a:off x="365760" y="1261872"/>
-            <a:ext cx="1463040" cy="292608"/>
-          </a:xfrm>
-          <a:prstGeom prst="rect">
-            <a:avLst/>
-          </a:prstGeom>
-          <a:noFill/>
-          <a:ln/>
-        </p:spPr>
-        <p:txBody>
-          <a:bodyPr wrap="square" lIns="0" tIns="0" rIns="0" bIns="0" rtlCol="0" anchor="ctr"/>
-          <a:lstStyle/>
-          <a:p>
-            <a:pPr indent="0" marL="0">
-              <a:buNone/>
-            </a:pPr>
-            <a:r>
-              <a:rPr lang="en-US" sz="1200" b="1" dirty="0">
-                <a:solidFill>
-                  <a:srgbClr val="3DD68C"/>
+            <a:off x="457200" y="1280160"/>
+            <a:ext cx="1828800" cy="365760"/>
+          </a:xfrm>
+          <a:prstGeom prst="rect">
+            <a:avLst/>
+          </a:prstGeom>
+          <a:noFill/>
+          <a:ln/>
+        </p:spPr>
+        <p:txBody>
+          <a:bodyPr wrap="square" lIns="0" tIns="0" rIns="0" bIns="0" rtlCol="0" anchor="ctr"/>
+          <a:lstStyle/>
+          <a:p>
+            <a:pPr indent="0" marL="0">
+              <a:buNone/>
+            </a:pPr>
+            <a:r>
+              <a:rPr lang="en-US" sz="1500" b="1" dirty="0">
+                <a:solidFill>
+                  <a:srgbClr val="4DA6FF"/>
                 </a:solidFill>
                 <a:latin typeface="Arial Black" pitchFamily="34" charset="0"/>
                 <a:ea typeface="Arial Black" pitchFamily="34" charset="-122"/>
                 <a:cs typeface="Arial Black" pitchFamily="34" charset="-120"/>
               </a:rPr>
-              <a:t>软通动力</a:t>
+              <a:t>中际旭创</a:t>
+            </a:r>
+            <a:endParaRPr lang="en-US" sz="1500" dirty="0"/>
+          </a:p>
+        </p:txBody>
+      </p:sp>
+      <p:sp>
+        <p:nvSpPr>
+          <p:cNvPr id="6" name="Text 4"/>
+          <p:cNvSpPr/>
+          <p:nvPr/>
+        </p:nvSpPr>
+        <p:spPr>
+          <a:xfrm>
+            <a:off x="457200" y="1645920"/>
+            <a:ext cx="3657600" cy="274320"/>
+          </a:xfrm>
+          <a:prstGeom prst="rect">
+            <a:avLst/>
+          </a:prstGeom>
+          <a:noFill/>
+          <a:ln/>
+        </p:spPr>
+        <p:txBody>
+          <a:bodyPr wrap="square" lIns="0" tIns="0" rIns="0" bIns="0" rtlCol="0" anchor="ctr"/>
+          <a:lstStyle/>
+          <a:p>
+            <a:pPr indent="0" marL="0">
+              <a:buNone/>
+            </a:pPr>
+            <a:r>
+              <a:rPr lang="en-US" sz="1300" dirty="0">
+                <a:solidFill>
+                  <a:srgbClr val="E4E4E8"/>
+                </a:solidFill>
+              </a:rPr>
+              <a:t>12200亿·81.6x · 卡点:⑤光模块</a:t>
+            </a:r>
+            <a:endParaRPr lang="en-US" sz="1300" dirty="0"/>
+          </a:p>
+        </p:txBody>
+      </p:sp>
+      <p:sp>
+        <p:nvSpPr>
+          <p:cNvPr id="7" name="Text 5"/>
+          <p:cNvSpPr/>
+          <p:nvPr/>
+        </p:nvSpPr>
+        <p:spPr>
+          <a:xfrm>
+            <a:off x="457200" y="1920240"/>
+            <a:ext cx="8229600" cy="274320"/>
+          </a:xfrm>
+          <a:prstGeom prst="rect">
+            <a:avLst/>
+          </a:prstGeom>
+          <a:noFill/>
+          <a:ln/>
+        </p:spPr>
+        <p:txBody>
+          <a:bodyPr wrap="square" lIns="0" tIns="0" rIns="0" bIns="0" rtlCol="0" anchor="ctr"/>
+          <a:lstStyle/>
+          <a:p>
+            <a:pPr indent="0" marL="0">
+              <a:buNone/>
+            </a:pPr>
+            <a:r>
+              <a:rPr lang="en-US" sz="1200" dirty="0">
+                <a:solidFill>
+                  <a:srgbClr val="8E8EA0"/>
+                </a:solidFill>
+              </a:rPr>
+              <a:t>光模块全球龙头/2027E千亿净利 · 阶段4</a:t>
             </a:r>
             <a:endParaRPr lang="en-US" sz="1200" dirty="0"/>
           </a:p>
@@ -3043,96 +3386,137 @@
       </p:sp>
       <p:sp>
         <p:nvSpPr>
-          <p:cNvPr id="6" name="Text 4"/>
-          <p:cNvSpPr/>
-          <p:nvPr/>
-        </p:nvSpPr>
-        <p:spPr>
-          <a:xfrm>
-            <a:off x="2011680" y="1261872"/>
-            <a:ext cx="6766560" cy="292608"/>
-          </a:xfrm>
-          <a:prstGeom prst="rect">
-            <a:avLst/>
-          </a:prstGeom>
-          <a:noFill/>
-          <a:ln/>
-        </p:spPr>
-        <p:txBody>
-          <a:bodyPr wrap="square" lIns="0" tIns="0" rIns="0" bIns="0" rtlCol="0" anchor="ctr"/>
-          <a:lstStyle/>
-          <a:p>
-            <a:pPr indent="0" marL="0">
-              <a:buNone/>
-            </a:pPr>
-            <a:r>
-              <a:rPr lang="en-US" sz="1100" dirty="0">
-                <a:solidFill>
-                  <a:srgbClr val="8E8EA0"/>
-                </a:solidFill>
-              </a:rPr>
-              <a:t>AI应用 · +418%浮盈标杆 · 4 · 持有</a:t>
-            </a:r>
-            <a:endParaRPr lang="en-US" sz="1100" dirty="0"/>
-          </a:p>
-        </p:txBody>
-      </p:sp>
-      <p:sp>
-        <p:nvSpPr>
-          <p:cNvPr id="7" name="Shape 5"/>
-          <p:cNvSpPr/>
-          <p:nvPr/>
-        </p:nvSpPr>
-        <p:spPr>
-          <a:xfrm>
-            <a:off x="182880" y="1691640"/>
-            <a:ext cx="8778240" cy="438912"/>
+          <p:cNvPr id="8" name="Shape 6"/>
+          <p:cNvSpPr/>
+          <p:nvPr/>
+        </p:nvSpPr>
+        <p:spPr>
+          <a:xfrm>
+            <a:off x="274320" y="2377440"/>
+            <a:ext cx="8595360" cy="1051560"/>
           </a:xfrm>
           <a:prstGeom prst="roundRect">
             <a:avLst>
-              <a:gd name="adj" fmla="val 12500"/>
+              <a:gd name="adj" fmla="val 8696"/>
             </a:avLst>
           </a:prstGeom>
           <a:solidFill>
             <a:srgbClr val="16213E"/>
           </a:solidFill>
-          <a:ln/>
-        </p:spPr>
-      </p:sp>
-      <p:sp>
-        <p:nvSpPr>
-          <p:cNvPr id="8" name="Text 6"/>
-          <p:cNvSpPr/>
-          <p:nvPr/>
-        </p:nvSpPr>
-        <p:spPr>
-          <a:xfrm>
-            <a:off x="365760" y="1764792"/>
-            <a:ext cx="1463040" cy="292608"/>
-          </a:xfrm>
-          <a:prstGeom prst="rect">
-            <a:avLst/>
-          </a:prstGeom>
-          <a:noFill/>
-          <a:ln/>
-        </p:spPr>
-        <p:txBody>
-          <a:bodyPr wrap="square" lIns="0" tIns="0" rIns="0" bIns="0" rtlCol="0" anchor="ctr"/>
-          <a:lstStyle/>
-          <a:p>
-            <a:pPr indent="0" marL="0">
-              <a:buNone/>
-            </a:pPr>
-            <a:r>
-              <a:rPr lang="en-US" sz="1200" b="1" dirty="0">
-                <a:solidFill>
-                  <a:srgbClr val="3DD68C"/>
+          <a:ln w="12700">
+            <a:solidFill>
+              <a:srgbClr val="4DA6FF"/>
+            </a:solidFill>
+            <a:prstDash val="solid"/>
+          </a:ln>
+        </p:spPr>
+      </p:sp>
+      <p:sp>
+        <p:nvSpPr>
+          <p:cNvPr id="9" name="Text 7"/>
+          <p:cNvSpPr/>
+          <p:nvPr/>
+        </p:nvSpPr>
+        <p:spPr>
+          <a:xfrm>
+            <a:off x="457200" y="2468880"/>
+            <a:ext cx="1828800" cy="365760"/>
+          </a:xfrm>
+          <a:prstGeom prst="rect">
+            <a:avLst/>
+          </a:prstGeom>
+          <a:noFill/>
+          <a:ln/>
+        </p:spPr>
+        <p:txBody>
+          <a:bodyPr wrap="square" lIns="0" tIns="0" rIns="0" bIns="0" rtlCol="0" anchor="ctr"/>
+          <a:lstStyle/>
+          <a:p>
+            <a:pPr indent="0" marL="0">
+              <a:buNone/>
+            </a:pPr>
+            <a:r>
+              <a:rPr lang="en-US" sz="1500" b="1" dirty="0">
+                <a:solidFill>
+                  <a:srgbClr val="4DA6FF"/>
                 </a:solidFill>
                 <a:latin typeface="Arial Black" pitchFamily="34" charset="0"/>
                 <a:ea typeface="Arial Black" pitchFamily="34" charset="-122"/>
                 <a:cs typeface="Arial Black" pitchFamily="34" charset="-120"/>
               </a:rPr>
-              <a:t>兴森科技</a:t>
+              <a:t>胜宏科技</a:t>
+            </a:r>
+            <a:endParaRPr lang="en-US" sz="1500" dirty="0"/>
+          </a:p>
+        </p:txBody>
+      </p:sp>
+      <p:sp>
+        <p:nvSpPr>
+          <p:cNvPr id="10" name="Text 8"/>
+          <p:cNvSpPr/>
+          <p:nvPr/>
+        </p:nvSpPr>
+        <p:spPr>
+          <a:xfrm>
+            <a:off x="457200" y="2834640"/>
+            <a:ext cx="3657600" cy="274320"/>
+          </a:xfrm>
+          <a:prstGeom prst="rect">
+            <a:avLst/>
+          </a:prstGeom>
+          <a:noFill/>
+          <a:ln/>
+        </p:spPr>
+        <p:txBody>
+          <a:bodyPr wrap="square" lIns="0" tIns="0" rIns="0" bIns="0" rtlCol="0" anchor="ctr"/>
+          <a:lstStyle/>
+          <a:p>
+            <a:pPr indent="0" marL="0">
+              <a:buNone/>
+            </a:pPr>
+            <a:r>
+              <a:rPr lang="en-US" sz="1300" dirty="0">
+                <a:solidFill>
+                  <a:srgbClr val="E4E4E8"/>
+                </a:solidFill>
+              </a:rPr>
+              <a:t>2594亿·57.1x · 卡点:④⑤</a:t>
+            </a:r>
+            <a:endParaRPr lang="en-US" sz="1300" dirty="0"/>
+          </a:p>
+        </p:txBody>
+      </p:sp>
+      <p:sp>
+        <p:nvSpPr>
+          <p:cNvPr id="11" name="Text 9"/>
+          <p:cNvSpPr/>
+          <p:nvPr/>
+        </p:nvSpPr>
+        <p:spPr>
+          <a:xfrm>
+            <a:off x="457200" y="3108960"/>
+            <a:ext cx="8229600" cy="274320"/>
+          </a:xfrm>
+          <a:prstGeom prst="rect">
+            <a:avLst/>
+          </a:prstGeom>
+          <a:noFill/>
+          <a:ln/>
+        </p:spPr>
+        <p:txBody>
+          <a:bodyPr wrap="square" lIns="0" tIns="0" rIns="0" bIns="0" rtlCol="0" anchor="ctr"/>
+          <a:lstStyle/>
+          <a:p>
+            <a:pPr indent="0" marL="0">
+              <a:buNone/>
+            </a:pPr>
+            <a:r>
+              <a:rPr lang="en-US" sz="1200" dirty="0">
+                <a:solidFill>
+                  <a:srgbClr val="8E8EA0"/>
+                </a:solidFill>
+              </a:rPr>
+              <a:t>AI PCB全球#1/泰国2027放量 · 阶段3→4</a:t>
             </a:r>
             <a:endParaRPr lang="en-US" sz="1200" dirty="0"/>
           </a:p>
@@ -3140,619 +3524,139 @@
       </p:sp>
       <p:sp>
         <p:nvSpPr>
-          <p:cNvPr id="9" name="Text 7"/>
-          <p:cNvSpPr/>
-          <p:nvPr/>
-        </p:nvSpPr>
-        <p:spPr>
-          <a:xfrm>
-            <a:off x="2011680" y="1764792"/>
-            <a:ext cx="6766560" cy="292608"/>
-          </a:xfrm>
-          <a:prstGeom prst="rect">
-            <a:avLst/>
-          </a:prstGeom>
-          <a:noFill/>
-          <a:ln/>
-        </p:spPr>
-        <p:txBody>
-          <a:bodyPr wrap="square" lIns="0" tIns="0" rIns="0" bIns="0" rtlCol="0" anchor="ctr"/>
-          <a:lstStyle/>
-          <a:p>
-            <a:pPr indent="0" marL="0">
-              <a:buNone/>
-            </a:pPr>
-            <a:r>
-              <a:rPr lang="en-US" sz="1100" dirty="0">
-                <a:solidFill>
-                  <a:srgbClr val="8E8EA0"/>
-                </a:solidFill>
-              </a:rPr>
-              <a:t>ABF载板 · 国产替代唯一 · 3 · 利润仓</a:t>
-            </a:r>
-            <a:endParaRPr lang="en-US" sz="1100" dirty="0"/>
-          </a:p>
-        </p:txBody>
-      </p:sp>
-      <p:sp>
-        <p:nvSpPr>
-          <p:cNvPr id="10" name="Shape 8"/>
-          <p:cNvSpPr/>
-          <p:nvPr/>
-        </p:nvSpPr>
-        <p:spPr>
-          <a:xfrm>
-            <a:off x="182880" y="2194560"/>
-            <a:ext cx="8778240" cy="438912"/>
+          <p:cNvPr id="12" name="Shape 10"/>
+          <p:cNvSpPr/>
+          <p:nvPr/>
+        </p:nvSpPr>
+        <p:spPr>
+          <a:xfrm>
+            <a:off x="274320" y="3566160"/>
+            <a:ext cx="8595360" cy="1051560"/>
           </a:xfrm>
           <a:prstGeom prst="roundRect">
             <a:avLst>
-              <a:gd name="adj" fmla="val 12500"/>
+              <a:gd name="adj" fmla="val 8696"/>
             </a:avLst>
           </a:prstGeom>
           <a:solidFill>
             <a:srgbClr val="16213E"/>
           </a:solidFill>
-          <a:ln/>
-        </p:spPr>
-      </p:sp>
-      <p:sp>
-        <p:nvSpPr>
-          <p:cNvPr id="11" name="Text 9"/>
-          <p:cNvSpPr/>
-          <p:nvPr/>
-        </p:nvSpPr>
-        <p:spPr>
-          <a:xfrm>
-            <a:off x="365760" y="2267712"/>
-            <a:ext cx="1463040" cy="292608"/>
-          </a:xfrm>
-          <a:prstGeom prst="rect">
-            <a:avLst/>
-          </a:prstGeom>
-          <a:noFill/>
-          <a:ln/>
-        </p:spPr>
-        <p:txBody>
-          <a:bodyPr wrap="square" lIns="0" tIns="0" rIns="0" bIns="0" rtlCol="0" anchor="ctr"/>
-          <a:lstStyle/>
-          <a:p>
-            <a:pPr indent="0" marL="0">
-              <a:buNone/>
-            </a:pPr>
-            <a:r>
-              <a:rPr lang="en-US" sz="1200" b="1" dirty="0">
-                <a:solidFill>
-                  <a:srgbClr val="3DD68C"/>
+          <a:ln w="12700">
+            <a:solidFill>
+              <a:srgbClr val="4DA6FF"/>
+            </a:solidFill>
+            <a:prstDash val="solid"/>
+          </a:ln>
+        </p:spPr>
+      </p:sp>
+      <p:sp>
+        <p:nvSpPr>
+          <p:cNvPr id="13" name="Text 11"/>
+          <p:cNvSpPr/>
+          <p:nvPr/>
+        </p:nvSpPr>
+        <p:spPr>
+          <a:xfrm>
+            <a:off x="457200" y="3657600"/>
+            <a:ext cx="1828800" cy="365760"/>
+          </a:xfrm>
+          <a:prstGeom prst="rect">
+            <a:avLst/>
+          </a:prstGeom>
+          <a:noFill/>
+          <a:ln/>
+        </p:spPr>
+        <p:txBody>
+          <a:bodyPr wrap="square" lIns="0" tIns="0" rIns="0" bIns="0" rtlCol="0" anchor="ctr"/>
+          <a:lstStyle/>
+          <a:p>
+            <a:pPr indent="0" marL="0">
+              <a:buNone/>
+            </a:pPr>
+            <a:r>
+              <a:rPr lang="en-US" sz="1500" b="1" dirty="0">
+                <a:solidFill>
+                  <a:srgbClr val="4DA6FF"/>
                 </a:solidFill>
                 <a:latin typeface="Arial Black" pitchFamily="34" charset="0"/>
                 <a:ea typeface="Arial Black" pitchFamily="34" charset="-122"/>
                 <a:cs typeface="Arial Black" pitchFamily="34" charset="-120"/>
               </a:rPr>
-              <a:t>星环科技</a:t>
+              <a:t>工业富联</a:t>
+            </a:r>
+            <a:endParaRPr lang="en-US" sz="1500" dirty="0"/>
+          </a:p>
+        </p:txBody>
+      </p:sp>
+      <p:sp>
+        <p:nvSpPr>
+          <p:cNvPr id="14" name="Text 12"/>
+          <p:cNvSpPr/>
+          <p:nvPr/>
+        </p:nvSpPr>
+        <p:spPr>
+          <a:xfrm>
+            <a:off x="457200" y="4023360"/>
+            <a:ext cx="3657600" cy="274320"/>
+          </a:xfrm>
+          <a:prstGeom prst="rect">
+            <a:avLst/>
+          </a:prstGeom>
+          <a:noFill/>
+          <a:ln/>
+        </p:spPr>
+        <p:txBody>
+          <a:bodyPr wrap="square" lIns="0" tIns="0" rIns="0" bIns="0" rtlCol="0" anchor="ctr"/>
+          <a:lstStyle/>
+          <a:p>
+            <a:pPr indent="0" marL="0">
+              <a:buNone/>
+            </a:pPr>
+            <a:r>
+              <a:rPr lang="en-US" sz="1300" dirty="0">
+                <a:solidFill>
+                  <a:srgbClr val="E4E4E8"/>
+                </a:solidFill>
+              </a:rPr>
+              <a:t>13151亿·32.4x · 卡点:间接</a:t>
+            </a:r>
+            <a:endParaRPr lang="en-US" sz="1300" dirty="0"/>
+          </a:p>
+        </p:txBody>
+      </p:sp>
+      <p:sp>
+        <p:nvSpPr>
+          <p:cNvPr id="15" name="Text 13"/>
+          <p:cNvSpPr/>
+          <p:nvPr/>
+        </p:nvSpPr>
+        <p:spPr>
+          <a:xfrm>
+            <a:off x="457200" y="4297680"/>
+            <a:ext cx="8229600" cy="274320"/>
+          </a:xfrm>
+          <a:prstGeom prst="rect">
+            <a:avLst/>
+          </a:prstGeom>
+          <a:noFill/>
+          <a:ln/>
+        </p:spPr>
+        <p:txBody>
+          <a:bodyPr wrap="square" lIns="0" tIns="0" rIns="0" bIns="0" rtlCol="0" anchor="ctr"/>
+          <a:lstStyle/>
+          <a:p>
+            <a:pPr indent="0" marL="0">
+              <a:buNone/>
+            </a:pPr>
+            <a:r>
+              <a:rPr lang="en-US" sz="1200" dirty="0">
+                <a:solidFill>
+                  <a:srgbClr val="8E8EA0"/>
+                </a:solidFill>
+              </a:rPr>
+              <a:t>AI服务器ODM/空间收窄 · 阶段4</a:t>
             </a:r>
             <a:endParaRPr lang="en-US" sz="1200" dirty="0"/>
-          </a:p>
-        </p:txBody>
-      </p:sp>
-      <p:sp>
-        <p:nvSpPr>
-          <p:cNvPr id="12" name="Text 10"/>
-          <p:cNvSpPr/>
-          <p:nvPr/>
-        </p:nvSpPr>
-        <p:spPr>
-          <a:xfrm>
-            <a:off x="2011680" y="2267712"/>
-            <a:ext cx="6766560" cy="292608"/>
-          </a:xfrm>
-          <a:prstGeom prst="rect">
-            <a:avLst/>
-          </a:prstGeom>
-          <a:noFill/>
-          <a:ln/>
-        </p:spPr>
-        <p:txBody>
-          <a:bodyPr wrap="square" lIns="0" tIns="0" rIns="0" bIns="0" rtlCol="0" anchor="ctr"/>
-          <a:lstStyle/>
-          <a:p>
-            <a:pPr indent="0" marL="0">
-              <a:buNone/>
-            </a:pPr>
-            <a:r>
-              <a:rPr lang="en-US" sz="1100" dirty="0">
-                <a:solidFill>
-                  <a:srgbClr val="8E8EA0"/>
-                </a:solidFill>
-              </a:rPr>
-              <a:t>数据平台 · 英伟达ISV认证 · 2→3 · 利润仓</a:t>
-            </a:r>
-            <a:endParaRPr lang="en-US" sz="1100" dirty="0"/>
-          </a:p>
-        </p:txBody>
-      </p:sp>
-      <p:sp>
-        <p:nvSpPr>
-          <p:cNvPr id="13" name="Shape 11"/>
-          <p:cNvSpPr/>
-          <p:nvPr/>
-        </p:nvSpPr>
-        <p:spPr>
-          <a:xfrm>
-            <a:off x="182880" y="2697480"/>
-            <a:ext cx="8778240" cy="438912"/>
-          </a:xfrm>
-          <a:prstGeom prst="roundRect">
-            <a:avLst>
-              <a:gd name="adj" fmla="val 12500"/>
-            </a:avLst>
-          </a:prstGeom>
-          <a:solidFill>
-            <a:srgbClr val="16213E"/>
-          </a:solidFill>
-          <a:ln/>
-        </p:spPr>
-      </p:sp>
-      <p:sp>
-        <p:nvSpPr>
-          <p:cNvPr id="14" name="Text 12"/>
-          <p:cNvSpPr/>
-          <p:nvPr/>
-        </p:nvSpPr>
-        <p:spPr>
-          <a:xfrm>
-            <a:off x="365760" y="2770632"/>
-            <a:ext cx="1463040" cy="292608"/>
-          </a:xfrm>
-          <a:prstGeom prst="rect">
-            <a:avLst/>
-          </a:prstGeom>
-          <a:noFill/>
-          <a:ln/>
-        </p:spPr>
-        <p:txBody>
-          <a:bodyPr wrap="square" lIns="0" tIns="0" rIns="0" bIns="0" rtlCol="0" anchor="ctr"/>
-          <a:lstStyle/>
-          <a:p>
-            <a:pPr indent="0" marL="0">
-              <a:buNone/>
-            </a:pPr>
-            <a:r>
-              <a:rPr lang="en-US" sz="1200" b="1" dirty="0">
-                <a:solidFill>
-                  <a:srgbClr val="3DD68C"/>
-                </a:solidFill>
-                <a:latin typeface="Arial Black" pitchFamily="34" charset="0"/>
-                <a:ea typeface="Arial Black" pitchFamily="34" charset="-122"/>
-                <a:cs typeface="Arial Black" pitchFamily="34" charset="-120"/>
-              </a:rPr>
-              <a:t>泰和新材</a:t>
-            </a:r>
-            <a:endParaRPr lang="en-US" sz="1200" dirty="0"/>
-          </a:p>
-        </p:txBody>
-      </p:sp>
-      <p:sp>
-        <p:nvSpPr>
-          <p:cNvPr id="15" name="Text 13"/>
-          <p:cNvSpPr/>
-          <p:nvPr/>
-        </p:nvSpPr>
-        <p:spPr>
-          <a:xfrm>
-            <a:off x="2011680" y="2770632"/>
-            <a:ext cx="6766560" cy="292608"/>
-          </a:xfrm>
-          <a:prstGeom prst="rect">
-            <a:avLst/>
-          </a:prstGeom>
-          <a:noFill/>
-          <a:ln/>
-        </p:spPr>
-        <p:txBody>
-          <a:bodyPr wrap="square" lIns="0" tIns="0" rIns="0" bIns="0" rtlCol="0" anchor="ctr"/>
-          <a:lstStyle/>
-          <a:p>
-            <a:pPr indent="0" marL="0">
-              <a:buNone/>
-            </a:pPr>
-            <a:r>
-              <a:rPr lang="en-US" sz="1100" dirty="0">
-                <a:solidFill>
-                  <a:srgbClr val="8E8EA0"/>
-                </a:solidFill>
-              </a:rPr>
-              <a:t>芳纶化工 · 极度超卖观察 · 5 · B+防御</a:t>
-            </a:r>
-            <a:endParaRPr lang="en-US" sz="1100" dirty="0"/>
-          </a:p>
-        </p:txBody>
-      </p:sp>
-      <p:sp>
-        <p:nvSpPr>
-          <p:cNvPr id="16" name="Shape 14"/>
-          <p:cNvSpPr/>
-          <p:nvPr/>
-        </p:nvSpPr>
-        <p:spPr>
-          <a:xfrm>
-            <a:off x="182880" y="3200400"/>
-            <a:ext cx="8778240" cy="438912"/>
-          </a:xfrm>
-          <a:prstGeom prst="roundRect">
-            <a:avLst>
-              <a:gd name="adj" fmla="val 12500"/>
-            </a:avLst>
-          </a:prstGeom>
-          <a:solidFill>
-            <a:srgbClr val="16213E"/>
-          </a:solidFill>
-          <a:ln/>
-        </p:spPr>
-      </p:sp>
-      <p:sp>
-        <p:nvSpPr>
-          <p:cNvPr id="17" name="Text 15"/>
-          <p:cNvSpPr/>
-          <p:nvPr/>
-        </p:nvSpPr>
-        <p:spPr>
-          <a:xfrm>
-            <a:off x="365760" y="3273552"/>
-            <a:ext cx="1463040" cy="292608"/>
-          </a:xfrm>
-          <a:prstGeom prst="rect">
-            <a:avLst/>
-          </a:prstGeom>
-          <a:noFill/>
-          <a:ln/>
-        </p:spPr>
-        <p:txBody>
-          <a:bodyPr wrap="square" lIns="0" tIns="0" rIns="0" bIns="0" rtlCol="0" anchor="ctr"/>
-          <a:lstStyle/>
-          <a:p>
-            <a:pPr indent="0" marL="0">
-              <a:buNone/>
-            </a:pPr>
-            <a:r>
-              <a:rPr lang="en-US" sz="1200" b="1" dirty="0">
-                <a:solidFill>
-                  <a:srgbClr val="3DD68C"/>
-                </a:solidFill>
-                <a:latin typeface="Arial Black" pitchFamily="34" charset="0"/>
-                <a:ea typeface="Arial Black" pitchFamily="34" charset="-122"/>
-                <a:cs typeface="Arial Black" pitchFamily="34" charset="-120"/>
-              </a:rPr>
-              <a:t>华峰化学</a:t>
-            </a:r>
-            <a:endParaRPr lang="en-US" sz="1200" dirty="0"/>
-          </a:p>
-        </p:txBody>
-      </p:sp>
-      <p:sp>
-        <p:nvSpPr>
-          <p:cNvPr id="18" name="Text 16"/>
-          <p:cNvSpPr/>
-          <p:nvPr/>
-        </p:nvSpPr>
-        <p:spPr>
-          <a:xfrm>
-            <a:off x="2011680" y="3273552"/>
-            <a:ext cx="6766560" cy="292608"/>
-          </a:xfrm>
-          <a:prstGeom prst="rect">
-            <a:avLst/>
-          </a:prstGeom>
-          <a:noFill/>
-          <a:ln/>
-        </p:spPr>
-        <p:txBody>
-          <a:bodyPr wrap="square" lIns="0" tIns="0" rIns="0" bIns="0" rtlCol="0" anchor="ctr"/>
-          <a:lstStyle/>
-          <a:p>
-            <a:pPr indent="0" marL="0">
-              <a:buNone/>
-            </a:pPr>
-            <a:r>
-              <a:rPr lang="en-US" sz="1100" dirty="0">
-                <a:solidFill>
-                  <a:srgbClr val="8E8EA0"/>
-                </a:solidFill>
-              </a:rPr>
-              <a:t>化工周期 · 组合对冲 · 5 · 防御</a:t>
-            </a:r>
-            <a:endParaRPr lang="en-US" sz="1100" dirty="0"/>
-          </a:p>
-        </p:txBody>
-      </p:sp>
-      <p:sp>
-        <p:nvSpPr>
-          <p:cNvPr id="19" name="Shape 17"/>
-          <p:cNvSpPr/>
-          <p:nvPr/>
-        </p:nvSpPr>
-        <p:spPr>
-          <a:xfrm>
-            <a:off x="182880" y="3703320"/>
-            <a:ext cx="8778240" cy="438912"/>
-          </a:xfrm>
-          <a:prstGeom prst="roundRect">
-            <a:avLst>
-              <a:gd name="adj" fmla="val 12500"/>
-            </a:avLst>
-          </a:prstGeom>
-          <a:solidFill>
-            <a:srgbClr val="16213E"/>
-          </a:solidFill>
-          <a:ln/>
-        </p:spPr>
-      </p:sp>
-      <p:sp>
-        <p:nvSpPr>
-          <p:cNvPr id="20" name="Text 18"/>
-          <p:cNvSpPr/>
-          <p:nvPr/>
-        </p:nvSpPr>
-        <p:spPr>
-          <a:xfrm>
-            <a:off x="365760" y="3776472"/>
-            <a:ext cx="1463040" cy="292608"/>
-          </a:xfrm>
-          <a:prstGeom prst="rect">
-            <a:avLst/>
-          </a:prstGeom>
-          <a:noFill/>
-          <a:ln/>
-        </p:spPr>
-        <p:txBody>
-          <a:bodyPr wrap="square" lIns="0" tIns="0" rIns="0" bIns="0" rtlCol="0" anchor="ctr"/>
-          <a:lstStyle/>
-          <a:p>
-            <a:pPr indent="0" marL="0">
-              <a:buNone/>
-            </a:pPr>
-            <a:r>
-              <a:rPr lang="en-US" sz="1200" b="1" dirty="0">
-                <a:solidFill>
-                  <a:srgbClr val="3DD68C"/>
-                </a:solidFill>
-                <a:latin typeface="Arial Black" pitchFamily="34" charset="0"/>
-                <a:ea typeface="Arial Black" pitchFamily="34" charset="-122"/>
-                <a:cs typeface="Arial Black" pitchFamily="34" charset="-120"/>
-              </a:rPr>
-              <a:t>太钢不锈</a:t>
-            </a:r>
-            <a:endParaRPr lang="en-US" sz="1200" dirty="0"/>
-          </a:p>
-        </p:txBody>
-      </p:sp>
-      <p:sp>
-        <p:nvSpPr>
-          <p:cNvPr id="21" name="Text 19"/>
-          <p:cNvSpPr/>
-          <p:nvPr/>
-        </p:nvSpPr>
-        <p:spPr>
-          <a:xfrm>
-            <a:off x="2011680" y="3776472"/>
-            <a:ext cx="6766560" cy="292608"/>
-          </a:xfrm>
-          <a:prstGeom prst="rect">
-            <a:avLst/>
-          </a:prstGeom>
-          <a:noFill/>
-          <a:ln/>
-        </p:spPr>
-        <p:txBody>
-          <a:bodyPr wrap="square" lIns="0" tIns="0" rIns="0" bIns="0" rtlCol="0" anchor="ctr"/>
-          <a:lstStyle/>
-          <a:p>
-            <a:pPr indent="0" marL="0">
-              <a:buNone/>
-            </a:pPr>
-            <a:r>
-              <a:rPr lang="en-US" sz="1100" dirty="0">
-                <a:solidFill>
-                  <a:srgbClr val="8E8EA0"/>
-                </a:solidFill>
-              </a:rPr>
-              <a:t>钢铁周期 · 组合减震 · 5 · 防御</a:t>
-            </a:r>
-            <a:endParaRPr lang="en-US" sz="1100" dirty="0"/>
-          </a:p>
-        </p:txBody>
-      </p:sp>
-      <p:sp>
-        <p:nvSpPr>
-          <p:cNvPr id="22" name="Shape 20"/>
-          <p:cNvSpPr/>
-          <p:nvPr/>
-        </p:nvSpPr>
-        <p:spPr>
-          <a:xfrm>
-            <a:off x="182880" y="4206240"/>
-            <a:ext cx="8778240" cy="438912"/>
-          </a:xfrm>
-          <a:prstGeom prst="roundRect">
-            <a:avLst>
-              <a:gd name="adj" fmla="val 12500"/>
-            </a:avLst>
-          </a:prstGeom>
-          <a:solidFill>
-            <a:srgbClr val="16213E"/>
-          </a:solidFill>
-          <a:ln/>
-        </p:spPr>
-      </p:sp>
-      <p:sp>
-        <p:nvSpPr>
-          <p:cNvPr id="23" name="Text 21"/>
-          <p:cNvSpPr/>
-          <p:nvPr/>
-        </p:nvSpPr>
-        <p:spPr>
-          <a:xfrm>
-            <a:off x="365760" y="4279392"/>
-            <a:ext cx="1463040" cy="292608"/>
-          </a:xfrm>
-          <a:prstGeom prst="rect">
-            <a:avLst/>
-          </a:prstGeom>
-          <a:noFill/>
-          <a:ln/>
-        </p:spPr>
-        <p:txBody>
-          <a:bodyPr wrap="square" lIns="0" tIns="0" rIns="0" bIns="0" rtlCol="0" anchor="ctr"/>
-          <a:lstStyle/>
-          <a:p>
-            <a:pPr indent="0" marL="0">
-              <a:buNone/>
-            </a:pPr>
-            <a:r>
-              <a:rPr lang="en-US" sz="1200" b="1" dirty="0">
-                <a:solidFill>
-                  <a:srgbClr val="3DD68C"/>
-                </a:solidFill>
-                <a:latin typeface="Arial Black" pitchFamily="34" charset="0"/>
-                <a:ea typeface="Arial Black" pitchFamily="34" charset="-122"/>
-                <a:cs typeface="Arial Black" pitchFamily="34" charset="-120"/>
-              </a:rPr>
-              <a:t>德展健康</a:t>
-            </a:r>
-            <a:endParaRPr lang="en-US" sz="1200" dirty="0"/>
-          </a:p>
-        </p:txBody>
-      </p:sp>
-      <p:sp>
-        <p:nvSpPr>
-          <p:cNvPr id="24" name="Text 22"/>
-          <p:cNvSpPr/>
-          <p:nvPr/>
-        </p:nvSpPr>
-        <p:spPr>
-          <a:xfrm>
-            <a:off x="2011680" y="4279392"/>
-            <a:ext cx="6766560" cy="292608"/>
-          </a:xfrm>
-          <a:prstGeom prst="rect">
-            <a:avLst/>
-          </a:prstGeom>
-          <a:noFill/>
-          <a:ln/>
-        </p:spPr>
-        <p:txBody>
-          <a:bodyPr wrap="square" lIns="0" tIns="0" rIns="0" bIns="0" rtlCol="0" anchor="ctr"/>
-          <a:lstStyle/>
-          <a:p>
-            <a:pPr indent="0" marL="0">
-              <a:buNone/>
-            </a:pPr>
-            <a:r>
-              <a:rPr lang="en-US" sz="1100" dirty="0">
-                <a:solidFill>
-                  <a:srgbClr val="8E8EA0"/>
-                </a:solidFill>
-              </a:rPr>
-              <a:t>医药防御 · 非主线 · 5 · 防御</a:t>
-            </a:r>
-            <a:endParaRPr lang="en-US" sz="1100" dirty="0"/>
-          </a:p>
-        </p:txBody>
-      </p:sp>
-      <p:sp>
-        <p:nvSpPr>
-          <p:cNvPr id="25" name="Shape 23"/>
-          <p:cNvSpPr/>
-          <p:nvPr/>
-        </p:nvSpPr>
-        <p:spPr>
-          <a:xfrm>
-            <a:off x="182880" y="4709160"/>
-            <a:ext cx="8778240" cy="438912"/>
-          </a:xfrm>
-          <a:prstGeom prst="roundRect">
-            <a:avLst>
-              <a:gd name="adj" fmla="val 12500"/>
-            </a:avLst>
-          </a:prstGeom>
-          <a:solidFill>
-            <a:srgbClr val="16213E"/>
-          </a:solidFill>
-          <a:ln/>
-        </p:spPr>
-      </p:sp>
-      <p:sp>
-        <p:nvSpPr>
-          <p:cNvPr id="26" name="Text 24"/>
-          <p:cNvSpPr/>
-          <p:nvPr/>
-        </p:nvSpPr>
-        <p:spPr>
-          <a:xfrm>
-            <a:off x="365760" y="4782312"/>
-            <a:ext cx="1463040" cy="292608"/>
-          </a:xfrm>
-          <a:prstGeom prst="rect">
-            <a:avLst/>
-          </a:prstGeom>
-          <a:noFill/>
-          <a:ln/>
-        </p:spPr>
-        <p:txBody>
-          <a:bodyPr wrap="square" lIns="0" tIns="0" rIns="0" bIns="0" rtlCol="0" anchor="ctr"/>
-          <a:lstStyle/>
-          <a:p>
-            <a:pPr indent="0" marL="0">
-              <a:buNone/>
-            </a:pPr>
-            <a:r>
-              <a:rPr lang="en-US" sz="1200" b="1" dirty="0">
-                <a:solidFill>
-                  <a:srgbClr val="3DD68C"/>
-                </a:solidFill>
-                <a:latin typeface="Arial Black" pitchFamily="34" charset="0"/>
-                <a:ea typeface="Arial Black" pitchFamily="34" charset="-122"/>
-                <a:cs typeface="Arial Black" pitchFamily="34" charset="-120"/>
-              </a:rPr>
-              <a:t>欧林生物</a:t>
-            </a:r>
-            <a:endParaRPr lang="en-US" sz="1200" dirty="0"/>
-          </a:p>
-        </p:txBody>
-      </p:sp>
-      <p:sp>
-        <p:nvSpPr>
-          <p:cNvPr id="27" name="Text 25"/>
-          <p:cNvSpPr/>
-          <p:nvPr/>
-        </p:nvSpPr>
-        <p:spPr>
-          <a:xfrm>
-            <a:off x="2011680" y="4782312"/>
-            <a:ext cx="6766560" cy="292608"/>
-          </a:xfrm>
-          <a:prstGeom prst="rect">
-            <a:avLst/>
-          </a:prstGeom>
-          <a:noFill/>
-          <a:ln/>
-        </p:spPr>
-        <p:txBody>
-          <a:bodyPr wrap="square" lIns="0" tIns="0" rIns="0" bIns="0" rtlCol="0" anchor="ctr"/>
-          <a:lstStyle/>
-          <a:p>
-            <a:pPr indent="0" marL="0">
-              <a:buNone/>
-            </a:pPr>
-            <a:r>
-              <a:rPr lang="en-US" sz="1100" dirty="0">
-                <a:solidFill>
-                  <a:srgbClr val="8E8EA0"/>
-                </a:solidFill>
-              </a:rPr>
-              <a:t>创新药 · 金葡菌揭盲 · 1→2 · 迷你仓</a:t>
-            </a:r>
-            <a:endParaRPr lang="en-US" sz="1100" dirty="0"/>
           </a:p>
         </p:txBody>
       </p:sp>
@@ -3821,7 +3725,7 @@
                 <a:ea typeface="Arial Black" pitchFamily="34" charset="-122"/>
                 <a:cs typeface="Arial Black" pitchFamily="34" charset="-120"/>
               </a:rPr>
-              <a:t>跟踪池·优先级排序</a:t>
+              <a:t>观察跟踪·后四只</a:t>
             </a:r>
             <a:endParaRPr lang="en-US" sz="2600" dirty="0"/>
           </a:p>
@@ -3855,12 +3759,12 @@
         </p:nvSpPr>
         <p:spPr>
           <a:xfrm>
-            <a:off x="182880" y="1188720"/>
-            <a:ext cx="8778240" cy="420624"/>
+            <a:off x="274320" y="1188720"/>
+            <a:ext cx="8595360" cy="822960"/>
           </a:xfrm>
           <a:prstGeom prst="roundRect">
             <a:avLst>
-              <a:gd name="adj" fmla="val 13043"/>
+              <a:gd name="adj" fmla="val 8889"/>
             </a:avLst>
           </a:prstGeom>
           <a:solidFill>
@@ -3877,24 +3781,24 @@
         </p:nvSpPr>
         <p:spPr>
           <a:xfrm>
-            <a:off x="365760" y="1261872"/>
-            <a:ext cx="1371600" cy="274320"/>
-          </a:xfrm>
-          <a:prstGeom prst="rect">
-            <a:avLst/>
-          </a:prstGeom>
-          <a:noFill/>
-          <a:ln/>
-        </p:spPr>
-        <p:txBody>
-          <a:bodyPr wrap="square" lIns="0" tIns="0" rIns="0" bIns="0" rtlCol="0" anchor="ctr"/>
-          <a:lstStyle/>
-          <a:p>
-            <a:pPr indent="0" marL="0">
-              <a:buNone/>
-            </a:pPr>
-            <a:r>
-              <a:rPr lang="en-US" sz="1200" b="1" dirty="0">
+            <a:off x="457200" y="1280160"/>
+            <a:ext cx="1645920" cy="320040"/>
+          </a:xfrm>
+          <a:prstGeom prst="rect">
+            <a:avLst/>
+          </a:prstGeom>
+          <a:noFill/>
+          <a:ln/>
+        </p:spPr>
+        <p:txBody>
+          <a:bodyPr wrap="square" lIns="0" tIns="0" rIns="0" bIns="0" rtlCol="0" anchor="ctr"/>
+          <a:lstStyle/>
+          <a:p>
+            <a:pPr indent="0" marL="0">
+              <a:buNone/>
+            </a:pPr>
+            <a:r>
+              <a:rPr lang="en-US" sz="1400" b="1" dirty="0">
                 <a:solidFill>
                   <a:srgbClr val="4DA6FF"/>
                 </a:solidFill>
@@ -3902,7 +3806,43 @@
                 <a:ea typeface="Arial Black" pitchFamily="34" charset="-122"/>
                 <a:cs typeface="Arial Black" pitchFamily="34" charset="-120"/>
               </a:rPr>
-              <a:t>中际旭创</a:t>
+              <a:t>立讯精密</a:t>
+            </a:r>
+            <a:endParaRPr lang="en-US" sz="1400" dirty="0"/>
+          </a:p>
+        </p:txBody>
+      </p:sp>
+      <p:sp>
+        <p:nvSpPr>
+          <p:cNvPr id="6" name="Text 4"/>
+          <p:cNvSpPr/>
+          <p:nvPr/>
+        </p:nvSpPr>
+        <p:spPr>
+          <a:xfrm>
+            <a:off x="2286000" y="1280160"/>
+            <a:ext cx="1828800" cy="274320"/>
+          </a:xfrm>
+          <a:prstGeom prst="rect">
+            <a:avLst/>
+          </a:prstGeom>
+          <a:noFill/>
+          <a:ln/>
+        </p:spPr>
+        <p:txBody>
+          <a:bodyPr wrap="square" lIns="0" tIns="0" rIns="0" bIns="0" rtlCol="0" anchor="ctr"/>
+          <a:lstStyle/>
+          <a:p>
+            <a:pPr indent="0" marL="0">
+              <a:buNone/>
+            </a:pPr>
+            <a:r>
+              <a:rPr lang="en-US" sz="1200" dirty="0">
+                <a:solidFill>
+                  <a:srgbClr val="E4E4E8"/>
+                </a:solidFill>
+              </a:rPr>
+              <a:t>4760亿·27.9x</a:t>
             </a:r>
             <a:endParaRPr lang="en-US" sz="1200" dirty="0"/>
           </a:p>
@@ -3910,14 +3850,14 @@
       </p:sp>
       <p:sp>
         <p:nvSpPr>
-          <p:cNvPr id="6" name="Text 4"/>
-          <p:cNvSpPr/>
-          <p:nvPr/>
-        </p:nvSpPr>
-        <p:spPr>
-          <a:xfrm>
-            <a:off x="1920240" y="1261872"/>
-            <a:ext cx="6858000" cy="274320"/>
+          <p:cNvPr id="7" name="Text 5"/>
+          <p:cNvSpPr/>
+          <p:nvPr/>
+        </p:nvSpPr>
+        <p:spPr>
+          <a:xfrm>
+            <a:off x="457200" y="1600200"/>
+            <a:ext cx="8229600" cy="274320"/>
           </a:xfrm>
           <a:prstGeom prst="rect">
             <a:avLst/>
@@ -3938,7 +3878,7 @@
                   <a:srgbClr val="8E8EA0"/>
                 </a:solidFill>
               </a:rPr>
-              <a:t>光模块全球龙头 · PE 81.6x PE · 阶段4 · ★ 龙头标杆</a:t>
+              <a:t>消费电子+AI硬件/Apple Vision+AI服务器</a:t>
             </a:r>
             <a:endParaRPr lang="en-US" sz="1100" dirty="0"/>
           </a:p>
@@ -3946,18 +3886,54 @@
       </p:sp>
       <p:sp>
         <p:nvSpPr>
-          <p:cNvPr id="7" name="Shape 5"/>
-          <p:cNvSpPr/>
-          <p:nvPr/>
-        </p:nvSpPr>
-        <p:spPr>
-          <a:xfrm>
-            <a:off x="182880" y="1664208"/>
-            <a:ext cx="8778240" cy="420624"/>
+          <p:cNvPr id="8" name="Text 6"/>
+          <p:cNvSpPr/>
+          <p:nvPr/>
+        </p:nvSpPr>
+        <p:spPr>
+          <a:xfrm>
+            <a:off x="5486400" y="1280160"/>
+            <a:ext cx="3200400" cy="274320"/>
+          </a:xfrm>
+          <a:prstGeom prst="rect">
+            <a:avLst/>
+          </a:prstGeom>
+          <a:noFill/>
+          <a:ln/>
+        </p:spPr>
+        <p:txBody>
+          <a:bodyPr wrap="square" lIns="0" tIns="0" rIns="0" bIns="0" rtlCol="0" anchor="ctr"/>
+          <a:lstStyle/>
+          <a:p>
+            <a:pPr indent="0" marL="0">
+              <a:buNone/>
+            </a:pPr>
+            <a:r>
+              <a:rPr lang="en-US" sz="1200" b="1" dirty="0">
+                <a:solidFill>
+                  <a:srgbClr val="F0A040"/>
+                </a:solidFill>
+              </a:rPr>
+              <a:t>阶段:3→4</a:t>
+            </a:r>
+            <a:endParaRPr lang="en-US" sz="1200" dirty="0"/>
+          </a:p>
+        </p:txBody>
+      </p:sp>
+      <p:sp>
+        <p:nvSpPr>
+          <p:cNvPr id="9" name="Shape 7"/>
+          <p:cNvSpPr/>
+          <p:nvPr/>
+        </p:nvSpPr>
+        <p:spPr>
+          <a:xfrm>
+            <a:off x="274320" y="2148840"/>
+            <a:ext cx="8595360" cy="822960"/>
           </a:xfrm>
           <a:prstGeom prst="roundRect">
             <a:avLst>
-              <a:gd name="adj" fmla="val 13043"/>
+              <a:gd name="adj" fmla="val 8889"/>
             </a:avLst>
           </a:prstGeom>
           <a:solidFill>
@@ -3968,30 +3944,30 @@
       </p:sp>
       <p:sp>
         <p:nvSpPr>
-          <p:cNvPr id="8" name="Text 6"/>
-          <p:cNvSpPr/>
-          <p:nvPr/>
-        </p:nvSpPr>
-        <p:spPr>
-          <a:xfrm>
-            <a:off x="365760" y="1737360"/>
-            <a:ext cx="1371600" cy="274320"/>
-          </a:xfrm>
-          <a:prstGeom prst="rect">
-            <a:avLst/>
-          </a:prstGeom>
-          <a:noFill/>
-          <a:ln/>
-        </p:spPr>
-        <p:txBody>
-          <a:bodyPr wrap="square" lIns="0" tIns="0" rIns="0" bIns="0" rtlCol="0" anchor="ctr"/>
-          <a:lstStyle/>
-          <a:p>
-            <a:pPr indent="0" marL="0">
-              <a:buNone/>
-            </a:pPr>
-            <a:r>
-              <a:rPr lang="en-US" sz="1200" b="1" dirty="0">
+          <p:cNvPr id="10" name="Text 8"/>
+          <p:cNvSpPr/>
+          <p:nvPr/>
+        </p:nvSpPr>
+        <p:spPr>
+          <a:xfrm>
+            <a:off x="457200" y="2240280"/>
+            <a:ext cx="1645920" cy="320040"/>
+          </a:xfrm>
+          <a:prstGeom prst="rect">
+            <a:avLst/>
+          </a:prstGeom>
+          <a:noFill/>
+          <a:ln/>
+        </p:spPr>
+        <p:txBody>
+          <a:bodyPr wrap="square" lIns="0" tIns="0" rIns="0" bIns="0" rtlCol="0" anchor="ctr"/>
+          <a:lstStyle/>
+          <a:p>
+            <a:pPr indent="0" marL="0">
+              <a:buNone/>
+            </a:pPr>
+            <a:r>
+              <a:rPr lang="en-US" sz="1400" b="1" dirty="0">
                 <a:solidFill>
                   <a:srgbClr val="4DA6FF"/>
                 </a:solidFill>
@@ -3999,7 +3975,43 @@
                 <a:ea typeface="Arial Black" pitchFamily="34" charset="-122"/>
                 <a:cs typeface="Arial Black" pitchFamily="34" charset="-120"/>
               </a:rPr>
-              <a:t>胜宏科技</a:t>
+              <a:t>华丰科技</a:t>
+            </a:r>
+            <a:endParaRPr lang="en-US" sz="1400" dirty="0"/>
+          </a:p>
+        </p:txBody>
+      </p:sp>
+      <p:sp>
+        <p:nvSpPr>
+          <p:cNvPr id="11" name="Text 9"/>
+          <p:cNvSpPr/>
+          <p:nvPr/>
+        </p:nvSpPr>
+        <p:spPr>
+          <a:xfrm>
+            <a:off x="2286000" y="2240280"/>
+            <a:ext cx="1828800" cy="274320"/>
+          </a:xfrm>
+          <a:prstGeom prst="rect">
+            <a:avLst/>
+          </a:prstGeom>
+          <a:noFill/>
+          <a:ln/>
+        </p:spPr>
+        <p:txBody>
+          <a:bodyPr wrap="square" lIns="0" tIns="0" rIns="0" bIns="0" rtlCol="0" anchor="ctr"/>
+          <a:lstStyle/>
+          <a:p>
+            <a:pPr indent="0" marL="0">
+              <a:buNone/>
+            </a:pPr>
+            <a:r>
+              <a:rPr lang="en-US" sz="1200" dirty="0">
+                <a:solidFill>
+                  <a:srgbClr val="E4E4E8"/>
+                </a:solidFill>
+              </a:rPr>
+              <a:t>946亿·219x</a:t>
             </a:r>
             <a:endParaRPr lang="en-US" sz="1200" dirty="0"/>
           </a:p>
@@ -4007,14 +4019,14 @@
       </p:sp>
       <p:sp>
         <p:nvSpPr>
-          <p:cNvPr id="9" name="Text 7"/>
-          <p:cNvSpPr/>
-          <p:nvPr/>
-        </p:nvSpPr>
-        <p:spPr>
-          <a:xfrm>
-            <a:off x="1920240" y="1737360"/>
-            <a:ext cx="6858000" cy="274320"/>
+          <p:cNvPr id="12" name="Text 10"/>
+          <p:cNvSpPr/>
+          <p:nvPr/>
+        </p:nvSpPr>
+        <p:spPr>
+          <a:xfrm>
+            <a:off x="457200" y="2560320"/>
+            <a:ext cx="8229600" cy="274320"/>
           </a:xfrm>
           <a:prstGeom prst="rect">
             <a:avLst/>
@@ -4035,7 +4047,7 @@
                   <a:srgbClr val="8E8EA0"/>
                 </a:solidFill>
               </a:rPr>
-              <a:t>AI PCB全球#1 · PE 57.1x PE · 阶段3→4 · ★ 等回调建仓</a:t>
+              <a:t>电连接器+卫星通信/卡位独特</a:t>
             </a:r>
             <a:endParaRPr lang="en-US" sz="1100" dirty="0"/>
           </a:p>
@@ -4043,18 +4055,54 @@
       </p:sp>
       <p:sp>
         <p:nvSpPr>
-          <p:cNvPr id="10" name="Shape 8"/>
-          <p:cNvSpPr/>
-          <p:nvPr/>
-        </p:nvSpPr>
-        <p:spPr>
-          <a:xfrm>
-            <a:off x="182880" y="2139696"/>
-            <a:ext cx="8778240" cy="420624"/>
+          <p:cNvPr id="13" name="Text 11"/>
+          <p:cNvSpPr/>
+          <p:nvPr/>
+        </p:nvSpPr>
+        <p:spPr>
+          <a:xfrm>
+            <a:off x="5486400" y="2240280"/>
+            <a:ext cx="3200400" cy="274320"/>
+          </a:xfrm>
+          <a:prstGeom prst="rect">
+            <a:avLst/>
+          </a:prstGeom>
+          <a:noFill/>
+          <a:ln/>
+        </p:spPr>
+        <p:txBody>
+          <a:bodyPr wrap="square" lIns="0" tIns="0" rIns="0" bIns="0" rtlCol="0" anchor="ctr"/>
+          <a:lstStyle/>
+          <a:p>
+            <a:pPr indent="0" marL="0">
+              <a:buNone/>
+            </a:pPr>
+            <a:r>
+              <a:rPr lang="en-US" sz="1200" b="1" dirty="0">
+                <a:solidFill>
+                  <a:srgbClr val="F0A040"/>
+                </a:solidFill>
+              </a:rPr>
+              <a:t>阶段:3</a:t>
+            </a:r>
+            <a:endParaRPr lang="en-US" sz="1200" dirty="0"/>
+          </a:p>
+        </p:txBody>
+      </p:sp>
+      <p:sp>
+        <p:nvSpPr>
+          <p:cNvPr id="14" name="Shape 12"/>
+          <p:cNvSpPr/>
+          <p:nvPr/>
+        </p:nvSpPr>
+        <p:spPr>
+          <a:xfrm>
+            <a:off x="274320" y="3108960"/>
+            <a:ext cx="8595360" cy="822960"/>
           </a:xfrm>
           <a:prstGeom prst="roundRect">
             <a:avLst>
-              <a:gd name="adj" fmla="val 13043"/>
+              <a:gd name="adj" fmla="val 8889"/>
             </a:avLst>
           </a:prstGeom>
           <a:solidFill>
@@ -4065,30 +4113,30 @@
       </p:sp>
       <p:sp>
         <p:nvSpPr>
-          <p:cNvPr id="11" name="Text 9"/>
-          <p:cNvSpPr/>
-          <p:nvPr/>
-        </p:nvSpPr>
-        <p:spPr>
-          <a:xfrm>
-            <a:off x="365760" y="2212848"/>
-            <a:ext cx="1371600" cy="274320"/>
-          </a:xfrm>
-          <a:prstGeom prst="rect">
-            <a:avLst/>
-          </a:prstGeom>
-          <a:noFill/>
-          <a:ln/>
-        </p:spPr>
-        <p:txBody>
-          <a:bodyPr wrap="square" lIns="0" tIns="0" rIns="0" bIns="0" rtlCol="0" anchor="ctr"/>
-          <a:lstStyle/>
-          <a:p>
-            <a:pPr indent="0" marL="0">
-              <a:buNone/>
-            </a:pPr>
-            <a:r>
-              <a:rPr lang="en-US" sz="1200" b="1" dirty="0">
+          <p:cNvPr id="15" name="Text 13"/>
+          <p:cNvSpPr/>
+          <p:nvPr/>
+        </p:nvSpPr>
+        <p:spPr>
+          <a:xfrm>
+            <a:off x="457200" y="3200400"/>
+            <a:ext cx="1645920" cy="320040"/>
+          </a:xfrm>
+          <a:prstGeom prst="rect">
+            <a:avLst/>
+          </a:prstGeom>
+          <a:noFill/>
+          <a:ln/>
+        </p:spPr>
+        <p:txBody>
+          <a:bodyPr wrap="square" lIns="0" tIns="0" rIns="0" bIns="0" rtlCol="0" anchor="ctr"/>
+          <a:lstStyle/>
+          <a:p>
+            <a:pPr indent="0" marL="0">
+              <a:buNone/>
+            </a:pPr>
+            <a:r>
+              <a:rPr lang="en-US" sz="1400" b="1" dirty="0">
                 <a:solidFill>
                   <a:srgbClr val="4DA6FF"/>
                 </a:solidFill>
@@ -4098,20 +4146,56 @@
               </a:rPr>
               <a:t>锡业股份</a:t>
             </a:r>
+            <a:endParaRPr lang="en-US" sz="1400" dirty="0"/>
+          </a:p>
+        </p:txBody>
+      </p:sp>
+      <p:sp>
+        <p:nvSpPr>
+          <p:cNvPr id="16" name="Text 14"/>
+          <p:cNvSpPr/>
+          <p:nvPr/>
+        </p:nvSpPr>
+        <p:spPr>
+          <a:xfrm>
+            <a:off x="2286000" y="3200400"/>
+            <a:ext cx="1828800" cy="274320"/>
+          </a:xfrm>
+          <a:prstGeom prst="rect">
+            <a:avLst/>
+          </a:prstGeom>
+          <a:noFill/>
+          <a:ln/>
+        </p:spPr>
+        <p:txBody>
+          <a:bodyPr wrap="square" lIns="0" tIns="0" rIns="0" bIns="0" rtlCol="0" anchor="ctr"/>
+          <a:lstStyle/>
+          <a:p>
+            <a:pPr indent="0" marL="0">
+              <a:buNone/>
+            </a:pPr>
+            <a:r>
+              <a:rPr lang="en-US" sz="1200" dirty="0">
+                <a:solidFill>
+                  <a:srgbClr val="E4E4E8"/>
+                </a:solidFill>
+              </a:rPr>
+              <a:t>600亿·25.7x</a:t>
+            </a:r>
             <a:endParaRPr lang="en-US" sz="1200" dirty="0"/>
           </a:p>
         </p:txBody>
       </p:sp>
       <p:sp>
         <p:nvSpPr>
-          <p:cNvPr id="12" name="Text 10"/>
-          <p:cNvSpPr/>
-          <p:nvPr/>
-        </p:nvSpPr>
-        <p:spPr>
-          <a:xfrm>
-            <a:off x="1920240" y="2212848"/>
-            <a:ext cx="6858000" cy="274320"/>
+          <p:cNvPr id="17" name="Text 15"/>
+          <p:cNvSpPr/>
+          <p:nvPr/>
+        </p:nvSpPr>
+        <p:spPr>
+          <a:xfrm>
+            <a:off x="457200" y="3520440"/>
+            <a:ext cx="8229600" cy="274320"/>
           </a:xfrm>
           <a:prstGeom prst="rect">
             <a:avLst/>
@@ -4132,7 +4216,7 @@
                   <a:srgbClr val="8E8EA0"/>
                 </a:solidFill>
               </a:rPr>
-              <a:t>锡全球27%断层 · PE 25.7x PE · 阶段3→4 · ★ 等PB回调</a:t>
+              <a:t>锡全球27%断层/PB 92.8%偏贵/等回调</a:t>
             </a:r>
             <a:endParaRPr lang="en-US" sz="1100" dirty="0"/>
           </a:p>
@@ -4140,60 +4224,137 @@
       </p:sp>
       <p:sp>
         <p:nvSpPr>
-          <p:cNvPr id="13" name="Shape 11"/>
-          <p:cNvSpPr/>
-          <p:nvPr/>
-        </p:nvSpPr>
-        <p:spPr>
-          <a:xfrm>
-            <a:off x="182880" y="2615184"/>
-            <a:ext cx="8778240" cy="420624"/>
+          <p:cNvPr id="18" name="Text 16"/>
+          <p:cNvSpPr/>
+          <p:nvPr/>
+        </p:nvSpPr>
+        <p:spPr>
+          <a:xfrm>
+            <a:off x="5486400" y="3200400"/>
+            <a:ext cx="3200400" cy="274320"/>
+          </a:xfrm>
+          <a:prstGeom prst="rect">
+            <a:avLst/>
+          </a:prstGeom>
+          <a:noFill/>
+          <a:ln/>
+        </p:spPr>
+        <p:txBody>
+          <a:bodyPr wrap="square" lIns="0" tIns="0" rIns="0" bIns="0" rtlCol="0" anchor="ctr"/>
+          <a:lstStyle/>
+          <a:p>
+            <a:pPr indent="0" marL="0">
+              <a:buNone/>
+            </a:pPr>
+            <a:r>
+              <a:rPr lang="en-US" sz="1200" b="1" dirty="0">
+                <a:solidFill>
+                  <a:srgbClr val="F0A040"/>
+                </a:solidFill>
+              </a:rPr>
+              <a:t>阶段:3→4</a:t>
+            </a:r>
+            <a:endParaRPr lang="en-US" sz="1200" dirty="0"/>
+          </a:p>
+        </p:txBody>
+      </p:sp>
+      <p:sp>
+        <p:nvSpPr>
+          <p:cNvPr id="19" name="Shape 17"/>
+          <p:cNvSpPr/>
+          <p:nvPr/>
+        </p:nvSpPr>
+        <p:spPr>
+          <a:xfrm>
+            <a:off x="274320" y="4069080"/>
+            <a:ext cx="8595360" cy="822960"/>
           </a:xfrm>
           <a:prstGeom prst="roundRect">
             <a:avLst>
-              <a:gd name="adj" fmla="val 13043"/>
+              <a:gd name="adj" fmla="val 8889"/>
             </a:avLst>
           </a:prstGeom>
           <a:solidFill>
             <a:srgbClr val="16213E"/>
           </a:solidFill>
-          <a:ln/>
-        </p:spPr>
-      </p:sp>
-      <p:sp>
-        <p:nvSpPr>
-          <p:cNvPr id="14" name="Text 12"/>
-          <p:cNvSpPr/>
-          <p:nvPr/>
-        </p:nvSpPr>
-        <p:spPr>
-          <a:xfrm>
-            <a:off x="365760" y="2688336"/>
-            <a:ext cx="1371600" cy="274320"/>
-          </a:xfrm>
-          <a:prstGeom prst="rect">
-            <a:avLst/>
-          </a:prstGeom>
-          <a:noFill/>
-          <a:ln/>
-        </p:spPr>
-        <p:txBody>
-          <a:bodyPr wrap="square" lIns="0" tIns="0" rIns="0" bIns="0" rtlCol="0" anchor="ctr"/>
-          <a:lstStyle/>
-          <a:p>
-            <a:pPr indent="0" marL="0">
-              <a:buNone/>
-            </a:pPr>
-            <a:r>
-              <a:rPr lang="en-US" sz="1200" b="1" dirty="0">
-                <a:solidFill>
-                  <a:srgbClr val="4DA6FF"/>
+          <a:ln w="12700">
+            <a:solidFill>
+              <a:srgbClr val="FF5656"/>
+            </a:solidFill>
+            <a:prstDash val="solid"/>
+          </a:ln>
+        </p:spPr>
+      </p:sp>
+      <p:sp>
+        <p:nvSpPr>
+          <p:cNvPr id="20" name="Text 18"/>
+          <p:cNvSpPr/>
+          <p:nvPr/>
+        </p:nvSpPr>
+        <p:spPr>
+          <a:xfrm>
+            <a:off x="457200" y="4160520"/>
+            <a:ext cx="1645920" cy="320040"/>
+          </a:xfrm>
+          <a:prstGeom prst="rect">
+            <a:avLst/>
+          </a:prstGeom>
+          <a:noFill/>
+          <a:ln/>
+        </p:spPr>
+        <p:txBody>
+          <a:bodyPr wrap="square" lIns="0" tIns="0" rIns="0" bIns="0" rtlCol="0" anchor="ctr"/>
+          <a:lstStyle/>
+          <a:p>
+            <a:pPr indent="0" marL="0">
+              <a:buNone/>
+            </a:pPr>
+            <a:r>
+              <a:rPr lang="en-US" sz="1400" b="1" dirty="0">
+                <a:solidFill>
+                  <a:srgbClr val="FF5656"/>
                 </a:solidFill>
                 <a:latin typeface="Arial Black" pitchFamily="34" charset="0"/>
                 <a:ea typeface="Arial Black" pitchFamily="34" charset="-122"/>
                 <a:cs typeface="Arial Black" pitchFamily="34" charset="-120"/>
               </a:rPr>
-              <a:t>巨化股份</a:t>
+              <a:t>中远海能</a:t>
+            </a:r>
+            <a:endParaRPr lang="en-US" sz="1400" dirty="0"/>
+          </a:p>
+        </p:txBody>
+      </p:sp>
+      <p:sp>
+        <p:nvSpPr>
+          <p:cNvPr id="21" name="Text 19"/>
+          <p:cNvSpPr/>
+          <p:nvPr/>
+        </p:nvSpPr>
+        <p:spPr>
+          <a:xfrm>
+            <a:off x="2286000" y="4160520"/>
+            <a:ext cx="1828800" cy="274320"/>
+          </a:xfrm>
+          <a:prstGeom prst="rect">
+            <a:avLst/>
+          </a:prstGeom>
+          <a:noFill/>
+          <a:ln/>
+        </p:spPr>
+        <p:txBody>
+          <a:bodyPr wrap="square" lIns="0" tIns="0" rIns="0" bIns="0" rtlCol="0" anchor="ctr"/>
+          <a:lstStyle/>
+          <a:p>
+            <a:pPr indent="0" marL="0">
+              <a:buNone/>
+            </a:pPr>
+            <a:r>
+              <a:rPr lang="en-US" sz="1200" dirty="0">
+                <a:solidFill>
+                  <a:srgbClr val="E4E4E8"/>
+                </a:solidFill>
+              </a:rPr>
+              <a:t>805亿·10x</a:t>
             </a:r>
             <a:endParaRPr lang="en-US" sz="1200" dirty="0"/>
           </a:p>
@@ -4201,14 +4362,14 @@
       </p:sp>
       <p:sp>
         <p:nvSpPr>
-          <p:cNvPr id="15" name="Text 13"/>
-          <p:cNvSpPr/>
-          <p:nvPr/>
-        </p:nvSpPr>
-        <p:spPr>
-          <a:xfrm>
-            <a:off x="1920240" y="2688336"/>
-            <a:ext cx="6858000" cy="274320"/>
+          <p:cNvPr id="22" name="Text 20"/>
+          <p:cNvSpPr/>
+          <p:nvPr/>
+        </p:nvSpPr>
+        <p:spPr>
+          <a:xfrm>
+            <a:off x="457200" y="4480560"/>
+            <a:ext cx="8229600" cy="274320"/>
           </a:xfrm>
           <a:prstGeom prst="rect">
             <a:avLst/>
@@ -4229,7 +4390,7 @@
                   <a:srgbClr val="8E8EA0"/>
                 </a:solidFill>
               </a:rPr>
-              <a:t>氟化工/液冷 · PE — · 阶段3→4 · ★ AI基建受益</a:t>
+              <a:t>VLCC全球老大/霍尔木兹地缘/不加仓</a:t>
             </a:r>
             <a:endParaRPr lang="en-US" sz="1100" dirty="0"/>
           </a:p>
@@ -4237,36 +4398,14 @@
       </p:sp>
       <p:sp>
         <p:nvSpPr>
-          <p:cNvPr id="16" name="Shape 14"/>
-          <p:cNvSpPr/>
-          <p:nvPr/>
-        </p:nvSpPr>
-        <p:spPr>
-          <a:xfrm>
-            <a:off x="182880" y="3090672"/>
-            <a:ext cx="8778240" cy="420624"/>
-          </a:xfrm>
-          <a:prstGeom prst="roundRect">
-            <a:avLst>
-              <a:gd name="adj" fmla="val 13043"/>
-            </a:avLst>
-          </a:prstGeom>
-          <a:solidFill>
-            <a:srgbClr val="16213E"/>
-          </a:solidFill>
-          <a:ln/>
-        </p:spPr>
-      </p:sp>
-      <p:sp>
-        <p:nvSpPr>
-          <p:cNvPr id="17" name="Text 15"/>
-          <p:cNvSpPr/>
-          <p:nvPr/>
-        </p:nvSpPr>
-        <p:spPr>
-          <a:xfrm>
-            <a:off x="365760" y="3163824"/>
-            <a:ext cx="1371600" cy="274320"/>
+          <p:cNvPr id="23" name="Text 21"/>
+          <p:cNvSpPr/>
+          <p:nvPr/>
+        </p:nvSpPr>
+        <p:spPr>
+          <a:xfrm>
+            <a:off x="5486400" y="4160520"/>
+            <a:ext cx="3200400" cy="274320"/>
           </a:xfrm>
           <a:prstGeom prst="rect">
             <a:avLst/>
@@ -4284,342 +4423,12 @@
             <a:r>
               <a:rPr lang="en-US" sz="1200" b="1" dirty="0">
                 <a:solidFill>
-                  <a:srgbClr val="4DA6FF"/>
-                </a:solidFill>
-                <a:latin typeface="Arial Black" pitchFamily="34" charset="0"/>
-                <a:ea typeface="Arial Black" pitchFamily="34" charset="-122"/>
-                <a:cs typeface="Arial Black" pitchFamily="34" charset="-120"/>
-              </a:rPr>
-              <a:t>工业富联</a:t>
+                  <a:srgbClr val="F0A040"/>
+                </a:solidFill>
+              </a:rPr>
+              <a:t>阶段:4→5</a:t>
             </a:r>
             <a:endParaRPr lang="en-US" sz="1200" dirty="0"/>
-          </a:p>
-        </p:txBody>
-      </p:sp>
-      <p:sp>
-        <p:nvSpPr>
-          <p:cNvPr id="18" name="Text 16"/>
-          <p:cNvSpPr/>
-          <p:nvPr/>
-        </p:nvSpPr>
-        <p:spPr>
-          <a:xfrm>
-            <a:off x="1920240" y="3163824"/>
-            <a:ext cx="6858000" cy="274320"/>
-          </a:xfrm>
-          <a:prstGeom prst="rect">
-            <a:avLst/>
-          </a:prstGeom>
-          <a:noFill/>
-          <a:ln/>
-        </p:spPr>
-        <p:txBody>
-          <a:bodyPr wrap="square" lIns="0" tIns="0" rIns="0" bIns="0" rtlCol="0" anchor="ctr"/>
-          <a:lstStyle/>
-          <a:p>
-            <a:pPr indent="0" marL="0">
-              <a:buNone/>
-            </a:pPr>
-            <a:r>
-              <a:rPr lang="en-US" sz="1100" dirty="0">
-                <a:solidFill>
-                  <a:srgbClr val="8E8EA0"/>
-                </a:solidFill>
-              </a:rPr>
-              <a:t>AI服务器ODM · PE — · 阶段4 · ▲ 空间收窄</a:t>
-            </a:r>
-            <a:endParaRPr lang="en-US" sz="1100" dirty="0"/>
-          </a:p>
-        </p:txBody>
-      </p:sp>
-      <p:sp>
-        <p:nvSpPr>
-          <p:cNvPr id="19" name="Shape 17"/>
-          <p:cNvSpPr/>
-          <p:nvPr/>
-        </p:nvSpPr>
-        <p:spPr>
-          <a:xfrm>
-            <a:off x="182880" y="3566160"/>
-            <a:ext cx="8778240" cy="420624"/>
-          </a:xfrm>
-          <a:prstGeom prst="roundRect">
-            <a:avLst>
-              <a:gd name="adj" fmla="val 13043"/>
-            </a:avLst>
-          </a:prstGeom>
-          <a:solidFill>
-            <a:srgbClr val="16213E"/>
-          </a:solidFill>
-          <a:ln/>
-        </p:spPr>
-      </p:sp>
-      <p:sp>
-        <p:nvSpPr>
-          <p:cNvPr id="20" name="Text 18"/>
-          <p:cNvSpPr/>
-          <p:nvPr/>
-        </p:nvSpPr>
-        <p:spPr>
-          <a:xfrm>
-            <a:off x="365760" y="3639312"/>
-            <a:ext cx="1371600" cy="274320"/>
-          </a:xfrm>
-          <a:prstGeom prst="rect">
-            <a:avLst/>
-          </a:prstGeom>
-          <a:noFill/>
-          <a:ln/>
-        </p:spPr>
-        <p:txBody>
-          <a:bodyPr wrap="square" lIns="0" tIns="0" rIns="0" bIns="0" rtlCol="0" anchor="ctr"/>
-          <a:lstStyle/>
-          <a:p>
-            <a:pPr indent="0" marL="0">
-              <a:buNone/>
-            </a:pPr>
-            <a:r>
-              <a:rPr lang="en-US" sz="1200" b="1" dirty="0">
-                <a:solidFill>
-                  <a:srgbClr val="4DA6FF"/>
-                </a:solidFill>
-                <a:latin typeface="Arial Black" pitchFamily="34" charset="0"/>
-                <a:ea typeface="Arial Black" pitchFamily="34" charset="-122"/>
-                <a:cs typeface="Arial Black" pitchFamily="34" charset="-120"/>
-              </a:rPr>
-              <a:t>立讯精密</a:t>
-            </a:r>
-            <a:endParaRPr lang="en-US" sz="1200" dirty="0"/>
-          </a:p>
-        </p:txBody>
-      </p:sp>
-      <p:sp>
-        <p:nvSpPr>
-          <p:cNvPr id="21" name="Text 19"/>
-          <p:cNvSpPr/>
-          <p:nvPr/>
-        </p:nvSpPr>
-        <p:spPr>
-          <a:xfrm>
-            <a:off x="1920240" y="3639312"/>
-            <a:ext cx="6858000" cy="274320"/>
-          </a:xfrm>
-          <a:prstGeom prst="rect">
-            <a:avLst/>
-          </a:prstGeom>
-          <a:noFill/>
-          <a:ln/>
-        </p:spPr>
-        <p:txBody>
-          <a:bodyPr wrap="square" lIns="0" tIns="0" rIns="0" bIns="0" rtlCol="0" anchor="ctr"/>
-          <a:lstStyle/>
-          <a:p>
-            <a:pPr indent="0" marL="0">
-              <a:buNone/>
-            </a:pPr>
-            <a:r>
-              <a:rPr lang="en-US" sz="1100" dirty="0">
-                <a:solidFill>
-                  <a:srgbClr val="8E8EA0"/>
-                </a:solidFill>
-              </a:rPr>
-              <a:t>消费电子+AI · PE — · 阶段3→4 · ▲ 观察</a:t>
-            </a:r>
-            <a:endParaRPr lang="en-US" sz="1100" dirty="0"/>
-          </a:p>
-        </p:txBody>
-      </p:sp>
-      <p:sp>
-        <p:nvSpPr>
-          <p:cNvPr id="22" name="Shape 20"/>
-          <p:cNvSpPr/>
-          <p:nvPr/>
-        </p:nvSpPr>
-        <p:spPr>
-          <a:xfrm>
-            <a:off x="182880" y="4041648"/>
-            <a:ext cx="8778240" cy="420624"/>
-          </a:xfrm>
-          <a:prstGeom prst="roundRect">
-            <a:avLst>
-              <a:gd name="adj" fmla="val 13043"/>
-            </a:avLst>
-          </a:prstGeom>
-          <a:solidFill>
-            <a:srgbClr val="16213E"/>
-          </a:solidFill>
-          <a:ln/>
-        </p:spPr>
-      </p:sp>
-      <p:sp>
-        <p:nvSpPr>
-          <p:cNvPr id="23" name="Text 21"/>
-          <p:cNvSpPr/>
-          <p:nvPr/>
-        </p:nvSpPr>
-        <p:spPr>
-          <a:xfrm>
-            <a:off x="365760" y="4114800"/>
-            <a:ext cx="1371600" cy="274320"/>
-          </a:xfrm>
-          <a:prstGeom prst="rect">
-            <a:avLst/>
-          </a:prstGeom>
-          <a:noFill/>
-          <a:ln/>
-        </p:spPr>
-        <p:txBody>
-          <a:bodyPr wrap="square" lIns="0" tIns="0" rIns="0" bIns="0" rtlCol="0" anchor="ctr"/>
-          <a:lstStyle/>
-          <a:p>
-            <a:pPr indent="0" marL="0">
-              <a:buNone/>
-            </a:pPr>
-            <a:r>
-              <a:rPr lang="en-US" sz="1200" b="1" dirty="0">
-                <a:solidFill>
-                  <a:srgbClr val="4DA6FF"/>
-                </a:solidFill>
-                <a:latin typeface="Arial Black" pitchFamily="34" charset="0"/>
-                <a:ea typeface="Arial Black" pitchFamily="34" charset="-122"/>
-                <a:cs typeface="Arial Black" pitchFamily="34" charset="-120"/>
-              </a:rPr>
-              <a:t>华丰科技</a:t>
-            </a:r>
-            <a:endParaRPr lang="en-US" sz="1200" dirty="0"/>
-          </a:p>
-        </p:txBody>
-      </p:sp>
-      <p:sp>
-        <p:nvSpPr>
-          <p:cNvPr id="24" name="Text 22"/>
-          <p:cNvSpPr/>
-          <p:nvPr/>
-        </p:nvSpPr>
-        <p:spPr>
-          <a:xfrm>
-            <a:off x="1920240" y="4114800"/>
-            <a:ext cx="6858000" cy="274320"/>
-          </a:xfrm>
-          <a:prstGeom prst="rect">
-            <a:avLst/>
-          </a:prstGeom>
-          <a:noFill/>
-          <a:ln/>
-        </p:spPr>
-        <p:txBody>
-          <a:bodyPr wrap="square" lIns="0" tIns="0" rIns="0" bIns="0" rtlCol="0" anchor="ctr"/>
-          <a:lstStyle/>
-          <a:p>
-            <a:pPr indent="0" marL="0">
-              <a:buNone/>
-            </a:pPr>
-            <a:r>
-              <a:rPr lang="en-US" sz="1100" dirty="0">
-                <a:solidFill>
-                  <a:srgbClr val="8E8EA0"/>
-                </a:solidFill>
-              </a:rPr>
-              <a:t>电连接器 · PE — · 阶段3 · ▲ 卡位独特</a:t>
-            </a:r>
-            <a:endParaRPr lang="en-US" sz="1100" dirty="0"/>
-          </a:p>
-        </p:txBody>
-      </p:sp>
-      <p:sp>
-        <p:nvSpPr>
-          <p:cNvPr id="25" name="Shape 23"/>
-          <p:cNvSpPr/>
-          <p:nvPr/>
-        </p:nvSpPr>
-        <p:spPr>
-          <a:xfrm>
-            <a:off x="182880" y="4517136"/>
-            <a:ext cx="8778240" cy="420624"/>
-          </a:xfrm>
-          <a:prstGeom prst="roundRect">
-            <a:avLst>
-              <a:gd name="adj" fmla="val 13043"/>
-            </a:avLst>
-          </a:prstGeom>
-          <a:solidFill>
-            <a:srgbClr val="16213E"/>
-          </a:solidFill>
-          <a:ln/>
-        </p:spPr>
-      </p:sp>
-      <p:sp>
-        <p:nvSpPr>
-          <p:cNvPr id="26" name="Text 24"/>
-          <p:cNvSpPr/>
-          <p:nvPr/>
-        </p:nvSpPr>
-        <p:spPr>
-          <a:xfrm>
-            <a:off x="365760" y="4590288"/>
-            <a:ext cx="1371600" cy="274320"/>
-          </a:xfrm>
-          <a:prstGeom prst="rect">
-            <a:avLst/>
-          </a:prstGeom>
-          <a:noFill/>
-          <a:ln/>
-        </p:spPr>
-        <p:txBody>
-          <a:bodyPr wrap="square" lIns="0" tIns="0" rIns="0" bIns="0" rtlCol="0" anchor="ctr"/>
-          <a:lstStyle/>
-          <a:p>
-            <a:pPr indent="0" marL="0">
-              <a:buNone/>
-            </a:pPr>
-            <a:r>
-              <a:rPr lang="en-US" sz="1200" b="1" dirty="0">
-                <a:solidFill>
-                  <a:srgbClr val="4DA6FF"/>
-                </a:solidFill>
-                <a:latin typeface="Arial Black" pitchFamily="34" charset="0"/>
-                <a:ea typeface="Arial Black" pitchFamily="34" charset="-122"/>
-                <a:cs typeface="Arial Black" pitchFamily="34" charset="-120"/>
-              </a:rPr>
-              <a:t>中远海能</a:t>
-            </a:r>
-            <a:endParaRPr lang="en-US" sz="1200" dirty="0"/>
-          </a:p>
-        </p:txBody>
-      </p:sp>
-      <p:sp>
-        <p:nvSpPr>
-          <p:cNvPr id="27" name="Text 25"/>
-          <p:cNvSpPr/>
-          <p:nvPr/>
-        </p:nvSpPr>
-        <p:spPr>
-          <a:xfrm>
-            <a:off x="1920240" y="4590288"/>
-            <a:ext cx="6858000" cy="274320"/>
-          </a:xfrm>
-          <a:prstGeom prst="rect">
-            <a:avLst/>
-          </a:prstGeom>
-          <a:noFill/>
-          <a:ln/>
-        </p:spPr>
-        <p:txBody>
-          <a:bodyPr wrap="square" lIns="0" tIns="0" rIns="0" bIns="0" rtlCol="0" anchor="ctr"/>
-          <a:lstStyle/>
-          <a:p>
-            <a:pPr indent="0" marL="0">
-              <a:buNone/>
-            </a:pPr>
-            <a:r>
-              <a:rPr lang="en-US" sz="1100" dirty="0">
-                <a:solidFill>
-                  <a:srgbClr val="8E8EA0"/>
-                </a:solidFill>
-              </a:rPr>
-              <a:t>VLCC全球#1 · PE 10x PE · 阶段4→5 · ◆ 警惕陷阱</a:t>
-            </a:r>
-            <a:endParaRPr lang="en-US" sz="1100" dirty="0"/>
           </a:p>
         </p:txBody>
       </p:sp>
@@ -4723,11 +4532,11 @@
         <p:spPr>
           <a:xfrm>
             <a:off x="274320" y="1188720"/>
-            <a:ext cx="8595360" cy="640080"/>
+            <a:ext cx="8595360" cy="594360"/>
           </a:xfrm>
           <a:prstGeom prst="roundRect">
             <a:avLst>
-              <a:gd name="adj" fmla="val 11429"/>
+              <a:gd name="adj" fmla="val 12308"/>
             </a:avLst>
           </a:prstGeom>
           <a:solidFill>
@@ -4749,24 +4558,24 @@
         </p:nvSpPr>
         <p:spPr>
           <a:xfrm>
-            <a:off x="457200" y="1280160"/>
-            <a:ext cx="3200400" cy="228600"/>
-          </a:xfrm>
-          <a:prstGeom prst="rect">
-            <a:avLst/>
-          </a:prstGeom>
-          <a:noFill/>
-          <a:ln/>
-        </p:spPr>
-        <p:txBody>
-          <a:bodyPr wrap="square" lIns="0" tIns="0" rIns="0" bIns="0" rtlCol="0" anchor="ctr"/>
-          <a:lstStyle/>
-          <a:p>
-            <a:pPr indent="0" marL="0">
-              <a:buNone/>
-            </a:pPr>
-            <a:r>
-              <a:rPr lang="en-US" sz="1400" b="1" dirty="0">
+            <a:off x="457200" y="1261872"/>
+            <a:ext cx="2743200" cy="228600"/>
+          </a:xfrm>
+          <a:prstGeom prst="rect">
+            <a:avLst/>
+          </a:prstGeom>
+          <a:noFill/>
+          <a:ln/>
+        </p:spPr>
+        <p:txBody>
+          <a:bodyPr wrap="square" lIns="0" tIns="0" rIns="0" bIns="0" rtlCol="0" anchor="ctr"/>
+          <a:lstStyle/>
+          <a:p>
+            <a:pPr indent="0" marL="0">
+              <a:buNone/>
+            </a:pPr>
+            <a:r>
+              <a:rPr lang="en-US" sz="1300" b="1" dirty="0">
                 <a:solidFill>
                   <a:srgbClr val="3DD68C"/>
                 </a:solidFill>
@@ -4774,9 +4583,9 @@
                 <a:ea typeface="Arial Black" pitchFamily="34" charset="-122"/>
                 <a:cs typeface="Arial Black" pitchFamily="34" charset="-120"/>
               </a:rPr>
-              <a:t>3→4 业绩驱动</a:t>
-            </a:r>
-            <a:endParaRPr lang="en-US" sz="1400" dirty="0"/>
+              <a:t>3→4 业绩兑现</a:t>
+            </a:r>
+            <a:endParaRPr lang="en-US" sz="1300" dirty="0"/>
           </a:p>
         </p:txBody>
       </p:sp>
@@ -4788,31 +4597,31 @@
         </p:nvSpPr>
         <p:spPr>
           <a:xfrm>
-            <a:off x="4114800" y="1325880"/>
-            <a:ext cx="914400" cy="228600"/>
-          </a:xfrm>
-          <a:prstGeom prst="rect">
-            <a:avLst/>
-          </a:prstGeom>
-          <a:noFill/>
-          <a:ln/>
-        </p:spPr>
-        <p:txBody>
-          <a:bodyPr wrap="square" lIns="0" tIns="0" rIns="0" bIns="0" rtlCol="0" anchor="ctr"/>
-          <a:lstStyle/>
-          <a:p>
-            <a:pPr indent="0" marL="0">
-              <a:buNone/>
-            </a:pPr>
-            <a:r>
-              <a:rPr lang="en-US" sz="1600" b="1" dirty="0">
+            <a:off x="3200400" y="1280160"/>
+            <a:ext cx="731520" cy="228600"/>
+          </a:xfrm>
+          <a:prstGeom prst="rect">
+            <a:avLst/>
+          </a:prstGeom>
+          <a:noFill/>
+          <a:ln/>
+        </p:spPr>
+        <p:txBody>
+          <a:bodyPr wrap="square" lIns="0" tIns="0" rIns="0" bIns="0" rtlCol="0" anchor="ctr"/>
+          <a:lstStyle/>
+          <a:p>
+            <a:pPr indent="0" marL="0">
+              <a:buNone/>
+            </a:pPr>
+            <a:r>
+              <a:rPr lang="en-US" sz="1500" b="1" dirty="0">
                 <a:solidFill>
                   <a:srgbClr val="E4E4E8"/>
                 </a:solidFill>
               </a:rPr>
-              <a:t>13只</a:t>
-            </a:r>
-            <a:endParaRPr lang="en-US" sz="1600" dirty="0"/>
+              <a:t>5只</a:t>
+            </a:r>
+            <a:endParaRPr lang="en-US" sz="1500" dirty="0"/>
           </a:p>
         </p:txBody>
       </p:sp>
@@ -4824,8 +4633,8 @@
         </p:nvSpPr>
         <p:spPr>
           <a:xfrm>
-            <a:off x="457200" y="1536192"/>
-            <a:ext cx="7315200" cy="228600"/>
+            <a:off x="4114800" y="1298448"/>
+            <a:ext cx="4572000" cy="228600"/>
           </a:xfrm>
           <a:prstGeom prst="rect">
             <a:avLst/>
@@ -4846,7 +4655,7 @@
                   <a:srgbClr val="8E8EA0"/>
                 </a:solidFill>
               </a:rPr>
-              <a:t>汇绿/澜起等 | 主仓位集中于此</a:t>
+              <a:t>澜起/汇绿/兴森/锡业/胜宏/立讯/工业富联</a:t>
             </a:r>
             <a:endParaRPr lang="en-US" sz="1100" dirty="0"/>
           </a:p>
@@ -4860,12 +4669,12 @@
         </p:nvSpPr>
         <p:spPr>
           <a:xfrm>
-            <a:off x="274320" y="1965960"/>
-            <a:ext cx="8595360" cy="640080"/>
+            <a:off x="274320" y="1901952"/>
+            <a:ext cx="8595360" cy="594360"/>
           </a:xfrm>
           <a:prstGeom prst="roundRect">
             <a:avLst>
-              <a:gd name="adj" fmla="val 11429"/>
+              <a:gd name="adj" fmla="val 12308"/>
             </a:avLst>
           </a:prstGeom>
           <a:solidFill>
@@ -4887,24 +4696,24 @@
         </p:nvSpPr>
         <p:spPr>
           <a:xfrm>
-            <a:off x="457200" y="2057400"/>
-            <a:ext cx="3200400" cy="228600"/>
-          </a:xfrm>
-          <a:prstGeom prst="rect">
-            <a:avLst/>
-          </a:prstGeom>
-          <a:noFill/>
-          <a:ln/>
-        </p:spPr>
-        <p:txBody>
-          <a:bodyPr wrap="square" lIns="0" tIns="0" rIns="0" bIns="0" rtlCol="0" anchor="ctr"/>
-          <a:lstStyle/>
-          <a:p>
-            <a:pPr indent="0" marL="0">
-              <a:buNone/>
-            </a:pPr>
-            <a:r>
-              <a:rPr lang="en-US" sz="1400" b="1" dirty="0">
+            <a:off x="457200" y="1975104"/>
+            <a:ext cx="2743200" cy="228600"/>
+          </a:xfrm>
+          <a:prstGeom prst="rect">
+            <a:avLst/>
+          </a:prstGeom>
+          <a:noFill/>
+          <a:ln/>
+        </p:spPr>
+        <p:txBody>
+          <a:bodyPr wrap="square" lIns="0" tIns="0" rIns="0" bIns="0" rtlCol="0" anchor="ctr"/>
+          <a:lstStyle/>
+          <a:p>
+            <a:pPr indent="0" marL="0">
+              <a:buNone/>
+            </a:pPr>
+            <a:r>
+              <a:rPr lang="en-US" sz="1300" b="1" dirty="0">
                 <a:solidFill>
                   <a:srgbClr val="F0A040"/>
                 </a:solidFill>
@@ -4914,7 +4723,7 @@
               </a:rPr>
               <a:t>2→3 供应链形成</a:t>
             </a:r>
-            <a:endParaRPr lang="en-US" sz="1400" dirty="0"/>
+            <a:endParaRPr lang="en-US" sz="1300" dirty="0"/>
           </a:p>
         </p:txBody>
       </p:sp>
@@ -4926,31 +4735,31 @@
         </p:nvSpPr>
         <p:spPr>
           <a:xfrm>
-            <a:off x="4114800" y="2103120"/>
-            <a:ext cx="914400" cy="228600"/>
-          </a:xfrm>
-          <a:prstGeom prst="rect">
-            <a:avLst/>
-          </a:prstGeom>
-          <a:noFill/>
-          <a:ln/>
-        </p:spPr>
-        <p:txBody>
-          <a:bodyPr wrap="square" lIns="0" tIns="0" rIns="0" bIns="0" rtlCol="0" anchor="ctr"/>
-          <a:lstStyle/>
-          <a:p>
-            <a:pPr indent="0" marL="0">
-              <a:buNone/>
-            </a:pPr>
-            <a:r>
-              <a:rPr lang="en-US" sz="1600" b="1" dirty="0">
+            <a:off x="3200400" y="1993392"/>
+            <a:ext cx="731520" cy="228600"/>
+          </a:xfrm>
+          <a:prstGeom prst="rect">
+            <a:avLst/>
+          </a:prstGeom>
+          <a:noFill/>
+          <a:ln/>
+        </p:spPr>
+        <p:txBody>
+          <a:bodyPr wrap="square" lIns="0" tIns="0" rIns="0" bIns="0" rtlCol="0" anchor="ctr"/>
+          <a:lstStyle/>
+          <a:p>
+            <a:pPr indent="0" marL="0">
+              <a:buNone/>
+            </a:pPr>
+            <a:r>
+              <a:rPr lang="en-US" sz="1500" b="1" dirty="0">
                 <a:solidFill>
                   <a:srgbClr val="E4E4E8"/>
                 </a:solidFill>
               </a:rPr>
-              <a:t>5只</a:t>
-            </a:r>
-            <a:endParaRPr lang="en-US" sz="1600" dirty="0"/>
+              <a:t>4只</a:t>
+            </a:r>
+            <a:endParaRPr lang="en-US" sz="1500" dirty="0"/>
           </a:p>
         </p:txBody>
       </p:sp>
@@ -4962,8 +4771,8 @@
         </p:nvSpPr>
         <p:spPr>
           <a:xfrm>
-            <a:off x="457200" y="2313432"/>
-            <a:ext cx="7315200" cy="228600"/>
+            <a:off x="4114800" y="2011680"/>
+            <a:ext cx="4572000" cy="228600"/>
           </a:xfrm>
           <a:prstGeom prst="rect">
             <a:avLst/>
@@ -4984,7 +4793,7 @@
                   <a:srgbClr val="8E8EA0"/>
                 </a:solidFill>
               </a:rPr>
-              <a:t>三祥/星环等 | 轻仓等拐点</a:t>
+              <a:t>罗博/三祥/星环/华丰</a:t>
             </a:r>
             <a:endParaRPr lang="en-US" sz="1100" dirty="0"/>
           </a:p>
@@ -4998,12 +4807,150 @@
         </p:nvSpPr>
         <p:spPr>
           <a:xfrm>
-            <a:off x="274320" y="2743200"/>
-            <a:ext cx="8595360" cy="640080"/>
+            <a:off x="274320" y="2615184"/>
+            <a:ext cx="8595360" cy="594360"/>
           </a:xfrm>
           <a:prstGeom prst="roundRect">
             <a:avLst>
-              <a:gd name="adj" fmla="val 11429"/>
+              <a:gd name="adj" fmla="val 12308"/>
+            </a:avLst>
+          </a:prstGeom>
+          <a:solidFill>
+            <a:srgbClr val="16213E"/>
+          </a:solidFill>
+          <a:ln w="12700">
+            <a:solidFill>
+              <a:srgbClr val="000000"/>
+            </a:solidFill>
+            <a:prstDash val="solid"/>
+          </a:ln>
+        </p:spPr>
+      </p:sp>
+      <p:sp>
+        <p:nvSpPr>
+          <p:cNvPr id="13" name="Text 11"/>
+          <p:cNvSpPr/>
+          <p:nvPr/>
+        </p:nvSpPr>
+        <p:spPr>
+          <a:xfrm>
+            <a:off x="457200" y="2688336"/>
+            <a:ext cx="2743200" cy="228600"/>
+          </a:xfrm>
+          <a:prstGeom prst="rect">
+            <a:avLst/>
+          </a:prstGeom>
+          <a:noFill/>
+          <a:ln/>
+        </p:spPr>
+        <p:txBody>
+          <a:bodyPr wrap="square" lIns="0" tIns="0" rIns="0" bIns="0" rtlCol="0" anchor="ctr"/>
+          <a:lstStyle/>
+          <a:p>
+            <a:pPr indent="0" marL="0">
+              <a:buNone/>
+            </a:pPr>
+            <a:r>
+              <a:rPr lang="en-US" sz="1300" b="1" dirty="0">
+                <a:solidFill>
+                  <a:srgbClr val="000000"/>
+                </a:solidFill>
+                <a:latin typeface="Arial Black" pitchFamily="34" charset="0"/>
+                <a:ea typeface="Arial Black" pitchFamily="34" charset="-122"/>
+                <a:cs typeface="Arial Black" pitchFamily="34" charset="-120"/>
+              </a:rPr>
+              <a:t>4 业绩兑现</a:t>
+            </a:r>
+            <a:endParaRPr lang="en-US" sz="1300" dirty="0"/>
+          </a:p>
+        </p:txBody>
+      </p:sp>
+      <p:sp>
+        <p:nvSpPr>
+          <p:cNvPr id="14" name="Text 12"/>
+          <p:cNvSpPr/>
+          <p:nvPr/>
+        </p:nvSpPr>
+        <p:spPr>
+          <a:xfrm>
+            <a:off x="3200400" y="2706624"/>
+            <a:ext cx="731520" cy="228600"/>
+          </a:xfrm>
+          <a:prstGeom prst="rect">
+            <a:avLst/>
+          </a:prstGeom>
+          <a:noFill/>
+          <a:ln/>
+        </p:spPr>
+        <p:txBody>
+          <a:bodyPr wrap="square" lIns="0" tIns="0" rIns="0" bIns="0" rtlCol="0" anchor="ctr"/>
+          <a:lstStyle/>
+          <a:p>
+            <a:pPr indent="0" marL="0">
+              <a:buNone/>
+            </a:pPr>
+            <a:r>
+              <a:rPr lang="en-US" sz="1500" b="1" dirty="0">
+                <a:solidFill>
+                  <a:srgbClr val="E4E4E8"/>
+                </a:solidFill>
+              </a:rPr>
+              <a:t>2只</a:t>
+            </a:r>
+            <a:endParaRPr lang="en-US" sz="1500" dirty="0"/>
+          </a:p>
+        </p:txBody>
+      </p:sp>
+      <p:sp>
+        <p:nvSpPr>
+          <p:cNvPr id="15" name="Text 13"/>
+          <p:cNvSpPr/>
+          <p:nvPr/>
+        </p:nvSpPr>
+        <p:spPr>
+          <a:xfrm>
+            <a:off x="4114800" y="2724912"/>
+            <a:ext cx="4572000" cy="228600"/>
+          </a:xfrm>
+          <a:prstGeom prst="rect">
+            <a:avLst/>
+          </a:prstGeom>
+          <a:noFill/>
+          <a:ln/>
+        </p:spPr>
+        <p:txBody>
+          <a:bodyPr wrap="square" lIns="0" tIns="0" rIns="0" bIns="0" rtlCol="0" anchor="ctr"/>
+          <a:lstStyle/>
+          <a:p>
+            <a:pPr indent="0" marL="0">
+              <a:buNone/>
+            </a:pPr>
+            <a:r>
+              <a:rPr lang="en-US" sz="1100" dirty="0">
+                <a:solidFill>
+                  <a:srgbClr val="8E8EA0"/>
+                </a:solidFill>
+              </a:rPr>
+              <a:t>软通/中际旭创</a:t>
+            </a:r>
+            <a:endParaRPr lang="en-US" sz="1100" dirty="0"/>
+          </a:p>
+        </p:txBody>
+      </p:sp>
+      <p:sp>
+        <p:nvSpPr>
+          <p:cNvPr id="16" name="Shape 14"/>
+          <p:cNvSpPr/>
+          <p:nvPr/>
+        </p:nvSpPr>
+        <p:spPr>
+          <a:xfrm>
+            <a:off x="274320" y="3328416"/>
+            <a:ext cx="8595360" cy="594360"/>
+          </a:xfrm>
+          <a:prstGeom prst="roundRect">
+            <a:avLst>
+              <a:gd name="adj" fmla="val 12308"/>
             </a:avLst>
           </a:prstGeom>
           <a:solidFill>
@@ -5019,30 +4966,30 @@
       </p:sp>
       <p:sp>
         <p:nvSpPr>
-          <p:cNvPr id="13" name="Text 11"/>
-          <p:cNvSpPr/>
-          <p:nvPr/>
-        </p:nvSpPr>
-        <p:spPr>
-          <a:xfrm>
-            <a:off x="457200" y="2834640"/>
-            <a:ext cx="3200400" cy="228600"/>
-          </a:xfrm>
-          <a:prstGeom prst="rect">
-            <a:avLst/>
-          </a:prstGeom>
-          <a:noFill/>
-          <a:ln/>
-        </p:spPr>
-        <p:txBody>
-          <a:bodyPr wrap="square" lIns="0" tIns="0" rIns="0" bIns="0" rtlCol="0" anchor="ctr"/>
-          <a:lstStyle/>
-          <a:p>
-            <a:pPr indent="0" marL="0">
-              <a:buNone/>
-            </a:pPr>
-            <a:r>
-              <a:rPr lang="en-US" sz="1400" b="1" dirty="0">
+          <p:cNvPr id="17" name="Text 15"/>
+          <p:cNvSpPr/>
+          <p:nvPr/>
+        </p:nvSpPr>
+        <p:spPr>
+          <a:xfrm>
+            <a:off x="457200" y="3401568"/>
+            <a:ext cx="2743200" cy="228600"/>
+          </a:xfrm>
+          <a:prstGeom prst="rect">
+            <a:avLst/>
+          </a:prstGeom>
+          <a:noFill/>
+          <a:ln/>
+        </p:spPr>
+        <p:txBody>
+          <a:bodyPr wrap="square" lIns="0" tIns="0" rIns="0" bIns="0" rtlCol="0" anchor="ctr"/>
+          <a:lstStyle/>
+          <a:p>
+            <a:pPr indent="0" marL="0">
+              <a:buNone/>
+            </a:pPr>
+            <a:r>
+              <a:rPr lang="en-US" sz="1300" b="1" dirty="0">
                 <a:solidFill>
                   <a:srgbClr val="FF5656"/>
                 </a:solidFill>
@@ -5052,56 +4999,56 @@
               </a:rPr>
               <a:t>4→5 成熟/周期</a:t>
             </a:r>
-            <a:endParaRPr lang="en-US" sz="1400" dirty="0"/>
-          </a:p>
-        </p:txBody>
-      </p:sp>
-      <p:sp>
-        <p:nvSpPr>
-          <p:cNvPr id="14" name="Text 12"/>
-          <p:cNvSpPr/>
-          <p:nvPr/>
-        </p:nvSpPr>
-        <p:spPr>
-          <a:xfrm>
-            <a:off x="4114800" y="2880360"/>
-            <a:ext cx="914400" cy="228600"/>
-          </a:xfrm>
-          <a:prstGeom prst="rect">
-            <a:avLst/>
-          </a:prstGeom>
-          <a:noFill/>
-          <a:ln/>
-        </p:spPr>
-        <p:txBody>
-          <a:bodyPr wrap="square" lIns="0" tIns="0" rIns="0" bIns="0" rtlCol="0" anchor="ctr"/>
-          <a:lstStyle/>
-          <a:p>
-            <a:pPr indent="0" marL="0">
-              <a:buNone/>
-            </a:pPr>
-            <a:r>
-              <a:rPr lang="en-US" sz="1600" b="1" dirty="0">
+            <a:endParaRPr lang="en-US" sz="1300" dirty="0"/>
+          </a:p>
+        </p:txBody>
+      </p:sp>
+      <p:sp>
+        <p:nvSpPr>
+          <p:cNvPr id="18" name="Text 16"/>
+          <p:cNvSpPr/>
+          <p:nvPr/>
+        </p:nvSpPr>
+        <p:spPr>
+          <a:xfrm>
+            <a:off x="3200400" y="3419856"/>
+            <a:ext cx="731520" cy="228600"/>
+          </a:xfrm>
+          <a:prstGeom prst="rect">
+            <a:avLst/>
+          </a:prstGeom>
+          <a:noFill/>
+          <a:ln/>
+        </p:spPr>
+        <p:txBody>
+          <a:bodyPr wrap="square" lIns="0" tIns="0" rIns="0" bIns="0" rtlCol="0" anchor="ctr"/>
+          <a:lstStyle/>
+          <a:p>
+            <a:pPr indent="0" marL="0">
+              <a:buNone/>
+            </a:pPr>
+            <a:r>
+              <a:rPr lang="en-US" sz="1500" b="1" dirty="0">
                 <a:solidFill>
                   <a:srgbClr val="E4E4E8"/>
                 </a:solidFill>
               </a:rPr>
-              <a:t>2只</a:t>
-            </a:r>
-            <a:endParaRPr lang="en-US" sz="1600" dirty="0"/>
-          </a:p>
-        </p:txBody>
-      </p:sp>
-      <p:sp>
-        <p:nvSpPr>
-          <p:cNvPr id="15" name="Text 13"/>
-          <p:cNvSpPr/>
-          <p:nvPr/>
-        </p:nvSpPr>
-        <p:spPr>
-          <a:xfrm>
-            <a:off x="457200" y="3090672"/>
-            <a:ext cx="7315200" cy="228600"/>
+              <a:t>1只</a:t>
+            </a:r>
+            <a:endParaRPr lang="en-US" sz="1500" dirty="0"/>
+          </a:p>
+        </p:txBody>
+      </p:sp>
+      <p:sp>
+        <p:nvSpPr>
+          <p:cNvPr id="19" name="Text 17"/>
+          <p:cNvSpPr/>
+          <p:nvPr/>
+        </p:nvSpPr>
+        <p:spPr>
+          <a:xfrm>
+            <a:off x="4114800" y="3438144"/>
+            <a:ext cx="4572000" cy="228600"/>
           </a:xfrm>
           <a:prstGeom prst="rect">
             <a:avLst/>
@@ -5122,7 +5069,7 @@
                   <a:srgbClr val="8E8EA0"/>
                 </a:solidFill>
               </a:rPr>
-              <a:t>中远海能等 | 警惕估值陷阱</a:t>
+              <a:t>中远海能</a:t>
             </a:r>
             <a:endParaRPr lang="en-US" sz="1100" dirty="0"/>
           </a:p>
@@ -5130,18 +5077,18 @@
       </p:sp>
       <p:sp>
         <p:nvSpPr>
-          <p:cNvPr id="16" name="Shape 14"/>
-          <p:cNvSpPr/>
-          <p:nvPr/>
-        </p:nvSpPr>
-        <p:spPr>
-          <a:xfrm>
-            <a:off x="274320" y="3520440"/>
-            <a:ext cx="8595360" cy="640080"/>
+          <p:cNvPr id="20" name="Shape 18"/>
+          <p:cNvSpPr/>
+          <p:nvPr/>
+        </p:nvSpPr>
+        <p:spPr>
+          <a:xfrm>
+            <a:off x="274320" y="4041648"/>
+            <a:ext cx="8595360" cy="594360"/>
           </a:xfrm>
           <a:prstGeom prst="roundRect">
             <a:avLst>
-              <a:gd name="adj" fmla="val 11429"/>
+              <a:gd name="adj" fmla="val 12308"/>
             </a:avLst>
           </a:prstGeom>
           <a:solidFill>
@@ -5157,30 +5104,30 @@
       </p:sp>
       <p:sp>
         <p:nvSpPr>
-          <p:cNvPr id="17" name="Text 15"/>
-          <p:cNvSpPr/>
-          <p:nvPr/>
-        </p:nvSpPr>
-        <p:spPr>
-          <a:xfrm>
-            <a:off x="457200" y="3611880"/>
-            <a:ext cx="3200400" cy="228600"/>
-          </a:xfrm>
-          <a:prstGeom prst="rect">
-            <a:avLst/>
-          </a:prstGeom>
-          <a:noFill/>
-          <a:ln/>
-        </p:spPr>
-        <p:txBody>
-          <a:bodyPr wrap="square" lIns="0" tIns="0" rIns="0" bIns="0" rtlCol="0" anchor="ctr"/>
-          <a:lstStyle/>
-          <a:p>
-            <a:pPr indent="0" marL="0">
-              <a:buNone/>
-            </a:pPr>
-            <a:r>
-              <a:rPr lang="en-US" sz="1400" b="1" dirty="0">
+          <p:cNvPr id="21" name="Text 19"/>
+          <p:cNvSpPr/>
+          <p:nvPr/>
+        </p:nvSpPr>
+        <p:spPr>
+          <a:xfrm>
+            <a:off x="457200" y="4114800"/>
+            <a:ext cx="2743200" cy="228600"/>
+          </a:xfrm>
+          <a:prstGeom prst="rect">
+            <a:avLst/>
+          </a:prstGeom>
+          <a:noFill/>
+          <a:ln/>
+        </p:spPr>
+        <p:txBody>
+          <a:bodyPr wrap="square" lIns="0" tIns="0" rIns="0" bIns="0" rtlCol="0" anchor="ctr"/>
+          <a:lstStyle/>
+          <a:p>
+            <a:pPr indent="0" marL="0">
+              <a:buNone/>
+            </a:pPr>
+            <a:r>
+              <a:rPr lang="en-US" sz="1300" b="1" dirty="0">
                 <a:solidFill>
                   <a:srgbClr val="4DA6FF"/>
                 </a:solidFill>
@@ -5190,56 +5137,56 @@
               </a:rPr>
               <a:t>阶段5 防御</a:t>
             </a:r>
-            <a:endParaRPr lang="en-US" sz="1400" dirty="0"/>
-          </a:p>
-        </p:txBody>
-      </p:sp>
-      <p:sp>
-        <p:nvSpPr>
-          <p:cNvPr id="18" name="Text 16"/>
-          <p:cNvSpPr/>
-          <p:nvPr/>
-        </p:nvSpPr>
-        <p:spPr>
-          <a:xfrm>
-            <a:off x="4114800" y="3657600"/>
-            <a:ext cx="914400" cy="228600"/>
-          </a:xfrm>
-          <a:prstGeom prst="rect">
-            <a:avLst/>
-          </a:prstGeom>
-          <a:noFill/>
-          <a:ln/>
-        </p:spPr>
-        <p:txBody>
-          <a:bodyPr wrap="square" lIns="0" tIns="0" rIns="0" bIns="0" rtlCol="0" anchor="ctr"/>
-          <a:lstStyle/>
-          <a:p>
-            <a:pPr indent="0" marL="0">
-              <a:buNone/>
-            </a:pPr>
-            <a:r>
-              <a:rPr lang="en-US" sz="1600" b="1" dirty="0">
+            <a:endParaRPr lang="en-US" sz="1300" dirty="0"/>
+          </a:p>
+        </p:txBody>
+      </p:sp>
+      <p:sp>
+        <p:nvSpPr>
+          <p:cNvPr id="22" name="Text 20"/>
+          <p:cNvSpPr/>
+          <p:nvPr/>
+        </p:nvSpPr>
+        <p:spPr>
+          <a:xfrm>
+            <a:off x="3200400" y="4133088"/>
+            <a:ext cx="731520" cy="228600"/>
+          </a:xfrm>
+          <a:prstGeom prst="rect">
+            <a:avLst/>
+          </a:prstGeom>
+          <a:noFill/>
+          <a:ln/>
+        </p:spPr>
+        <p:txBody>
+          <a:bodyPr wrap="square" lIns="0" tIns="0" rIns="0" bIns="0" rtlCol="0" anchor="ctr"/>
+          <a:lstStyle/>
+          <a:p>
+            <a:pPr indent="0" marL="0">
+              <a:buNone/>
+            </a:pPr>
+            <a:r>
+              <a:rPr lang="en-US" sz="1500" b="1" dirty="0">
                 <a:solidFill>
                   <a:srgbClr val="E4E4E8"/>
                 </a:solidFill>
               </a:rPr>
-              <a:t>6只</a:t>
-            </a:r>
-            <a:endParaRPr lang="en-US" sz="1600" dirty="0"/>
-          </a:p>
-        </p:txBody>
-      </p:sp>
-      <p:sp>
-        <p:nvSpPr>
-          <p:cNvPr id="19" name="Text 17"/>
-          <p:cNvSpPr/>
-          <p:nvPr/>
-        </p:nvSpPr>
-        <p:spPr>
-          <a:xfrm>
-            <a:off x="457200" y="3867912"/>
-            <a:ext cx="7315200" cy="228600"/>
+              <a:t>4只</a:t>
+            </a:r>
+            <a:endParaRPr lang="en-US" sz="1500" dirty="0"/>
+          </a:p>
+        </p:txBody>
+      </p:sp>
+      <p:sp>
+        <p:nvSpPr>
+          <p:cNvPr id="23" name="Text 21"/>
+          <p:cNvSpPr/>
+          <p:nvPr/>
+        </p:nvSpPr>
+        <p:spPr>
+          <a:xfrm>
+            <a:off x="4114800" y="4151376"/>
+            <a:ext cx="4572000" cy="228600"/>
           </a:xfrm>
           <a:prstGeom prst="rect">
             <a:avLst/>
@@ -5260,7 +5207,7 @@
                   <a:srgbClr val="8E8EA0"/>
                 </a:solidFill>
               </a:rPr>
-              <a:t>泰和/太钢等 | 组合减震</a:t>
+              <a:t>泰和/华峰/太钢/德展</a:t>
             </a:r>
             <a:endParaRPr lang="en-US" sz="1100" dirty="0"/>
           </a:p>
@@ -5268,18 +5215,18 @@
       </p:sp>
       <p:sp>
         <p:nvSpPr>
-          <p:cNvPr id="20" name="Shape 18"/>
-          <p:cNvSpPr/>
-          <p:nvPr/>
-        </p:nvSpPr>
-        <p:spPr>
-          <a:xfrm>
-            <a:off x="274320" y="4297680"/>
-            <a:ext cx="8595360" cy="640080"/>
+          <p:cNvPr id="24" name="Shape 22"/>
+          <p:cNvSpPr/>
+          <p:nvPr/>
+        </p:nvSpPr>
+        <p:spPr>
+          <a:xfrm>
+            <a:off x="274320" y="4754880"/>
+            <a:ext cx="8595360" cy="594360"/>
           </a:xfrm>
           <a:prstGeom prst="roundRect">
             <a:avLst>
-              <a:gd name="adj" fmla="val 11429"/>
+              <a:gd name="adj" fmla="val 12308"/>
             </a:avLst>
           </a:prstGeom>
           <a:solidFill>
@@ -5295,30 +5242,30 @@
       </p:sp>
       <p:sp>
         <p:nvSpPr>
-          <p:cNvPr id="21" name="Text 19"/>
-          <p:cNvSpPr/>
-          <p:nvPr/>
-        </p:nvSpPr>
-        <p:spPr>
-          <a:xfrm>
-            <a:off x="457200" y="4389120"/>
-            <a:ext cx="3200400" cy="228600"/>
-          </a:xfrm>
-          <a:prstGeom prst="rect">
-            <a:avLst/>
-          </a:prstGeom>
-          <a:noFill/>
-          <a:ln/>
-        </p:spPr>
-        <p:txBody>
-          <a:bodyPr wrap="square" lIns="0" tIns="0" rIns="0" bIns="0" rtlCol="0" anchor="ctr"/>
-          <a:lstStyle/>
-          <a:p>
-            <a:pPr indent="0" marL="0">
-              <a:buNone/>
-            </a:pPr>
-            <a:r>
-              <a:rPr lang="en-US" sz="1400" b="1" dirty="0">
+          <p:cNvPr id="25" name="Text 23"/>
+          <p:cNvSpPr/>
+          <p:nvPr/>
+        </p:nvSpPr>
+        <p:spPr>
+          <a:xfrm>
+            <a:off x="457200" y="4828032"/>
+            <a:ext cx="2743200" cy="228600"/>
+          </a:xfrm>
+          <a:prstGeom prst="rect">
+            <a:avLst/>
+          </a:prstGeom>
+          <a:noFill/>
+          <a:ln/>
+        </p:spPr>
+        <p:txBody>
+          <a:bodyPr wrap="square" lIns="0" tIns="0" rIns="0" bIns="0" rtlCol="0" anchor="ctr"/>
+          <a:lstStyle/>
+          <a:p>
+            <a:pPr indent="0" marL="0">
+              <a:buNone/>
+            </a:pPr>
+            <a:r>
+              <a:rPr lang="en-US" sz="1300" b="1" dirty="0">
                 <a:solidFill>
                   <a:srgbClr val="8E8EA0"/>
                 </a:solidFill>
@@ -5328,79 +5275,118 @@
               </a:rPr>
               <a:t>1→2 概念</a:t>
             </a:r>
+            <a:endParaRPr lang="en-US" sz="1300" dirty="0"/>
+          </a:p>
+        </p:txBody>
+      </p:sp>
+      <p:sp>
+        <p:nvSpPr>
+          <p:cNvPr id="26" name="Text 24"/>
+          <p:cNvSpPr/>
+          <p:nvPr/>
+        </p:nvSpPr>
+        <p:spPr>
+          <a:xfrm>
+            <a:off x="3200400" y="4846320"/>
+            <a:ext cx="731520" cy="228600"/>
+          </a:xfrm>
+          <a:prstGeom prst="rect">
+            <a:avLst/>
+          </a:prstGeom>
+          <a:noFill/>
+          <a:ln/>
+        </p:spPr>
+        <p:txBody>
+          <a:bodyPr wrap="square" lIns="0" tIns="0" rIns="0" bIns="0" rtlCol="0" anchor="ctr"/>
+          <a:lstStyle/>
+          <a:p>
+            <a:pPr indent="0" marL="0">
+              <a:buNone/>
+            </a:pPr>
+            <a:r>
+              <a:rPr lang="en-US" sz="1500" b="1" dirty="0">
+                <a:solidFill>
+                  <a:srgbClr val="E4E4E8"/>
+                </a:solidFill>
+              </a:rPr>
+              <a:t>1只</a:t>
+            </a:r>
+            <a:endParaRPr lang="en-US" sz="1500" dirty="0"/>
+          </a:p>
+        </p:txBody>
+      </p:sp>
+      <p:sp>
+        <p:nvSpPr>
+          <p:cNvPr id="27" name="Text 25"/>
+          <p:cNvSpPr/>
+          <p:nvPr/>
+        </p:nvSpPr>
+        <p:spPr>
+          <a:xfrm>
+            <a:off x="4114800" y="4864608"/>
+            <a:ext cx="4572000" cy="228600"/>
+          </a:xfrm>
+          <a:prstGeom prst="rect">
+            <a:avLst/>
+          </a:prstGeom>
+          <a:noFill/>
+          <a:ln/>
+        </p:spPr>
+        <p:txBody>
+          <a:bodyPr wrap="square" lIns="0" tIns="0" rIns="0" bIns="0" rtlCol="0" anchor="ctr"/>
+          <a:lstStyle/>
+          <a:p>
+            <a:pPr indent="0" marL="0">
+              <a:buNone/>
+            </a:pPr>
+            <a:r>
+              <a:rPr lang="en-US" sz="1100" dirty="0">
+                <a:solidFill>
+                  <a:srgbClr val="8E8EA0"/>
+                </a:solidFill>
+              </a:rPr>
+              <a:t>欧林生物</a:t>
+            </a:r>
+            <a:endParaRPr lang="en-US" sz="1100" dirty="0"/>
+          </a:p>
+        </p:txBody>
+      </p:sp>
+      <p:sp>
+        <p:nvSpPr>
+          <p:cNvPr id="28" name="Text 26"/>
+          <p:cNvSpPr/>
+          <p:nvPr/>
+        </p:nvSpPr>
+        <p:spPr>
+          <a:xfrm>
+            <a:off x="457200" y="4754880"/>
+            <a:ext cx="8229600" cy="320040"/>
+          </a:xfrm>
+          <a:prstGeom prst="rect">
+            <a:avLst/>
+          </a:prstGeom>
+          <a:noFill/>
+          <a:ln/>
+        </p:spPr>
+        <p:txBody>
+          <a:bodyPr wrap="square" rtlCol="0" anchor="ctr"/>
+          <a:lstStyle/>
+          <a:p>
+            <a:pPr algn="ctr" indent="0" marL="0">
+              <a:buNone/>
+            </a:pPr>
+            <a:r>
+              <a:rPr lang="en-US" sz="1400" b="1" dirty="0">
+                <a:solidFill>
+                  <a:srgbClr val="3DD68C"/>
+                </a:solidFill>
+                <a:latin typeface="Arial Black" pitchFamily="34" charset="0"/>
+                <a:ea typeface="Arial Black" pitchFamily="34" charset="-122"/>
+                <a:cs typeface="Arial Black" pitchFamily="34" charset="-120"/>
+              </a:rPr>
+              <a:t>主仓位13/19只在3→4业绩兑现·甜蜜点集中</a:t>
+            </a:r>
             <a:endParaRPr lang="en-US" sz="1400" dirty="0"/>
-          </a:p>
-        </p:txBody>
-      </p:sp>
-      <p:sp>
-        <p:nvSpPr>
-          <p:cNvPr id="22" name="Text 20"/>
-          <p:cNvSpPr/>
-          <p:nvPr/>
-        </p:nvSpPr>
-        <p:spPr>
-          <a:xfrm>
-            <a:off x="4114800" y="4434840"/>
-            <a:ext cx="914400" cy="228600"/>
-          </a:xfrm>
-          <a:prstGeom prst="rect">
-            <a:avLst/>
-          </a:prstGeom>
-          <a:noFill/>
-          <a:ln/>
-        </p:spPr>
-        <p:txBody>
-          <a:bodyPr wrap="square" lIns="0" tIns="0" rIns="0" bIns="0" rtlCol="0" anchor="ctr"/>
-          <a:lstStyle/>
-          <a:p>
-            <a:pPr indent="0" marL="0">
-              <a:buNone/>
-            </a:pPr>
-            <a:r>
-              <a:rPr lang="en-US" sz="1600" b="1" dirty="0">
-                <a:solidFill>
-                  <a:srgbClr val="E4E4E8"/>
-                </a:solidFill>
-              </a:rPr>
-              <a:t>1只</a:t>
-            </a:r>
-            <a:endParaRPr lang="en-US" sz="1600" dirty="0"/>
-          </a:p>
-        </p:txBody>
-      </p:sp>
-      <p:sp>
-        <p:nvSpPr>
-          <p:cNvPr id="23" name="Text 21"/>
-          <p:cNvSpPr/>
-          <p:nvPr/>
-        </p:nvSpPr>
-        <p:spPr>
-          <a:xfrm>
-            <a:off x="457200" y="4645152"/>
-            <a:ext cx="7315200" cy="228600"/>
-          </a:xfrm>
-          <a:prstGeom prst="rect">
-            <a:avLst/>
-          </a:prstGeom>
-          <a:noFill/>
-          <a:ln/>
-        </p:spPr>
-        <p:txBody>
-          <a:bodyPr wrap="square" lIns="0" tIns="0" rIns="0" bIns="0" rtlCol="0" anchor="ctr"/>
-          <a:lstStyle/>
-          <a:p>
-            <a:pPr indent="0" marL="0">
-              <a:buNone/>
-            </a:pPr>
-            <a:r>
-              <a:rPr lang="en-US" sz="1100" dirty="0">
-                <a:solidFill>
-                  <a:srgbClr val="8E8EA0"/>
-                </a:solidFill>
-              </a:rPr>
-              <a:t>欧林 | 纯观察</a:t>
-            </a:r>
-            <a:endParaRPr lang="en-US" sz="1100" dirty="0"/>
           </a:p>
         </p:txBody>
       </p:sp>
@@ -5469,7 +5455,7 @@
                 <a:ea typeface="Arial Black" pitchFamily="34" charset="-122"/>
                 <a:cs typeface="Arial Black" pitchFamily="34" charset="-120"/>
               </a:rPr>
-              <a:t>六大卡点·覆盖全图</a:t>
+              <a:t>六大卡点·19只标的覆盖图</a:t>
             </a:r>
             <a:endParaRPr lang="en-US" sz="2600" dirty="0"/>
           </a:p>
@@ -5564,7 +5550,7 @@
         </p:nvSpPr>
         <p:spPr>
           <a:xfrm>
-            <a:off x="2926080" y="1261872"/>
+            <a:off x="2743200" y="1261872"/>
             <a:ext cx="3200400" cy="228600"/>
           </a:xfrm>
           <a:prstGeom prst="rect">
@@ -5581,14 +5567,14 @@
               <a:buNone/>
             </a:pPr>
             <a:r>
-              <a:rPr lang="en-US" sz="1300" dirty="0">
-                <a:solidFill>
-                  <a:srgbClr val="E4E4E8"/>
-                </a:solidFill>
-              </a:rPr>
-              <a:t>罗博/兴森</a:t>
-            </a:r>
-            <a:endParaRPr lang="en-US" sz="1300" dirty="0"/>
+              <a:rPr lang="en-US" sz="1200" dirty="0">
+                <a:solidFill>
+                  <a:srgbClr val="3DD68C"/>
+                </a:solidFill>
+              </a:rPr>
+              <a:t>持仓:罗博/兴森</a:t>
+            </a:r>
+            <a:endParaRPr lang="en-US" sz="1200" dirty="0"/>
           </a:p>
         </p:txBody>
       </p:sp>
@@ -5600,7 +5586,43 @@
         </p:nvSpPr>
         <p:spPr>
           <a:xfrm>
-            <a:off x="2926080" y="1490472"/>
+            <a:off x="5943600" y="1261872"/>
+            <a:ext cx="1828800" cy="228600"/>
+          </a:xfrm>
+          <a:prstGeom prst="rect">
+            <a:avLst/>
+          </a:prstGeom>
+          <a:noFill/>
+          <a:ln/>
+        </p:spPr>
+        <p:txBody>
+          <a:bodyPr wrap="square" lIns="0" tIns="0" rIns="0" bIns="0" rtlCol="0" anchor="ctr"/>
+          <a:lstStyle/>
+          <a:p>
+            <a:pPr indent="0" marL="0">
+              <a:buNone/>
+            </a:pPr>
+            <a:r>
+              <a:rPr lang="en-US" sz="1200" dirty="0">
+                <a:solidFill>
+                  <a:srgbClr val="4DA6FF"/>
+                </a:solidFill>
+              </a:rPr>
+              <a:t>观察:华丰</a:t>
+            </a:r>
+            <a:endParaRPr lang="en-US" sz="1200" dirty="0"/>
+          </a:p>
+        </p:txBody>
+      </p:sp>
+      <p:sp>
+        <p:nvSpPr>
+          <p:cNvPr id="8" name="Text 6"/>
+          <p:cNvSpPr/>
+          <p:nvPr/>
+        </p:nvSpPr>
+        <p:spPr>
+          <a:xfrm>
+            <a:off x="2743200" y="1490472"/>
             <a:ext cx="2743200" cy="201168"/>
           </a:xfrm>
           <a:prstGeom prst="rect">
@@ -5622,7 +5644,7 @@
                   <a:srgbClr val="8E8EA0"/>
                 </a:solidFill>
               </a:rPr>
-              <a:t>2026-2028 · ★★★★</a:t>
+              <a:t>★★★★</a:t>
             </a:r>
             <a:endParaRPr lang="en-US" sz="1100" dirty="0"/>
           </a:p>
@@ -5630,7 +5652,7 @@
       </p:sp>
       <p:sp>
         <p:nvSpPr>
-          <p:cNvPr id="8" name="Shape 6"/>
+          <p:cNvPr id="9" name="Shape 7"/>
           <p:cNvSpPr/>
           <p:nvPr/>
         </p:nvSpPr>
@@ -5652,7 +5674,7 @@
       </p:sp>
       <p:sp>
         <p:nvSpPr>
-          <p:cNvPr id="9" name="Text 7"/>
+          <p:cNvPr id="10" name="Text 8"/>
           <p:cNvSpPr/>
           <p:nvPr/>
         </p:nvSpPr>
@@ -5691,13 +5713,13 @@
       </p:sp>
       <p:sp>
         <p:nvSpPr>
-          <p:cNvPr id="10" name="Text 8"/>
-          <p:cNvSpPr/>
-          <p:nvPr/>
-        </p:nvSpPr>
-        <p:spPr>
-          <a:xfrm>
-            <a:off x="2926080" y="1920240"/>
+          <p:cNvPr id="11" name="Text 9"/>
+          <p:cNvSpPr/>
+          <p:nvPr/>
+        </p:nvSpPr>
+        <p:spPr>
+          <a:xfrm>
+            <a:off x="2743200" y="1920240"/>
             <a:ext cx="3200400" cy="228600"/>
           </a:xfrm>
           <a:prstGeom prst="rect">
@@ -5714,26 +5736,62 @@
               <a:buNone/>
             </a:pPr>
             <a:r>
-              <a:rPr lang="en-US" sz="1300" dirty="0">
-                <a:solidFill>
-                  <a:srgbClr val="E4E4E8"/>
-                </a:solidFill>
-              </a:rPr>
-              <a:t>澜起</a:t>
-            </a:r>
-            <a:endParaRPr lang="en-US" sz="1300" dirty="0"/>
-          </a:p>
-        </p:txBody>
-      </p:sp>
-      <p:sp>
-        <p:nvSpPr>
-          <p:cNvPr id="11" name="Text 9"/>
-          <p:cNvSpPr/>
-          <p:nvPr/>
-        </p:nvSpPr>
-        <p:spPr>
-          <a:xfrm>
-            <a:off x="2926080" y="2148840"/>
+              <a:rPr lang="en-US" sz="1200" dirty="0">
+                <a:solidFill>
+                  <a:srgbClr val="3DD68C"/>
+                </a:solidFill>
+              </a:rPr>
+              <a:t>持仓:澜起</a:t>
+            </a:r>
+            <a:endParaRPr lang="en-US" sz="1200" dirty="0"/>
+          </a:p>
+        </p:txBody>
+      </p:sp>
+      <p:sp>
+        <p:nvSpPr>
+          <p:cNvPr id="12" name="Text 10"/>
+          <p:cNvSpPr/>
+          <p:nvPr/>
+        </p:nvSpPr>
+        <p:spPr>
+          <a:xfrm>
+            <a:off x="5943600" y="1920240"/>
+            <a:ext cx="1828800" cy="228600"/>
+          </a:xfrm>
+          <a:prstGeom prst="rect">
+            <a:avLst/>
+          </a:prstGeom>
+          <a:noFill/>
+          <a:ln/>
+        </p:spPr>
+        <p:txBody>
+          <a:bodyPr wrap="square" lIns="0" tIns="0" rIns="0" bIns="0" rtlCol="0" anchor="ctr"/>
+          <a:lstStyle/>
+          <a:p>
+            <a:pPr indent="0" marL="0">
+              <a:buNone/>
+            </a:pPr>
+            <a:r>
+              <a:rPr lang="en-US" sz="1200" dirty="0">
+                <a:solidFill>
+                  <a:srgbClr val="4DA6FF"/>
+                </a:solidFill>
+              </a:rPr>
+              <a:t>观察:锡业</a:t>
+            </a:r>
+            <a:endParaRPr lang="en-US" sz="1200" dirty="0"/>
+          </a:p>
+        </p:txBody>
+      </p:sp>
+      <p:sp>
+        <p:nvSpPr>
+          <p:cNvPr id="13" name="Text 11"/>
+          <p:cNvSpPr/>
+          <p:nvPr/>
+        </p:nvSpPr>
+        <p:spPr>
+          <a:xfrm>
+            <a:off x="2743200" y="2148840"/>
             <a:ext cx="2743200" cy="201168"/>
           </a:xfrm>
           <a:prstGeom prst="rect">
@@ -5755,7 +5813,7 @@
                   <a:srgbClr val="8E8EA0"/>
                 </a:solidFill>
               </a:rPr>
-              <a:t>2026-2028 · ★★★★</a:t>
+              <a:t>★★★★</a:t>
             </a:r>
             <a:endParaRPr lang="en-US" sz="1100" dirty="0"/>
           </a:p>
@@ -5763,7 +5821,7 @@
       </p:sp>
       <p:sp>
         <p:nvSpPr>
-          <p:cNvPr id="12" name="Shape 10"/>
+          <p:cNvPr id="14" name="Shape 12"/>
           <p:cNvSpPr/>
           <p:nvPr/>
         </p:nvSpPr>
@@ -5785,7 +5843,7 @@
       </p:sp>
       <p:sp>
         <p:nvSpPr>
-          <p:cNvPr id="13" name="Text 11"/>
+          <p:cNvPr id="15" name="Text 13"/>
           <p:cNvSpPr/>
           <p:nvPr/>
         </p:nvSpPr>
@@ -5824,13 +5882,13 @@
       </p:sp>
       <p:sp>
         <p:nvSpPr>
-          <p:cNvPr id="14" name="Text 12"/>
-          <p:cNvSpPr/>
-          <p:nvPr/>
-        </p:nvSpPr>
-        <p:spPr>
-          <a:xfrm>
-            <a:off x="2926080" y="2578608"/>
+          <p:cNvPr id="16" name="Text 14"/>
+          <p:cNvSpPr/>
+          <p:nvPr/>
+        </p:nvSpPr>
+        <p:spPr>
+          <a:xfrm>
+            <a:off x="2743200" y="2578608"/>
             <a:ext cx="3200400" cy="228600"/>
           </a:xfrm>
           <a:prstGeom prst="rect">
@@ -5847,26 +5905,62 @@
               <a:buNone/>
             </a:pPr>
             <a:r>
-              <a:rPr lang="en-US" sz="1300" dirty="0">
-                <a:solidFill>
-                  <a:srgbClr val="E4E4E8"/>
-                </a:solidFill>
-              </a:rPr>
-              <a:t>澜起</a:t>
-            </a:r>
-            <a:endParaRPr lang="en-US" sz="1300" dirty="0"/>
-          </a:p>
-        </p:txBody>
-      </p:sp>
-      <p:sp>
-        <p:nvSpPr>
-          <p:cNvPr id="15" name="Text 13"/>
-          <p:cNvSpPr/>
-          <p:nvPr/>
-        </p:nvSpPr>
-        <p:spPr>
-          <a:xfrm>
-            <a:off x="2926080" y="2807208"/>
+              <a:rPr lang="en-US" sz="1200" dirty="0">
+                <a:solidFill>
+                  <a:srgbClr val="3DD68C"/>
+                </a:solidFill>
+              </a:rPr>
+              <a:t>持仓:澜起(断层)</a:t>
+            </a:r>
+            <a:endParaRPr lang="en-US" sz="1200" dirty="0"/>
+          </a:p>
+        </p:txBody>
+      </p:sp>
+      <p:sp>
+        <p:nvSpPr>
+          <p:cNvPr id="17" name="Text 15"/>
+          <p:cNvSpPr/>
+          <p:nvPr/>
+        </p:nvSpPr>
+        <p:spPr>
+          <a:xfrm>
+            <a:off x="5943600" y="2578608"/>
+            <a:ext cx="1828800" cy="228600"/>
+          </a:xfrm>
+          <a:prstGeom prst="rect">
+            <a:avLst/>
+          </a:prstGeom>
+          <a:noFill/>
+          <a:ln/>
+        </p:spPr>
+        <p:txBody>
+          <a:bodyPr wrap="square" lIns="0" tIns="0" rIns="0" bIns="0" rtlCol="0" anchor="ctr"/>
+          <a:lstStyle/>
+          <a:p>
+            <a:pPr indent="0" marL="0">
+              <a:buNone/>
+            </a:pPr>
+            <a:r>
+              <a:rPr lang="en-US" sz="1200" dirty="0">
+                <a:solidFill>
+                  <a:srgbClr val="4DA6FF"/>
+                </a:solidFill>
+              </a:rPr>
+              <a:t>观察:—</a:t>
+            </a:r>
+            <a:endParaRPr lang="en-US" sz="1200" dirty="0"/>
+          </a:p>
+        </p:txBody>
+      </p:sp>
+      <p:sp>
+        <p:nvSpPr>
+          <p:cNvPr id="18" name="Text 16"/>
+          <p:cNvSpPr/>
+          <p:nvPr/>
+        </p:nvSpPr>
+        <p:spPr>
+          <a:xfrm>
+            <a:off x="2743200" y="2807208"/>
             <a:ext cx="2743200" cy="201168"/>
           </a:xfrm>
           <a:prstGeom prst="rect">
@@ -5888,7 +5982,7 @@
                   <a:srgbClr val="8E8EA0"/>
                 </a:solidFill>
               </a:rPr>
-              <a:t>贯穿 · ★★★★★</a:t>
+              <a:t>★★★★★</a:t>
             </a:r>
             <a:endParaRPr lang="en-US" sz="1100" dirty="0"/>
           </a:p>
@@ -5896,7 +5990,7 @@
       </p:sp>
       <p:sp>
         <p:nvSpPr>
-          <p:cNvPr id="16" name="Shape 14"/>
+          <p:cNvPr id="19" name="Shape 17"/>
           <p:cNvSpPr/>
           <p:nvPr/>
         </p:nvSpPr>
@@ -5918,7 +6012,7 @@
       </p:sp>
       <p:sp>
         <p:nvSpPr>
-          <p:cNvPr id="17" name="Text 15"/>
+          <p:cNvPr id="20" name="Text 18"/>
           <p:cNvSpPr/>
           <p:nvPr/>
         </p:nvSpPr>
@@ -5957,13 +6051,13 @@
       </p:sp>
       <p:sp>
         <p:nvSpPr>
-          <p:cNvPr id="18" name="Text 16"/>
-          <p:cNvSpPr/>
-          <p:nvPr/>
-        </p:nvSpPr>
-        <p:spPr>
-          <a:xfrm>
-            <a:off x="2926080" y="3236976"/>
+          <p:cNvPr id="21" name="Text 19"/>
+          <p:cNvSpPr/>
+          <p:nvPr/>
+        </p:nvSpPr>
+        <p:spPr>
+          <a:xfrm>
+            <a:off x="2743200" y="3236976"/>
             <a:ext cx="3200400" cy="228600"/>
           </a:xfrm>
           <a:prstGeom prst="rect">
@@ -5980,26 +6074,62 @@
               <a:buNone/>
             </a:pPr>
             <a:r>
-              <a:rPr lang="en-US" sz="1300" dirty="0">
-                <a:solidFill>
-                  <a:srgbClr val="E4E4E8"/>
-                </a:solidFill>
-              </a:rPr>
-              <a:t>兴森/胜宏</a:t>
-            </a:r>
-            <a:endParaRPr lang="en-US" sz="1300" dirty="0"/>
-          </a:p>
-        </p:txBody>
-      </p:sp>
-      <p:sp>
-        <p:nvSpPr>
-          <p:cNvPr id="19" name="Text 17"/>
-          <p:cNvSpPr/>
-          <p:nvPr/>
-        </p:nvSpPr>
-        <p:spPr>
-          <a:xfrm>
-            <a:off x="2926080" y="3465576"/>
+              <a:rPr lang="en-US" sz="1200" dirty="0">
+                <a:solidFill>
+                  <a:srgbClr val="3DD68C"/>
+                </a:solidFill>
+              </a:rPr>
+              <a:t>持仓:兴森</a:t>
+            </a:r>
+            <a:endParaRPr lang="en-US" sz="1200" dirty="0"/>
+          </a:p>
+        </p:txBody>
+      </p:sp>
+      <p:sp>
+        <p:nvSpPr>
+          <p:cNvPr id="22" name="Text 20"/>
+          <p:cNvSpPr/>
+          <p:nvPr/>
+        </p:nvSpPr>
+        <p:spPr>
+          <a:xfrm>
+            <a:off x="5943600" y="3236976"/>
+            <a:ext cx="1828800" cy="228600"/>
+          </a:xfrm>
+          <a:prstGeom prst="rect">
+            <a:avLst/>
+          </a:prstGeom>
+          <a:noFill/>
+          <a:ln/>
+        </p:spPr>
+        <p:txBody>
+          <a:bodyPr wrap="square" lIns="0" tIns="0" rIns="0" bIns="0" rtlCol="0" anchor="ctr"/>
+          <a:lstStyle/>
+          <a:p>
+            <a:pPr indent="0" marL="0">
+              <a:buNone/>
+            </a:pPr>
+            <a:r>
+              <a:rPr lang="en-US" sz="1200" dirty="0">
+                <a:solidFill>
+                  <a:srgbClr val="4DA6FF"/>
+                </a:solidFill>
+              </a:rPr>
+              <a:t>观察:胜宏</a:t>
+            </a:r>
+            <a:endParaRPr lang="en-US" sz="1200" dirty="0"/>
+          </a:p>
+        </p:txBody>
+      </p:sp>
+      <p:sp>
+        <p:nvSpPr>
+          <p:cNvPr id="23" name="Text 21"/>
+          <p:cNvSpPr/>
+          <p:nvPr/>
+        </p:nvSpPr>
+        <p:spPr>
+          <a:xfrm>
+            <a:off x="2743200" y="3465576"/>
             <a:ext cx="2743200" cy="201168"/>
           </a:xfrm>
           <a:prstGeom prst="rect">
@@ -6021,7 +6151,7 @@
                   <a:srgbClr val="8E8EA0"/>
                 </a:solidFill>
               </a:rPr>
-              <a:t>2026-2027 · ★★★</a:t>
+              <a:t>★★★</a:t>
             </a:r>
             <a:endParaRPr lang="en-US" sz="1100" dirty="0"/>
           </a:p>
@@ -6029,7 +6159,7 @@
       </p:sp>
       <p:sp>
         <p:nvSpPr>
-          <p:cNvPr id="20" name="Shape 18"/>
+          <p:cNvPr id="24" name="Shape 22"/>
           <p:cNvSpPr/>
           <p:nvPr/>
         </p:nvSpPr>
@@ -6051,7 +6181,7 @@
       </p:sp>
       <p:sp>
         <p:nvSpPr>
-          <p:cNvPr id="21" name="Text 19"/>
+          <p:cNvPr id="25" name="Text 23"/>
           <p:cNvSpPr/>
           <p:nvPr/>
         </p:nvSpPr>
@@ -6090,13 +6220,13 @@
       </p:sp>
       <p:sp>
         <p:nvSpPr>
-          <p:cNvPr id="22" name="Text 20"/>
-          <p:cNvSpPr/>
-          <p:nvPr/>
-        </p:nvSpPr>
-        <p:spPr>
-          <a:xfrm>
-            <a:off x="2926080" y="3895344"/>
+          <p:cNvPr id="26" name="Text 24"/>
+          <p:cNvSpPr/>
+          <p:nvPr/>
+        </p:nvSpPr>
+        <p:spPr>
+          <a:xfrm>
+            <a:off x="2743200" y="3895344"/>
             <a:ext cx="3200400" cy="228600"/>
           </a:xfrm>
           <a:prstGeom prst="rect">
@@ -6113,26 +6243,62 @@
               <a:buNone/>
             </a:pPr>
             <a:r>
-              <a:rPr lang="en-US" sz="1300" dirty="0">
-                <a:solidFill>
-                  <a:srgbClr val="E4E4E8"/>
-                </a:solidFill>
-              </a:rPr>
-              <a:t>汇绿/罗博/中际</a:t>
-            </a:r>
-            <a:endParaRPr lang="en-US" sz="1300" dirty="0"/>
-          </a:p>
-        </p:txBody>
-      </p:sp>
-      <p:sp>
-        <p:nvSpPr>
-          <p:cNvPr id="23" name="Text 21"/>
-          <p:cNvSpPr/>
-          <p:nvPr/>
-        </p:nvSpPr>
-        <p:spPr>
-          <a:xfrm>
-            <a:off x="2926080" y="4123944"/>
+              <a:rPr lang="en-US" sz="1200" dirty="0">
+                <a:solidFill>
+                  <a:srgbClr val="3DD68C"/>
+                </a:solidFill>
+              </a:rPr>
+              <a:t>持仓:汇绿/罗博</a:t>
+            </a:r>
+            <a:endParaRPr lang="en-US" sz="1200" dirty="0"/>
+          </a:p>
+        </p:txBody>
+      </p:sp>
+      <p:sp>
+        <p:nvSpPr>
+          <p:cNvPr id="27" name="Text 25"/>
+          <p:cNvSpPr/>
+          <p:nvPr/>
+        </p:nvSpPr>
+        <p:spPr>
+          <a:xfrm>
+            <a:off x="5943600" y="3895344"/>
+            <a:ext cx="1828800" cy="228600"/>
+          </a:xfrm>
+          <a:prstGeom prst="rect">
+            <a:avLst/>
+          </a:prstGeom>
+          <a:noFill/>
+          <a:ln/>
+        </p:spPr>
+        <p:txBody>
+          <a:bodyPr wrap="square" lIns="0" tIns="0" rIns="0" bIns="0" rtlCol="0" anchor="ctr"/>
+          <a:lstStyle/>
+          <a:p>
+            <a:pPr indent="0" marL="0">
+              <a:buNone/>
+            </a:pPr>
+            <a:r>
+              <a:rPr lang="en-US" sz="1200" dirty="0">
+                <a:solidFill>
+                  <a:srgbClr val="4DA6FF"/>
+                </a:solidFill>
+              </a:rPr>
+              <a:t>观察:中际/胜宏</a:t>
+            </a:r>
+            <a:endParaRPr lang="en-US" sz="1200" dirty="0"/>
+          </a:p>
+        </p:txBody>
+      </p:sp>
+      <p:sp>
+        <p:nvSpPr>
+          <p:cNvPr id="28" name="Text 26"/>
+          <p:cNvSpPr/>
+          <p:nvPr/>
+        </p:nvSpPr>
+        <p:spPr>
+          <a:xfrm>
+            <a:off x="2743200" y="4123944"/>
             <a:ext cx="2743200" cy="201168"/>
           </a:xfrm>
           <a:prstGeom prst="rect">
@@ -6154,7 +6320,7 @@
                   <a:srgbClr val="8E8EA0"/>
                 </a:solidFill>
               </a:rPr>
-              <a:t>2027-2028 · ★★★★★</a:t>
+              <a:t>★★★★★</a:t>
             </a:r>
             <a:endParaRPr lang="en-US" sz="1100" dirty="0"/>
           </a:p>
@@ -6162,7 +6328,7 @@
       </p:sp>
       <p:sp>
         <p:nvSpPr>
-          <p:cNvPr id="24" name="Shape 22"/>
+          <p:cNvPr id="29" name="Shape 27"/>
           <p:cNvSpPr/>
           <p:nvPr/>
         </p:nvSpPr>
@@ -6189,7 +6355,7 @@
       </p:sp>
       <p:sp>
         <p:nvSpPr>
-          <p:cNvPr id="25" name="Text 23"/>
+          <p:cNvPr id="30" name="Text 28"/>
           <p:cNvSpPr/>
           <p:nvPr/>
         </p:nvSpPr>
@@ -6214,7 +6380,7 @@
             <a:r>
               <a:rPr lang="en-US" sz="1400" b="1" dirty="0">
                 <a:solidFill>
-                  <a:srgbClr val="4DA6FF"/>
+                  <a:srgbClr val="FF5656"/>
                 </a:solidFill>
                 <a:latin typeface="Arial Black" pitchFamily="34" charset="0"/>
                 <a:ea typeface="Arial Black" pitchFamily="34" charset="-122"/>
@@ -6228,13 +6394,13 @@
       </p:sp>
       <p:sp>
         <p:nvSpPr>
-          <p:cNvPr id="26" name="Text 24"/>
-          <p:cNvSpPr/>
-          <p:nvPr/>
-        </p:nvSpPr>
-        <p:spPr>
-          <a:xfrm>
-            <a:off x="2926080" y="4553712"/>
+          <p:cNvPr id="31" name="Text 29"/>
+          <p:cNvSpPr/>
+          <p:nvPr/>
+        </p:nvSpPr>
+        <p:spPr>
+          <a:xfrm>
+            <a:off x="2743200" y="4553712"/>
             <a:ext cx="3200400" cy="228600"/>
           </a:xfrm>
           <a:prstGeom prst="rect">
@@ -6251,26 +6417,62 @@
               <a:buNone/>
             </a:pPr>
             <a:r>
-              <a:rPr lang="en-US" sz="1300" dirty="0">
-                <a:solidFill>
-                  <a:srgbClr val="E4E4E8"/>
-                </a:solidFill>
-              </a:rPr>
-              <a:t>三祥/泰和/巨化(间接)</a:t>
-            </a:r>
-            <a:endParaRPr lang="en-US" sz="1300" dirty="0"/>
-          </a:p>
-        </p:txBody>
-      </p:sp>
-      <p:sp>
-        <p:nvSpPr>
-          <p:cNvPr id="27" name="Text 25"/>
-          <p:cNvSpPr/>
-          <p:nvPr/>
-        </p:nvSpPr>
-        <p:spPr>
-          <a:xfrm>
-            <a:off x="2926080" y="4782312"/>
+              <a:rPr lang="en-US" sz="1200" dirty="0">
+                <a:solidFill>
+                  <a:srgbClr val="3DD68C"/>
+                </a:solidFill>
+              </a:rPr>
+              <a:t>持仓:三祥(间接)/泰和(间接)</a:t>
+            </a:r>
+            <a:endParaRPr lang="en-US" sz="1200" dirty="0"/>
+          </a:p>
+        </p:txBody>
+      </p:sp>
+      <p:sp>
+        <p:nvSpPr>
+          <p:cNvPr id="32" name="Text 30"/>
+          <p:cNvSpPr/>
+          <p:nvPr/>
+        </p:nvSpPr>
+        <p:spPr>
+          <a:xfrm>
+            <a:off x="5943600" y="4553712"/>
+            <a:ext cx="1828800" cy="228600"/>
+          </a:xfrm>
+          <a:prstGeom prst="rect">
+            <a:avLst/>
+          </a:prstGeom>
+          <a:noFill/>
+          <a:ln/>
+        </p:spPr>
+        <p:txBody>
+          <a:bodyPr wrap="square" lIns="0" tIns="0" rIns="0" bIns="0" rtlCol="0" anchor="ctr"/>
+          <a:lstStyle/>
+          <a:p>
+            <a:pPr indent="0" marL="0">
+              <a:buNone/>
+            </a:pPr>
+            <a:r>
+              <a:rPr lang="en-US" sz="1200" dirty="0">
+                <a:solidFill>
+                  <a:srgbClr val="4DA6FF"/>
+                </a:solidFill>
+              </a:rPr>
+              <a:t>观察:—</a:t>
+            </a:r>
+            <a:endParaRPr lang="en-US" sz="1200" dirty="0"/>
+          </a:p>
+        </p:txBody>
+      </p:sp>
+      <p:sp>
+        <p:nvSpPr>
+          <p:cNvPr id="33" name="Text 31"/>
+          <p:cNvSpPr/>
+          <p:nvPr/>
+        </p:nvSpPr>
+        <p:spPr>
+          <a:xfrm>
+            <a:off x="2743200" y="4782312"/>
             <a:ext cx="2743200" cy="201168"/>
           </a:xfrm>
           <a:prstGeom prst="rect">
@@ -6292,7 +6494,7 @@
                   <a:srgbClr val="8E8EA0"/>
                 </a:solidFill>
               </a:rPr>
-              <a:t>2027 · ★★</a:t>
+              <a:t>★</a:t>
             </a:r>
             <a:endParaRPr lang="en-US" sz="1100" dirty="0"/>
           </a:p>
@@ -6300,7 +6502,7 @@
       </p:sp>
       <p:sp>
         <p:nvSpPr>
-          <p:cNvPr id="28" name="Text 26"/>
+          <p:cNvPr id="34" name="Text 32"/>
           <p:cNvSpPr/>
           <p:nvPr/>
         </p:nvSpPr>
@@ -6328,7 +6530,7 @@
                   <a:srgbClr val="FF5656"/>
                 </a:solidFill>
               </a:rPr>
-              <a:t>⑥800V供电+高频材料是唯一覆盖最弱的卡点——未来跟踪池扩容重点方向</a:t>
+              <a:t>⑥800V供电+高频材料=唯一薄弱卡点·未来跟踪池扩容方向</a:t>
             </a:r>
             <a:endParaRPr lang="en-US" sz="1300" dirty="0"/>
           </a:p>
@@ -6521,7 +6723,7 @@
                   <a:srgbClr val="E4E4E8"/>
                 </a:solidFill>
               </a:rPr>
-              <a:t>12只核心标的</a:t>
+              <a:t>12只核心持仓</a:t>
             </a:r>
             <a:endParaRPr lang="en-US" sz="1300" dirty="0"/>
           </a:p>
@@ -6935,7 +7137,7 @@
                   <a:srgbClr val="E4E4E8"/>
                 </a:solidFill>
               </a:rPr>
-              <a:t>中际/工业富联/炬芯等</a:t>
+              <a:t>中际/工业富联/立讯/华丰</a:t>
             </a:r>
             <a:endParaRPr lang="en-US" sz="1300" dirty="0"/>
           </a:p>
@@ -7109,7 +7311,7 @@
                   <a:srgbClr val="8E8EA0"/>
                 </a:solidFill>
               </a:rPr>
-              <a:t>海峡恢复通航后减仓</a:t>
+              <a:t>海峡恢复通航1-2月内减仓</a:t>
             </a:r>
             <a:endParaRPr lang="en-US" sz="1100" dirty="0"/>
           </a:p>
